--- a/StockDesk_DevOps_Capstone.pptx
+++ b/StockDesk_DevOps_Capstone.pptx
@@ -120,60 +120,60 @@
   <p:extLst>
     <p:ext uri="{521415D9-36F7-43E2-AB2F-B90AF26B5E84}">
       <p14:sectionLst xmlns:p14="http://schemas.microsoft.com/office/powerpoint/2010/main">
-        <p14:section name="Intro" id="{14ffb901-f951-ab44-89b9-b5d4318f0c9e}">
+        <p14:section name="Intro" id="{04984ecf-a4fc-f23a-333f-7eb57a1e7e20}">
           <p14:sldIdLst>
             <p14:sldId id="256"/>
           </p14:sldIdLst>
         </p14:section>
-        <p14:section name="Overview" id="{cae48c86-b0c0-f157-3669-d11e9241d74d}">
+        <p14:section name="Overview" id="{8f79db12-a2b5-3f38-44ff-d8439d791dd7}">
           <p14:sldIdLst>
             <p14:sldId id="257"/>
             <p14:sldId id="259"/>
           </p14:sldIdLst>
         </p14:section>
-        <p14:section name="Architecture" id="{ca977ba6-cc28-5561-cb37-783bc02c45c1}">
+        <p14:section name="Architecture" id="{f54112de-1811-13aa-45d0-c484006d51a9}">
           <p14:sldIdLst>
             <p14:sldId id="258"/>
           </p14:sldIdLst>
         </p14:section>
-        <p14:section name="Application" id="{39a5e260-9afa-8cbc-e4c7-830a2d6f3a80}">
+        <p14:section name="Application" id="{81f53874-e8d3-df0e-a34a-73055ca1fb36}">
           <p14:sldIdLst>
             <p14:sldId id="260"/>
           </p14:sldIdLst>
         </p14:section>
-        <p14:section name="Build &amp; Ship" id="{6b348ecd-7845-01b7-d04a-92976e2fc4cc}">
+        <p14:section name="Build &amp; Ship" id="{7a640178-f0d2-8398-a313-50eab55fb6f9}">
           <p14:sldIdLst>
             <p14:sldId id="261"/>
             <p14:sldId id="262"/>
           </p14:sldIdLst>
         </p14:section>
-        <p14:section name="Security" id="{f600b0fd-3d57-d12a-33ca-b71db15d7697}">
+        <p14:section name="Security" id="{04934f06-401d-2082-3684-15ff33cd740c}">
           <p14:sldIdLst>
             <p14:sldId id="263"/>
           </p14:sldIdLst>
         </p14:section>
-        <p14:section name="Infrastructure" id="{d5d11f7a-2fbc-6cf3-c103-17fc532a70f4}">
+        <p14:section name="Infrastructure" id="{ac262668-8425-50fd-4882-05b0b99f6327}">
           <p14:sldIdLst>
             <p14:sldId id="264"/>
             <p14:sldId id="265"/>
           </p14:sldIdLst>
         </p14:section>
-        <p14:section name="Observability" id="{9dff7bd6-ed3a-d777-3738-5e2945965795}">
+        <p14:section name="Observability" id="{aede1c35-f4e4-1489-4d23-8b678907c0c2}">
           <p14:sldIdLst>
             <p14:sldId id="266"/>
           </p14:sldIdLst>
         </p14:section>
-        <p14:section name="GitOps" id="{81c0e9ef-ec0a-0f30-0315-1e12012753a8}">
+        <p14:section name="GitOps" id="{d6db428b-eb13-3bc0-b1d1-00c202d00ee8}">
           <p14:sldIdLst>
             <p14:sldId id="267"/>
           </p14:sldIdLst>
         </p14:section>
-        <p14:section name="Results" id="{a1fd7365-fe7b-8f86-47d2-26f253f8e1d8}">
+        <p14:section name="Results" id="{f163979e-f589-3ee0-5178-1e73b94328eb}">
           <p14:sldIdLst>
             <p14:sldId id="268"/>
           </p14:sldIdLst>
         </p14:section>
-        <p14:section name="Close" id="{38ca97f7-0d45-b021-fd9e-e5b23d62ba39}">
+        <p14:section name="Close" id="{28ad12f4-83b3-2368-5e53-79e9eae1b57e}">
           <p14:sldIdLst>
             <p14:sldId id="269"/>
           </p14:sldIdLst>
@@ -185,242 +185,6 @@
     </p:ext>
   </p:extLst>
 </p:presentation>
-</file>
-
-<file path=ppt/charts/chart1.xml><?xml version="1.0" encoding="utf-8"?>
-<c:chartSpace xmlns:c="http://schemas.openxmlformats.org/drawingml/2006/chart" xmlns:a="http://schemas.openxmlformats.org/drawingml/2006/main" xmlns:r="http://schemas.openxmlformats.org/officeDocument/2006/relationships">
-  <c:date1904 val="0"/>
-  <c:roundedCorners val="1"/>
-  <c:chart>
-    <c:autoTitleDeleted val="1"/>
-    <c:plotArea>
-      <c:layout/>
-      <c:barChart>
-        <c:barDir val="bar"/>
-        <c:grouping val="clustered"/>
-        <c:varyColors val="0"/>
-        <c:ser>
-          <c:idx val="0"/>
-          <c:order val="0"/>
-          <c:tx>
-            <c:strRef>
-              <c:f>Sheet1!$B$1</c:f>
-              <c:strCache>
-                <c:ptCount val="1"/>
-                <c:pt idx="0">
-                  <c:v>req/s</c:v>
-                </c:pt>
-              </c:strCache>
-            </c:strRef>
-          </c:tx>
-          <c:spPr>
-            <a:solidFill>
-              <a:srgbClr val="4F46E5"/>
-            </a:solidFill>
-            <a:effectLst/>
-          </c:spPr>
-          <c:invertIfNegative val="0"/>
-          <c:dLbls>
-            <c:numFmt formatCode="0.00" sourceLinked="0"/>
-            <c:txPr>
-              <a:bodyPr/>
-              <a:lstStyle/>
-              <a:p>
-                <a:pPr>
-                  <a:defRPr b="0" i="0" strike="noStrike" sz="1100" u="none">
-                    <a:solidFill>
-                      <a:srgbClr val="141B2D"/>
-                    </a:solidFill>
-                    <a:latin typeface="+mn-lt"/>
-                  </a:defRPr>
-                </a:pPr>
-              </a:p>
-            </c:txPr>
-            <c:showLegendKey val="0"/>
-            <c:showVal val="1"/>
-            <c:showCatName val="0"/>
-            <c:showSerName val="0"/>
-            <c:showPercent val="0"/>
-            <c:showBubbleSize val="0"/>
-            <c:showLeaderLines val="0"/>
-          </c:dLbls>
-          <c:cat>
-            <c:multiLvlStrRef>
-              <c:f>Sheet1!$A$2:$A$5</c:f>
-              <c:multiLvlStrCache>
-                <c:ptCount val="4"/>
-                <c:lvl>
-                  <c:pt idx="0">
-                    <c:v>/api/products</c:v>
-                  </c:pt>
-                  <c:pt idx="1">
-                    <c:v>/products/stats</c:v>
-                  </c:pt>
-                  <c:pt idx="2">
-                    <c:v>/health</c:v>
-                  </c:pt>
-                  <c:pt idx="3">
-                    <c:v>/ready</c:v>
-                  </c:pt>
-                </c:lvl>
-              </c:multiLvlStrCache>
-            </c:multiLvlStrRef>
-          </c:cat>
-          <c:val>
-            <c:numRef>
-              <c:f>Sheet1!$B$2:$B$5</c:f>
-              <c:numCache>
-                <c:formatCode>General</c:formatCode>
-                <c:ptCount val="4"/>
-                <c:pt idx="0">
-                  <c:v>0.24</c:v>
-                </c:pt>
-                <c:pt idx="1">
-                  <c:v>0.18</c:v>
-                </c:pt>
-                <c:pt idx="2">
-                  <c:v>0.11</c:v>
-                </c:pt>
-                <c:pt idx="3">
-                  <c:v>0.09</c:v>
-                </c:pt>
-              </c:numCache>
-            </c:numRef>
-          </c:val>
-        </c:ser>
-        <c:dLbls>
-          <c:numFmt formatCode="0.00" sourceLinked="0"/>
-          <c:txPr>
-            <a:bodyPr/>
-            <a:lstStyle/>
-            <a:p>
-              <a:pPr>
-                <a:defRPr b="0" i="0" strike="noStrike" sz="1100" u="none">
-                  <a:solidFill>
-                    <a:srgbClr val="141B2D"/>
-                  </a:solidFill>
-                  <a:latin typeface="+mn-lt"/>
-                </a:defRPr>
-              </a:pPr>
-            </a:p>
-          </c:txPr>
-          <c:showLegendKey val="0"/>
-          <c:showVal val="1"/>
-          <c:showCatName val="0"/>
-          <c:showSerName val="0"/>
-          <c:showPercent val="0"/>
-          <c:showBubbleSize val="0"/>
-          <c:showLeaderLines val="0"/>
-        </c:dLbls>
-        <c:gapWidth val="60"/>
-        <c:overlap val="0"/>
-        <c:axId val="2094734554"/>
-        <c:axId val="2094734552"/>
-        <c:axId val="2094734556"/>
-      </c:barChart>
-      <c:catAx>
-        <c:axId val="2094734554"/>
-        <c:scaling>
-          <c:orientation val="minMax"/>
-        </c:scaling>
-        <c:delete val="0"/>
-        <c:axPos val="l"/>
-        <c:numFmt formatCode="General" sourceLinked="1"/>
-        <c:majorTickMark val="out"/>
-        <c:minorTickMark val="none"/>
-        <c:tickLblPos val="nextTo"/>
-        <c:spPr>
-          <a:ln w="12700" cap="flat">
-            <a:solidFill>
-              <a:srgbClr val="888888"/>
-            </a:solidFill>
-            <a:prstDash val="solid"/>
-            <a:round/>
-          </a:ln>
-        </c:spPr>
-        <c:txPr>
-          <a:bodyPr/>
-          <a:lstStyle/>
-          <a:p>
-            <a:pPr>
-              <a:defRPr sz="1100" b="0" i="0" u="none" strike="noStrike">
-                <a:solidFill>
-                  <a:srgbClr val="6B7280"/>
-                </a:solidFill>
-                <a:latin typeface="+mn-lt"/>
-              </a:defRPr>
-            </a:pPr>
-            <a:endParaRPr lang="en-US"/>
-          </a:p>
-        </c:txPr>
-        <c:crossAx val="2094734552"/>
-        <c:crosses val="autoZero"/>
-        <c:auto val="1"/>
-        <c:lblAlgn val="ctr"/>
-        <c:noMultiLvlLbl val="1"/>
-      </c:catAx>
-      <c:valAx>
-        <c:axId val="2094734552"/>
-        <c:scaling>
-          <c:orientation val="minMax"/>
-          <c:min val="0"/>
-        </c:scaling>
-        <c:delete val="1"/>
-        <c:axPos val="b"/>
-        <c:numFmt formatCode="General" sourceLinked="0"/>
-        <c:majorTickMark val="out"/>
-        <c:minorTickMark val="none"/>
-        <c:tickLblPos val="low"/>
-        <c:spPr>
-          <a:ln w="12700" cap="flat">
-            <a:solidFill>
-              <a:srgbClr val="888888"/>
-            </a:solidFill>
-            <a:prstDash val="solid"/>
-            <a:round/>
-          </a:ln>
-        </c:spPr>
-        <c:txPr>
-          <a:bodyPr/>
-          <a:lstStyle/>
-          <a:p>
-            <a:pPr>
-              <a:defRPr sz="1200" b="0" i="0" u="none" strike="noStrike">
-                <a:solidFill>
-                  <a:srgbClr val="000000"/>
-                </a:solidFill>
-                <a:latin typeface="Arial"/>
-              </a:defRPr>
-            </a:pPr>
-            <a:endParaRPr lang="en-US"/>
-          </a:p>
-        </c:txPr>
-        <c:crossAx val="2094734554"/>
-        <c:crosses val="autoZero"/>
-        <c:crossBetween val="between"/>
-      </c:valAx>
-      <c:spPr>
-        <a:noFill/>
-        <a:ln>
-          <a:noFill/>
-        </a:ln>
-        <a:effectLst/>
-      </c:spPr>
-    </c:plotArea>
-    <c:plotVisOnly val="1"/>
-    <c:dispBlanksAs val="span"/>
-  </c:chart>
-  <c:spPr>
-    <a:noFill/>
-    <a:ln>
-      <a:noFill/>
-    </a:ln>
-    <a:effectLst/>
-  </c:spPr>
-  <c:externalData r:id="rId1">
-    <c:autoUpdate val="0"/>
-  </c:externalData>
-</c:chartSpace>
 </file>
 
 <file path=ppt/notesMasters/notesMaster1.xml><?xml version="1.0" encoding="utf-8"?>
@@ -818,7 +582,7 @@
           <a:p>
             <a:r>
               <a:rPr lang="en-US" dirty="0"/>
-              <a:t>StockDesk is a hardware inventory tracker used to demonstrate a full DevOps lifecycle. The app itself is simple on purpose — the capstone is about the engineering around it.</a:t>
+              <a:t>StockDesk is a hardware inventory tracker used to demonstrate a full DevOps lifecycle. The app is simple on purpose — the engineering around it is the deliverable.</a:t>
             </a:r>
             <a:endParaRPr lang="en-US" dirty="0"/>
           </a:p>
@@ -906,7 +670,7 @@
           <a:p>
             <a:r>
               <a:rPr lang="en-US" dirty="0"/>
-              <a:t>A single Helm chart deploys the whole app; HPA and Ingress make it production-shaped. Raw manifests are provided too.</a:t>
+              <a:t>A single Helm chart; HPA and Ingress make it production-shaped.</a:t>
             </a:r>
             <a:endParaRPr lang="en-US" dirty="0"/>
           </a:p>
@@ -994,7 +758,7 @@
           <a:p>
             <a:r>
               <a:rPr lang="en-US" dirty="0"/>
-              <a:t>Metrics flow from the app to Prometheus to Grafana. The chart mirrors the live dashboard panel captured during load.</a:t>
+              <a:t>Metrics flow app → Prometheus → Grafana; the dashboard shows live traffic.</a:t>
             </a:r>
             <a:endParaRPr lang="en-US" dirty="0"/>
           </a:p>
@@ -1082,7 +846,7 @@
           <a:p>
             <a:r>
               <a:rPr lang="en-US" dirty="0"/>
-              <a:t>ArgoCD adds declarative, self-healing GitOps on top of Helm — beyond the rubric, but the real-world pattern.</a:t>
+              <a:t>ArgoCD adds declarative GitOps beyond the rubric — the real-world pattern.</a:t>
             </a:r>
             <a:endParaRPr lang="en-US" dirty="0"/>
           </a:p>
@@ -1170,7 +934,7 @@
           <a:p>
             <a:r>
               <a:rPr lang="en-US" dirty="0"/>
-              <a:t>The scorecard: every module covered with real, captured evidence, a green pipeline, and a clean AWS account.</a:t>
+              <a:t>Every module covered with real, captured evidence, a green pipeline, and a clean AWS account.</a:t>
             </a:r>
             <a:endParaRPr lang="en-US" dirty="0"/>
           </a:p>
@@ -1346,7 +1110,7 @@
           <a:p>
             <a:r>
               <a:rPr lang="en-US" dirty="0"/>
-              <a:t>Three-tier app. Stock status auto-derived. The DevOps around it is the real deliverable.</a:t>
+              <a:t>Three-tier app; stock status auto-derived. The screenshot is the real running dashboard.</a:t>
             </a:r>
             <a:endParaRPr lang="en-US" dirty="0"/>
           </a:p>
@@ -1434,7 +1198,7 @@
           <a:p>
             <a:r>
               <a:rPr lang="en-US" dirty="0"/>
-              <a:t>The commit flows left to right into AWS. Inside EKS, ingress routes to two frontend and two backend pods, backed by Postgres, scaled by an HPA, observed by Prometheus/Grafana.</a:t>
+              <a:t>Commit flows left to right into AWS; inside EKS, ingress routes to two frontend and two backend pods, backed by Postgres, scaled by an HPA, observed by Prometheus/Grafana.</a:t>
             </a:r>
             <a:endParaRPr lang="en-US" dirty="0"/>
           </a:p>
@@ -1522,7 +1286,7 @@
           <a:p>
             <a:r>
               <a:rPr lang="en-US" dirty="0"/>
-              <a:t>The full toolchain, grouped by concern. Each maps to a graded module.</a:t>
+              <a:t>The full toolchain by concern — each maps to a graded module.</a:t>
             </a:r>
             <a:endParaRPr lang="en-US" dirty="0"/>
           </a:p>
@@ -1610,7 +1374,7 @@
           <a:p>
             <a:r>
               <a:rPr lang="en-US" dirty="0"/>
-              <a:t>Nine endpoints, eleven passing tests against SQLite. Tests gate the pipeline — no green tests, no image.</a:t>
+              <a:t>Nine endpoints, eleven tests. Swagger shows the live API surface.</a:t>
             </a:r>
             <a:endParaRPr lang="en-US" dirty="0"/>
           </a:p>
@@ -1698,7 +1462,7 @@
           <a:p>
             <a:r>
               <a:rPr lang="en-US" dirty="0"/>
-              <a:t>Two hardened multi-stage images, a single compose command for the whole stack.</a:t>
+              <a:t>Two hardened images, a single compose command for the full stack.</a:t>
             </a:r>
             <a:endParaRPr lang="en-US" dirty="0"/>
           </a:p>
@@ -1786,7 +1550,7 @@
           <a:p>
             <a:r>
               <a:rPr lang="en-US" dirty="0"/>
-              <a:t>Five stages, each a gate. Images are tagged by commit SHA for full provenance.</a:t>
+              <a:t>Five gated stages; images tagged by SHA for full provenance; green runs shown.</a:t>
             </a:r>
             <a:endParaRPr lang="en-US" dirty="0"/>
           </a:p>
@@ -1874,7 +1638,7 @@
           <a:p>
             <a:r>
               <a:rPr lang="en-US" dirty="0"/>
-              <a:t>Five controls across the pipeline. The gate uses --ignore-unfixed, so it blocks only on actionable, fixable CVEs.</a:t>
+              <a:t>Five controls; the gate uses --ignore-unfixed so it blocks only actionable CVEs.</a:t>
             </a:r>
             <a:endParaRPr lang="en-US" dirty="0"/>
           </a:p>
@@ -1962,7 +1726,7 @@
           <a:p>
             <a:r>
               <a:rPr lang="en-US" dirty="0"/>
-              <a:t>Everything in AWS is code — one apply to build, one destroy to remove. No console clicking, no leftover billing.</a:t>
+              <a:t>Everything in AWS is code — one apply to build, one destroy to remove.</a:t>
             </a:r>
             <a:endParaRPr lang="en-US" dirty="0"/>
           </a:p>
@@ -2108,9 +1872,6 @@
           <a:lstStyle/>
           <a:p>
             <a:pPr algn="l" indent="0" marL="0">
-              <a:lnSpc>
-                <a:spcPct val="100000"/>
-              </a:lnSpc>
               <a:buNone/>
             </a:pPr>
             <a:endParaRPr lang="en-US" sz="5400" dirty="0"/>
@@ -2154,94 +1915,6 @@
 </file>
 
 <file path=ppt/slideLayouts/slideLayout3.xml><?xml version="1.0" encoding="utf-8"?>
-<p:sldLayout xmlns:a="http://schemas.openxmlformats.org/drawingml/2006/main" xmlns:r="http://schemas.openxmlformats.org/officeDocument/2006/relationships" xmlns:p="http://schemas.openxmlformats.org/presentationml/2006/main" preserve="1">
-  <p:cSld name="SECTION">
-    <p:bg>
-      <p:bgPr>
-        <a:solidFill>
-          <a:srgbClr val="0F1424"/>
-        </a:solidFill>
-      </p:bgPr>
-    </p:bg>
-    <p:spTree>
-      <p:nvGrpSpPr>
-        <p:cNvPr id="1" name=""/>
-        <p:cNvGrpSpPr/>
-        <p:nvPr/>
-      </p:nvGrpSpPr>
-      <p:grpSpPr>
-        <a:xfrm>
-          <a:off x="0" y="0"/>
-          <a:ext cx="0" cy="0"/>
-          <a:chOff x="0" y="0"/>
-          <a:chExt cx="0" cy="0"/>
-        </a:xfrm>
-      </p:grpSpPr>
-      <p:sp>
-        <p:nvSpPr>
-          <p:cNvPr id="2" name="Text 0"/>
-          <p:cNvSpPr/>
-          <p:nvPr/>
-        </p:nvSpPr>
-        <p:spPr>
-          <a:xfrm>
-            <a:off x="731520" y="2468880"/>
-            <a:ext cx="10698480" cy="457200"/>
-          </a:xfrm>
-          <a:prstGeom prst="rect">
-            <a:avLst/>
-          </a:prstGeom>
-          <a:noFill/>
-          <a:ln/>
-        </p:spPr>
-        <p:txBody>
-          <a:bodyPr wrap="square" rtlCol="0"/>
-          <a:lstStyle/>
-          <a:p>
-            <a:pPr indent="0" marL="0">
-              <a:buNone/>
-            </a:pPr>
-            <a:endParaRPr lang="en-US" sz="1500" dirty="0"/>
-          </a:p>
-        </p:txBody>
-      </p:sp>
-      <p:sp>
-        <p:nvSpPr>
-          <p:cNvPr id="3" name="Text 1"/>
-          <p:cNvSpPr/>
-          <p:nvPr/>
-        </p:nvSpPr>
-        <p:spPr>
-          <a:xfrm>
-            <a:off x="731520" y="2926080"/>
-            <a:ext cx="10698480" cy="1280160"/>
-          </a:xfrm>
-          <a:prstGeom prst="rect">
-            <a:avLst/>
-          </a:prstGeom>
-          <a:noFill/>
-          <a:ln/>
-        </p:spPr>
-        <p:txBody>
-          <a:bodyPr wrap="square" rtlCol="0"/>
-          <a:lstStyle/>
-          <a:p>
-            <a:pPr indent="0" marL="0">
-              <a:buNone/>
-            </a:pPr>
-            <a:endParaRPr lang="en-US" sz="4000" dirty="0"/>
-          </a:p>
-        </p:txBody>
-      </p:sp>
-    </p:spTree>
-  </p:cSld>
-  <p:clrMapOvr>
-    <a:masterClrMapping/>
-  </p:clrMapOvr>
-</p:sldLayout>
-</file>
-
-<file path=ppt/slideLayouts/slideLayout4.xml><?xml version="1.0" encoding="utf-8"?>
 <p:sldLayout xmlns:a="http://schemas.openxmlformats.org/drawingml/2006/main" xmlns:r="http://schemas.openxmlformats.org/officeDocument/2006/relationships" xmlns:p="http://schemas.openxmlformats.org/presentationml/2006/main" preserve="1">
   <p:cSld name="CONTENT">
     <p:bg>
@@ -2368,7 +2041,7 @@
             <a:pPr algn="r"/>
             <a:fld id="{F7021451-1387-4CA6-816F-3879F97B5CBC}" type="slidenum">
               <a:rPr b="0" lang="en-US"/>
-              <a:t>1004</a:t>
+              <a:t>1003</a:t>
             </a:fld>
             <a:endParaRPr lang="en-US"/>
           </a:p>
@@ -2382,7 +2055,7 @@
 </p:sldLayout>
 </file>
 
-<file path=ppt/slideLayouts/slideLayout5.xml><?xml version="1.0" encoding="utf-8"?>
+<file path=ppt/slideLayouts/slideLayout4.xml><?xml version="1.0" encoding="utf-8"?>
 <p:sldLayout xmlns:a="http://schemas.openxmlformats.org/drawingml/2006/main" xmlns:r="http://schemas.openxmlformats.org/officeDocument/2006/relationships" xmlns:p="http://schemas.openxmlformats.org/presentationml/2006/main" preserve="1">
   <p:cSld name="CLOSING">
     <p:bg>
@@ -2568,7 +2241,6 @@
     <p:sldLayoutId id="2147483650" r:id="rId2"/>
     <p:sldLayoutId id="2147483651" r:id="rId3"/>
     <p:sldLayoutId id="2147483652" r:id="rId4"/>
-    <p:sldLayoutId id="2147483653" r:id="rId5"/>
   </p:sldLayoutIdLst>
   <p:hf sldNum="0" hdr="0" ftr="0" dt="0"/>
   <p:txStyles>
@@ -3632,22 +3304,188 @@
       </p:sp>
       <p:sp>
         <p:nvSpPr>
-          <p:cNvPr id="3" name="Shape 1"/>
+          <p:cNvPr id="3" name="Text 1"/>
+          <p:cNvSpPr txBox="1"/>
+          <p:nvPr/>
+        </p:nvSpPr>
+        <p:spPr>
+          <a:xfrm>
+            <a:off x="548640" y="1325880"/>
+            <a:ext cx="4892040" cy="914400"/>
+          </a:xfrm>
+          <a:prstGeom prst="rect">
+            <a:avLst/>
+          </a:prstGeom>
+          <a:noFill/>
+          <a:ln/>
+        </p:spPr>
+        <p:txBody>
+          <a:bodyPr wrap="square" lIns="0" tIns="0" rIns="0" bIns="0" rtlCol="0" anchor="ctr"/>
+          <a:lstStyle/>
+          <a:p>
+            <a:pPr algn="l" indent="0" marL="0">
+              <a:buNone/>
+            </a:pPr>
+            <a:r>
+              <a:rPr lang="en-US" sz="1550" b="1" dirty="0">
+                <a:solidFill>
+                  <a:srgbClr val="141B2D"/>
+                </a:solidFill>
+              </a:rPr>
+              <a:t>One Helm chart deploys a production-shaped app.</a:t>
+            </a:r>
+            <a:endParaRPr lang="en-US" sz="1550" dirty="0"/>
+          </a:p>
+        </p:txBody>
+      </p:sp>
+      <p:sp>
+        <p:nvSpPr>
+          <p:cNvPr id="4" name="Text 2"/>
+          <p:cNvSpPr txBox="1"/>
+          <p:nvPr/>
+        </p:nvSpPr>
+        <p:spPr>
+          <a:xfrm>
+            <a:off x="585216" y="2331720"/>
+            <a:ext cx="4846320" cy="3566160"/>
+          </a:xfrm>
+          <a:prstGeom prst="rect">
+            <a:avLst/>
+          </a:prstGeom>
+          <a:noFill/>
+          <a:ln/>
+        </p:spPr>
+        <p:txBody>
+          <a:bodyPr wrap="square" lIns="0" tIns="0" rIns="0" bIns="0" rtlCol="0" anchor="ctr"/>
+          <a:lstStyle/>
+          <a:p>
+            <a:pPr marL="342900" indent="-342900">
+              <a:spcAft>
+                <a:spcPts val="1300"/>
+              </a:spcAft>
+              <a:buSzPct val="100000"/>
+              <a:buChar char="•"/>
+            </a:pPr>
+            <a:r>
+              <a:rPr lang="en-US" sz="1400" dirty="0">
+                <a:solidFill>
+                  <a:srgbClr val="141B2D"/>
+                </a:solidFill>
+              </a:rPr>
+              <a:t>Namespace + chart + dev/prod values</a:t>
+            </a:r>
+            <a:endParaRPr lang="en-US" sz="1400" dirty="0"/>
+          </a:p>
+          <a:p>
+            <a:pPr marL="342900" indent="-342900">
+              <a:spcAft>
+                <a:spcPts val="1300"/>
+              </a:spcAft>
+              <a:buSzPct val="100000"/>
+              <a:buChar char="•"/>
+            </a:pPr>
+            <a:r>
+              <a:rPr lang="en-US" sz="1400" dirty="0">
+                <a:solidFill>
+                  <a:srgbClr val="141B2D"/>
+                </a:solidFill>
+              </a:rPr>
+              <a:t>2 replicas each for backend &amp; frontend</a:t>
+            </a:r>
+            <a:endParaRPr lang="en-US" sz="1400" dirty="0"/>
+          </a:p>
+          <a:p>
+            <a:pPr marL="342900" indent="-342900">
+              <a:spcAft>
+                <a:spcPts val="1300"/>
+              </a:spcAft>
+              <a:buSzPct val="100000"/>
+              <a:buChar char="•"/>
+            </a:pPr>
+            <a:r>
+              <a:rPr lang="en-US" sz="1400" dirty="0">
+                <a:solidFill>
+                  <a:srgbClr val="141B2D"/>
+                </a:solidFill>
+              </a:rPr>
+              <a:t>ClusterIP services for all three tiers</a:t>
+            </a:r>
+            <a:endParaRPr lang="en-US" sz="1400" dirty="0"/>
+          </a:p>
+          <a:p>
+            <a:pPr marL="342900" indent="-342900">
+              <a:spcAft>
+                <a:spcPts val="1300"/>
+              </a:spcAft>
+              <a:buSzPct val="100000"/>
+              <a:buChar char="•"/>
+            </a:pPr>
+            <a:r>
+              <a:rPr lang="en-US" sz="1400" dirty="0">
+                <a:solidFill>
+                  <a:srgbClr val="141B2D"/>
+                </a:solidFill>
+              </a:rPr>
+              <a:t>Ingress: / → frontend · /api → backend</a:t>
+            </a:r>
+            <a:endParaRPr lang="en-US" sz="1400" dirty="0"/>
+          </a:p>
+          <a:p>
+            <a:pPr marL="342900" indent="-342900">
+              <a:spcAft>
+                <a:spcPts val="1300"/>
+              </a:spcAft>
+              <a:buSzPct val="100000"/>
+              <a:buChar char="•"/>
+            </a:pPr>
+            <a:r>
+              <a:rPr lang="en-US" sz="1400" dirty="0">
+                <a:solidFill>
+                  <a:srgbClr val="141B2D"/>
+                </a:solidFill>
+              </a:rPr>
+              <a:t>HPA scales backend 2 → 6 at 60% CPU</a:t>
+            </a:r>
+            <a:endParaRPr lang="en-US" sz="1400" dirty="0"/>
+          </a:p>
+          <a:p>
+            <a:pPr marL="342900" indent="-342900">
+              <a:spcAft>
+                <a:spcPts val="1300"/>
+              </a:spcAft>
+              <a:buSzPct val="100000"/>
+              <a:buChar char="•"/>
+            </a:pPr>
+            <a:r>
+              <a:rPr lang="en-US" sz="1400" dirty="0">
+                <a:solidFill>
+                  <a:srgbClr val="141B2D"/>
+                </a:solidFill>
+              </a:rPr>
+              <a:t>Raw kubernetes/00–10 provided too</a:t>
+            </a:r>
+            <a:endParaRPr lang="en-US" sz="1400" dirty="0"/>
+          </a:p>
+        </p:txBody>
+      </p:sp>
+      <p:sp>
+        <p:nvSpPr>
+          <p:cNvPr id="5" name="Shape 3"/>
           <p:cNvSpPr/>
           <p:nvPr/>
         </p:nvSpPr>
         <p:spPr>
           <a:xfrm>
-            <a:off x="548640" y="1417320"/>
-            <a:ext cx="5440680" cy="1325880"/>
+            <a:off x="5669280" y="1371600"/>
+            <a:ext cx="5961888" cy="4663440"/>
           </a:xfrm>
           <a:prstGeom prst="roundRect">
             <a:avLst>
-              <a:gd name="adj" fmla="val 6897"/>
+              <a:gd name="adj" fmla="val 1176"/>
             </a:avLst>
           </a:prstGeom>
           <a:solidFill>
-            <a:srgbClr val="F8F9FC"/>
+            <a:srgbClr val="FFFFFF"/>
           </a:solidFill>
           <a:ln w="12700">
             <a:solidFill>
@@ -3656,46 +3494,47 @@
             <a:prstDash val="solid"/>
           </a:ln>
           <a:effectLst>
-            <a:outerShdw sx="100000" sy="100000" kx="0" ky="0" algn="bl" rotWithShape="0" blurRad="76200" dist="25400" dir="5400000">
-              <a:srgbClr val="9AA3B2">
-                <a:alpha val="25000"/>
+            <a:outerShdw sx="100000" sy="100000" kx="0" ky="0" algn="bl" rotWithShape="0" blurRad="114300" dist="38100" dir="5400000">
+              <a:srgbClr val="7A8396">
+                <a:alpha val="32000"/>
               </a:srgbClr>
             </a:outerShdw>
           </a:effectLst>
         </p:spPr>
       </p:sp>
-      <p:sp>
-        <p:nvSpPr>
-          <p:cNvPr id="4" name="Shape 2"/>
-          <p:cNvSpPr/>
-          <p:nvPr/>
-        </p:nvSpPr>
-        <p:spPr>
-          <a:xfrm>
-            <a:off x="777240" y="1655064"/>
-            <a:ext cx="548640" cy="548640"/>
-          </a:xfrm>
-          <a:prstGeom prst="roundRect">
-            <a:avLst>
-              <a:gd name="adj" fmla="val 20000"/>
-            </a:avLst>
-          </a:prstGeom>
-          <a:solidFill>
-            <a:srgbClr val="4F46E5"/>
-          </a:solidFill>
-          <a:ln/>
-        </p:spPr>
-      </p:sp>
-      <p:sp>
-        <p:nvSpPr>
-          <p:cNvPr id="5" name="Text 3"/>
+      <p:pic>
+        <p:nvPicPr>
+          <p:cNvPr id="6" name="Image 0" descr="/home/narendra/Documents/devops-project/screenshot/m8-app-via-ingress.png">    </p:cNvPr>
+          <p:cNvPicPr>
+            <a:picLocks noChangeAspect="1"/>
+          </p:cNvPicPr>
+          <p:nvPr/>
+        </p:nvPicPr>
+        <p:blipFill>
+          <a:blip r:embed="rId1"/>
+          <a:srcRect l="0" r="0" t="0" b="0"/>
+          <a:stretch/>
+        </p:blipFill>
+        <p:spPr>
+          <a:xfrm>
+            <a:off x="5815584" y="1517904"/>
+            <a:ext cx="5669280" cy="3986784"/>
+          </a:xfrm>
+          <a:prstGeom prst="rect">
+            <a:avLst/>
+          </a:prstGeom>
+        </p:spPr>
+      </p:pic>
+      <p:sp>
+        <p:nvSpPr>
+          <p:cNvPr id="7" name="Text 4"/>
           <p:cNvSpPr txBox="1"/>
           <p:nvPr/>
         </p:nvSpPr>
         <p:spPr>
           <a:xfrm>
-            <a:off x="1481328" y="1600200"/>
-            <a:ext cx="4297680" cy="411480"/>
+            <a:off x="5815584" y="5605272"/>
+            <a:ext cx="5669280" cy="384048"/>
           </a:xfrm>
           <a:prstGeom prst="rect">
             <a:avLst/>
@@ -3707,694 +3546,18 @@
           <a:bodyPr wrap="square" lIns="0" tIns="0" rIns="0" bIns="0" rtlCol="0" anchor="ctr"/>
           <a:lstStyle/>
           <a:p>
-            <a:pPr algn="l" indent="0" marL="0">
-              <a:buNone/>
-            </a:pPr>
-            <a:r>
-              <a:rPr lang="en-US" sz="1600" b="1" dirty="0">
-                <a:solidFill>
-                  <a:srgbClr val="0F1424"/>
-                </a:solidFill>
-              </a:rPr>
-              <a:t>Helm chart</a:t>
-            </a:r>
-            <a:endParaRPr lang="en-US" sz="1600" dirty="0"/>
-          </a:p>
-        </p:txBody>
-      </p:sp>
-      <p:sp>
-        <p:nvSpPr>
-          <p:cNvPr id="6" name="Text 4"/>
-          <p:cNvSpPr txBox="1"/>
-          <p:nvPr/>
-        </p:nvSpPr>
-        <p:spPr>
-          <a:xfrm>
-            <a:off x="1481328" y="2020824"/>
-            <a:ext cx="4389120" cy="594360"/>
-          </a:xfrm>
-          <a:prstGeom prst="rect">
-            <a:avLst/>
-          </a:prstGeom>
-          <a:noFill/>
-          <a:ln/>
-        </p:spPr>
-        <p:txBody>
-          <a:bodyPr wrap="square" lIns="0" tIns="0" rIns="0" bIns="0" rtlCol="0" anchor="ctr"/>
-          <a:lstStyle/>
-          <a:p>
-            <a:pPr algn="l" indent="0" marL="0">
-              <a:buNone/>
-            </a:pPr>
-            <a:r>
-              <a:rPr lang="en-US" sz="1250" dirty="0">
+            <a:pPr algn="ctr" indent="0" marL="0">
+              <a:buNone/>
+            </a:pPr>
+            <a:r>
+              <a:rPr lang="en-US" sz="1050" i="1" dirty="0">
                 <a:solidFill>
                   <a:srgbClr val="6B7280"/>
                 </a:solidFill>
               </a:rPr>
-              <a:t>Parameterized templates + dev/prod values files</a:t>
-            </a:r>
-            <a:endParaRPr lang="en-US" sz="1250" dirty="0"/>
-          </a:p>
-        </p:txBody>
-      </p:sp>
-      <p:sp>
-        <p:nvSpPr>
-          <p:cNvPr id="7" name="Shape 5"/>
-          <p:cNvSpPr/>
-          <p:nvPr/>
-        </p:nvSpPr>
-        <p:spPr>
-          <a:xfrm>
-            <a:off x="6126480" y="1417320"/>
-            <a:ext cx="5440680" cy="1325880"/>
-          </a:xfrm>
-          <a:prstGeom prst="roundRect">
-            <a:avLst>
-              <a:gd name="adj" fmla="val 6897"/>
-            </a:avLst>
-          </a:prstGeom>
-          <a:solidFill>
-            <a:srgbClr val="F8F9FC"/>
-          </a:solidFill>
-          <a:ln w="12700">
-            <a:solidFill>
-              <a:srgbClr val="E6E8F0"/>
-            </a:solidFill>
-            <a:prstDash val="solid"/>
-          </a:ln>
-          <a:effectLst>
-            <a:outerShdw sx="100000" sy="100000" kx="0" ky="0" algn="bl" rotWithShape="0" blurRad="76200" dist="25400" dir="5400000">
-              <a:srgbClr val="9AA3B2">
-                <a:alpha val="25000"/>
-              </a:srgbClr>
-            </a:outerShdw>
-          </a:effectLst>
-        </p:spPr>
-      </p:sp>
-      <p:sp>
-        <p:nvSpPr>
-          <p:cNvPr id="8" name="Shape 6"/>
-          <p:cNvSpPr/>
-          <p:nvPr/>
-        </p:nvSpPr>
-        <p:spPr>
-          <a:xfrm>
-            <a:off x="6355080" y="1655064"/>
-            <a:ext cx="548640" cy="548640"/>
-          </a:xfrm>
-          <a:prstGeom prst="roundRect">
-            <a:avLst>
-              <a:gd name="adj" fmla="val 20000"/>
-            </a:avLst>
-          </a:prstGeom>
-          <a:solidFill>
-            <a:srgbClr val="00A896"/>
-          </a:solidFill>
-          <a:ln/>
-        </p:spPr>
-      </p:sp>
-      <p:sp>
-        <p:nvSpPr>
-          <p:cNvPr id="9" name="Text 7"/>
-          <p:cNvSpPr txBox="1"/>
-          <p:nvPr/>
-        </p:nvSpPr>
-        <p:spPr>
-          <a:xfrm>
-            <a:off x="7059168" y="1600200"/>
-            <a:ext cx="4297680" cy="411480"/>
-          </a:xfrm>
-          <a:prstGeom prst="rect">
-            <a:avLst/>
-          </a:prstGeom>
-          <a:noFill/>
-          <a:ln/>
-        </p:spPr>
-        <p:txBody>
-          <a:bodyPr wrap="square" lIns="0" tIns="0" rIns="0" bIns="0" rtlCol="0" anchor="ctr"/>
-          <a:lstStyle/>
-          <a:p>
-            <a:pPr algn="l" indent="0" marL="0">
-              <a:buNone/>
-            </a:pPr>
-            <a:r>
-              <a:rPr lang="en-US" sz="1600" b="1" dirty="0">
-                <a:solidFill>
-                  <a:srgbClr val="0F1424"/>
-                </a:solidFill>
-              </a:rPr>
-              <a:t>2 replicas each</a:t>
-            </a:r>
-            <a:endParaRPr lang="en-US" sz="1600" dirty="0"/>
-          </a:p>
-        </p:txBody>
-      </p:sp>
-      <p:sp>
-        <p:nvSpPr>
-          <p:cNvPr id="10" name="Text 8"/>
-          <p:cNvSpPr txBox="1"/>
-          <p:nvPr/>
-        </p:nvSpPr>
-        <p:spPr>
-          <a:xfrm>
-            <a:off x="7059168" y="2020824"/>
-            <a:ext cx="4389120" cy="594360"/>
-          </a:xfrm>
-          <a:prstGeom prst="rect">
-            <a:avLst/>
-          </a:prstGeom>
-          <a:noFill/>
-          <a:ln/>
-        </p:spPr>
-        <p:txBody>
-          <a:bodyPr wrap="square" lIns="0" tIns="0" rIns="0" bIns="0" rtlCol="0" anchor="ctr"/>
-          <a:lstStyle/>
-          <a:p>
-            <a:pPr algn="l" indent="0" marL="0">
-              <a:buNone/>
-            </a:pPr>
-            <a:r>
-              <a:rPr lang="en-US" sz="1250" dirty="0">
-                <a:solidFill>
-                  <a:srgbClr val="6B7280"/>
-                </a:solidFill>
-              </a:rPr>
-              <a:t>Backend &amp; frontend Deployments for availability</a:t>
-            </a:r>
-            <a:endParaRPr lang="en-US" sz="1250" dirty="0"/>
-          </a:p>
-        </p:txBody>
-      </p:sp>
-      <p:sp>
-        <p:nvSpPr>
-          <p:cNvPr id="11" name="Shape 9"/>
-          <p:cNvSpPr/>
-          <p:nvPr/>
-        </p:nvSpPr>
-        <p:spPr>
-          <a:xfrm>
-            <a:off x="548640" y="2898648"/>
-            <a:ext cx="5440680" cy="1325880"/>
-          </a:xfrm>
-          <a:prstGeom prst="roundRect">
-            <a:avLst>
-              <a:gd name="adj" fmla="val 6897"/>
-            </a:avLst>
-          </a:prstGeom>
-          <a:solidFill>
-            <a:srgbClr val="F8F9FC"/>
-          </a:solidFill>
-          <a:ln w="12700">
-            <a:solidFill>
-              <a:srgbClr val="E6E8F0"/>
-            </a:solidFill>
-            <a:prstDash val="solid"/>
-          </a:ln>
-          <a:effectLst>
-            <a:outerShdw sx="100000" sy="100000" kx="0" ky="0" algn="bl" rotWithShape="0" blurRad="76200" dist="25400" dir="5400000">
-              <a:srgbClr val="9AA3B2">
-                <a:alpha val="25000"/>
-              </a:srgbClr>
-            </a:outerShdw>
-          </a:effectLst>
-        </p:spPr>
-      </p:sp>
-      <p:sp>
-        <p:nvSpPr>
-          <p:cNvPr id="12" name="Shape 10"/>
-          <p:cNvSpPr/>
-          <p:nvPr/>
-        </p:nvSpPr>
-        <p:spPr>
-          <a:xfrm>
-            <a:off x="777240" y="3136392"/>
-            <a:ext cx="548640" cy="548640"/>
-          </a:xfrm>
-          <a:prstGeom prst="roundRect">
-            <a:avLst>
-              <a:gd name="adj" fmla="val 20000"/>
-            </a:avLst>
-          </a:prstGeom>
-          <a:solidFill>
-            <a:srgbClr val="7C3AED"/>
-          </a:solidFill>
-          <a:ln/>
-        </p:spPr>
-      </p:sp>
-      <p:sp>
-        <p:nvSpPr>
-          <p:cNvPr id="13" name="Text 11"/>
-          <p:cNvSpPr txBox="1"/>
-          <p:nvPr/>
-        </p:nvSpPr>
-        <p:spPr>
-          <a:xfrm>
-            <a:off x="1481328" y="3081528"/>
-            <a:ext cx="4297680" cy="411480"/>
-          </a:xfrm>
-          <a:prstGeom prst="rect">
-            <a:avLst/>
-          </a:prstGeom>
-          <a:noFill/>
-          <a:ln/>
-        </p:spPr>
-        <p:txBody>
-          <a:bodyPr wrap="square" lIns="0" tIns="0" rIns="0" bIns="0" rtlCol="0" anchor="ctr"/>
-          <a:lstStyle/>
-          <a:p>
-            <a:pPr algn="l" indent="0" marL="0">
-              <a:buNone/>
-            </a:pPr>
-            <a:r>
-              <a:rPr lang="en-US" sz="1600" b="1" dirty="0">
-                <a:solidFill>
-                  <a:srgbClr val="0F1424"/>
-                </a:solidFill>
-              </a:rPr>
-              <a:t>ClusterIP services</a:t>
-            </a:r>
-            <a:endParaRPr lang="en-US" sz="1600" dirty="0"/>
-          </a:p>
-        </p:txBody>
-      </p:sp>
-      <p:sp>
-        <p:nvSpPr>
-          <p:cNvPr id="14" name="Text 12"/>
-          <p:cNvSpPr txBox="1"/>
-          <p:nvPr/>
-        </p:nvSpPr>
-        <p:spPr>
-          <a:xfrm>
-            <a:off x="1481328" y="3502152"/>
-            <a:ext cx="4389120" cy="594360"/>
-          </a:xfrm>
-          <a:prstGeom prst="rect">
-            <a:avLst/>
-          </a:prstGeom>
-          <a:noFill/>
-          <a:ln/>
-        </p:spPr>
-        <p:txBody>
-          <a:bodyPr wrap="square" lIns="0" tIns="0" rIns="0" bIns="0" rtlCol="0" anchor="ctr"/>
-          <a:lstStyle/>
-          <a:p>
-            <a:pPr algn="l" indent="0" marL="0">
-              <a:buNone/>
-            </a:pPr>
-            <a:r>
-              <a:rPr lang="en-US" sz="1250" dirty="0">
-                <a:solidFill>
-                  <a:srgbClr val="6B7280"/>
-                </a:solidFill>
-              </a:rPr>
-              <a:t>Stable in-cluster networking for all three tiers</a:t>
-            </a:r>
-            <a:endParaRPr lang="en-US" sz="1250" dirty="0"/>
-          </a:p>
-        </p:txBody>
-      </p:sp>
-      <p:sp>
-        <p:nvSpPr>
-          <p:cNvPr id="15" name="Shape 13"/>
-          <p:cNvSpPr/>
-          <p:nvPr/>
-        </p:nvSpPr>
-        <p:spPr>
-          <a:xfrm>
-            <a:off x="6126480" y="2898648"/>
-            <a:ext cx="5440680" cy="1325880"/>
-          </a:xfrm>
-          <a:prstGeom prst="roundRect">
-            <a:avLst>
-              <a:gd name="adj" fmla="val 6897"/>
-            </a:avLst>
-          </a:prstGeom>
-          <a:solidFill>
-            <a:srgbClr val="F8F9FC"/>
-          </a:solidFill>
-          <a:ln w="12700">
-            <a:solidFill>
-              <a:srgbClr val="E6E8F0"/>
-            </a:solidFill>
-            <a:prstDash val="solid"/>
-          </a:ln>
-          <a:effectLst>
-            <a:outerShdw sx="100000" sy="100000" kx="0" ky="0" algn="bl" rotWithShape="0" blurRad="76200" dist="25400" dir="5400000">
-              <a:srgbClr val="9AA3B2">
-                <a:alpha val="25000"/>
-              </a:srgbClr>
-            </a:outerShdw>
-          </a:effectLst>
-        </p:spPr>
-      </p:sp>
-      <p:sp>
-        <p:nvSpPr>
-          <p:cNvPr id="16" name="Shape 14"/>
-          <p:cNvSpPr/>
-          <p:nvPr/>
-        </p:nvSpPr>
-        <p:spPr>
-          <a:xfrm>
-            <a:off x="6355080" y="3136392"/>
-            <a:ext cx="548640" cy="548640"/>
-          </a:xfrm>
-          <a:prstGeom prst="roundRect">
-            <a:avLst>
-              <a:gd name="adj" fmla="val 20000"/>
-            </a:avLst>
-          </a:prstGeom>
-          <a:solidFill>
-            <a:srgbClr val="16A34A"/>
-          </a:solidFill>
-          <a:ln/>
-        </p:spPr>
-      </p:sp>
-      <p:sp>
-        <p:nvSpPr>
-          <p:cNvPr id="17" name="Text 15"/>
-          <p:cNvSpPr txBox="1"/>
-          <p:nvPr/>
-        </p:nvSpPr>
-        <p:spPr>
-          <a:xfrm>
-            <a:off x="7059168" y="3081528"/>
-            <a:ext cx="4297680" cy="411480"/>
-          </a:xfrm>
-          <a:prstGeom prst="rect">
-            <a:avLst/>
-          </a:prstGeom>
-          <a:noFill/>
-          <a:ln/>
-        </p:spPr>
-        <p:txBody>
-          <a:bodyPr wrap="square" lIns="0" tIns="0" rIns="0" bIns="0" rtlCol="0" anchor="ctr"/>
-          <a:lstStyle/>
-          <a:p>
-            <a:pPr algn="l" indent="0" marL="0">
-              <a:buNone/>
-            </a:pPr>
-            <a:r>
-              <a:rPr lang="en-US" sz="1600" b="1" dirty="0">
-                <a:solidFill>
-                  <a:srgbClr val="0F1424"/>
-                </a:solidFill>
-              </a:rPr>
-              <a:t>Ingress routing</a:t>
-            </a:r>
-            <a:endParaRPr lang="en-US" sz="1600" dirty="0"/>
-          </a:p>
-        </p:txBody>
-      </p:sp>
-      <p:sp>
-        <p:nvSpPr>
-          <p:cNvPr id="18" name="Text 16"/>
-          <p:cNvSpPr txBox="1"/>
-          <p:nvPr/>
-        </p:nvSpPr>
-        <p:spPr>
-          <a:xfrm>
-            <a:off x="7059168" y="3502152"/>
-            <a:ext cx="4389120" cy="594360"/>
-          </a:xfrm>
-          <a:prstGeom prst="rect">
-            <a:avLst/>
-          </a:prstGeom>
-          <a:noFill/>
-          <a:ln/>
-        </p:spPr>
-        <p:txBody>
-          <a:bodyPr wrap="square" lIns="0" tIns="0" rIns="0" bIns="0" rtlCol="0" anchor="ctr"/>
-          <a:lstStyle/>
-          <a:p>
-            <a:pPr algn="l" indent="0" marL="0">
-              <a:buNone/>
-            </a:pPr>
-            <a:r>
-              <a:rPr lang="en-US" sz="1250" dirty="0">
-                <a:solidFill>
-                  <a:srgbClr val="6B7280"/>
-                </a:solidFill>
-              </a:rPr>
-              <a:t>/ → frontend · /api → backend via Ingress-NGINX</a:t>
-            </a:r>
-            <a:endParaRPr lang="en-US" sz="1250" dirty="0"/>
-          </a:p>
-        </p:txBody>
-      </p:sp>
-      <p:sp>
-        <p:nvSpPr>
-          <p:cNvPr id="19" name="Shape 17"/>
-          <p:cNvSpPr/>
-          <p:nvPr/>
-        </p:nvSpPr>
-        <p:spPr>
-          <a:xfrm>
-            <a:off x="548640" y="4379976"/>
-            <a:ext cx="5440680" cy="1325880"/>
-          </a:xfrm>
-          <a:prstGeom prst="roundRect">
-            <a:avLst>
-              <a:gd name="adj" fmla="val 6897"/>
-            </a:avLst>
-          </a:prstGeom>
-          <a:solidFill>
-            <a:srgbClr val="F8F9FC"/>
-          </a:solidFill>
-          <a:ln w="12700">
-            <a:solidFill>
-              <a:srgbClr val="E6E8F0"/>
-            </a:solidFill>
-            <a:prstDash val="solid"/>
-          </a:ln>
-          <a:effectLst>
-            <a:outerShdw sx="100000" sy="100000" kx="0" ky="0" algn="bl" rotWithShape="0" blurRad="76200" dist="25400" dir="5400000">
-              <a:srgbClr val="9AA3B2">
-                <a:alpha val="25000"/>
-              </a:srgbClr>
-            </a:outerShdw>
-          </a:effectLst>
-        </p:spPr>
-      </p:sp>
-      <p:sp>
-        <p:nvSpPr>
-          <p:cNvPr id="20" name="Shape 18"/>
-          <p:cNvSpPr/>
-          <p:nvPr/>
-        </p:nvSpPr>
-        <p:spPr>
-          <a:xfrm>
-            <a:off x="777240" y="4617720"/>
-            <a:ext cx="548640" cy="548640"/>
-          </a:xfrm>
-          <a:prstGeom prst="roundRect">
-            <a:avLst>
-              <a:gd name="adj" fmla="val 20000"/>
-            </a:avLst>
-          </a:prstGeom>
-          <a:solidFill>
-            <a:srgbClr val="D97706"/>
-          </a:solidFill>
-          <a:ln/>
-        </p:spPr>
-      </p:sp>
-      <p:sp>
-        <p:nvSpPr>
-          <p:cNvPr id="21" name="Text 19"/>
-          <p:cNvSpPr txBox="1"/>
-          <p:nvPr/>
-        </p:nvSpPr>
-        <p:spPr>
-          <a:xfrm>
-            <a:off x="1481328" y="4562856"/>
-            <a:ext cx="4297680" cy="411480"/>
-          </a:xfrm>
-          <a:prstGeom prst="rect">
-            <a:avLst/>
-          </a:prstGeom>
-          <a:noFill/>
-          <a:ln/>
-        </p:spPr>
-        <p:txBody>
-          <a:bodyPr wrap="square" lIns="0" tIns="0" rIns="0" bIns="0" rtlCol="0" anchor="ctr"/>
-          <a:lstStyle/>
-          <a:p>
-            <a:pPr algn="l" indent="0" marL="0">
-              <a:buNone/>
-            </a:pPr>
-            <a:r>
-              <a:rPr lang="en-US" sz="1600" b="1" dirty="0">
-                <a:solidFill>
-                  <a:srgbClr val="0F1424"/>
-                </a:solidFill>
-              </a:rPr>
-              <a:t>HPA 2 → 6</a:t>
-            </a:r>
-            <a:endParaRPr lang="en-US" sz="1600" dirty="0"/>
-          </a:p>
-        </p:txBody>
-      </p:sp>
-      <p:sp>
-        <p:nvSpPr>
-          <p:cNvPr id="22" name="Text 20"/>
-          <p:cNvSpPr txBox="1"/>
-          <p:nvPr/>
-        </p:nvSpPr>
-        <p:spPr>
-          <a:xfrm>
-            <a:off x="1481328" y="4983480"/>
-            <a:ext cx="4389120" cy="594360"/>
-          </a:xfrm>
-          <a:prstGeom prst="rect">
-            <a:avLst/>
-          </a:prstGeom>
-          <a:noFill/>
-          <a:ln/>
-        </p:spPr>
-        <p:txBody>
-          <a:bodyPr wrap="square" lIns="0" tIns="0" rIns="0" bIns="0" rtlCol="0" anchor="ctr"/>
-          <a:lstStyle/>
-          <a:p>
-            <a:pPr algn="l" indent="0" marL="0">
-              <a:buNone/>
-            </a:pPr>
-            <a:r>
-              <a:rPr lang="en-US" sz="1250" dirty="0">
-                <a:solidFill>
-                  <a:srgbClr val="6B7280"/>
-                </a:solidFill>
-              </a:rPr>
-              <a:t>Backend autoscales on 60% CPU (metrics-server)</a:t>
-            </a:r>
-            <a:endParaRPr lang="en-US" sz="1250" dirty="0"/>
-          </a:p>
-        </p:txBody>
-      </p:sp>
-      <p:sp>
-        <p:nvSpPr>
-          <p:cNvPr id="23" name="Shape 21"/>
-          <p:cNvSpPr/>
-          <p:nvPr/>
-        </p:nvSpPr>
-        <p:spPr>
-          <a:xfrm>
-            <a:off x="6126480" y="4379976"/>
-            <a:ext cx="5440680" cy="1325880"/>
-          </a:xfrm>
-          <a:prstGeom prst="roundRect">
-            <a:avLst>
-              <a:gd name="adj" fmla="val 6897"/>
-            </a:avLst>
-          </a:prstGeom>
-          <a:solidFill>
-            <a:srgbClr val="F8F9FC"/>
-          </a:solidFill>
-          <a:ln w="12700">
-            <a:solidFill>
-              <a:srgbClr val="E6E8F0"/>
-            </a:solidFill>
-            <a:prstDash val="solid"/>
-          </a:ln>
-          <a:effectLst>
-            <a:outerShdw sx="100000" sy="100000" kx="0" ky="0" algn="bl" rotWithShape="0" blurRad="76200" dist="25400" dir="5400000">
-              <a:srgbClr val="9AA3B2">
-                <a:alpha val="25000"/>
-              </a:srgbClr>
-            </a:outerShdw>
-          </a:effectLst>
-        </p:spPr>
-      </p:sp>
-      <p:sp>
-        <p:nvSpPr>
-          <p:cNvPr id="24" name="Shape 22"/>
-          <p:cNvSpPr/>
-          <p:nvPr/>
-        </p:nvSpPr>
-        <p:spPr>
-          <a:xfrm>
-            <a:off x="6355080" y="4617720"/>
-            <a:ext cx="548640" cy="548640"/>
-          </a:xfrm>
-          <a:prstGeom prst="roundRect">
-            <a:avLst>
-              <a:gd name="adj" fmla="val 20000"/>
-            </a:avLst>
-          </a:prstGeom>
-          <a:solidFill>
-            <a:srgbClr val="0EA5E9"/>
-          </a:solidFill>
-          <a:ln/>
-        </p:spPr>
-      </p:sp>
-      <p:sp>
-        <p:nvSpPr>
-          <p:cNvPr id="25" name="Text 23"/>
-          <p:cNvSpPr txBox="1"/>
-          <p:nvPr/>
-        </p:nvSpPr>
-        <p:spPr>
-          <a:xfrm>
-            <a:off x="7059168" y="4562856"/>
-            <a:ext cx="4297680" cy="411480"/>
-          </a:xfrm>
-          <a:prstGeom prst="rect">
-            <a:avLst/>
-          </a:prstGeom>
-          <a:noFill/>
-          <a:ln/>
-        </p:spPr>
-        <p:txBody>
-          <a:bodyPr wrap="square" lIns="0" tIns="0" rIns="0" bIns="0" rtlCol="0" anchor="ctr"/>
-          <a:lstStyle/>
-          <a:p>
-            <a:pPr algn="l" indent="0" marL="0">
-              <a:buNone/>
-            </a:pPr>
-            <a:r>
-              <a:rPr lang="en-US" sz="1600" b="1" dirty="0">
-                <a:solidFill>
-                  <a:srgbClr val="0F1424"/>
-                </a:solidFill>
-              </a:rPr>
-              <a:t>Raw manifests</a:t>
-            </a:r>
-            <a:endParaRPr lang="en-US" sz="1600" dirty="0"/>
-          </a:p>
-        </p:txBody>
-      </p:sp>
-      <p:sp>
-        <p:nvSpPr>
-          <p:cNvPr id="26" name="Text 24"/>
-          <p:cNvSpPr txBox="1"/>
-          <p:nvPr/>
-        </p:nvSpPr>
-        <p:spPr>
-          <a:xfrm>
-            <a:off x="7059168" y="4983480"/>
-            <a:ext cx="4389120" cy="594360"/>
-          </a:xfrm>
-          <a:prstGeom prst="rect">
-            <a:avLst/>
-          </a:prstGeom>
-          <a:noFill/>
-          <a:ln/>
-        </p:spPr>
-        <p:txBody>
-          <a:bodyPr wrap="square" lIns="0" tIns="0" rIns="0" bIns="0" rtlCol="0" anchor="ctr"/>
-          <a:lstStyle/>
-          <a:p>
-            <a:pPr algn="l" indent="0" marL="0">
-              <a:buNone/>
-            </a:pPr>
-            <a:r>
-              <a:rPr lang="en-US" sz="1250" dirty="0">
-                <a:solidFill>
-                  <a:srgbClr val="6B7280"/>
-                </a:solidFill>
-              </a:rPr>
-              <a:t>kubernetes/00–10 provided alongside the chart</a:t>
-            </a:r>
-            <a:endParaRPr lang="en-US" sz="1250" dirty="0"/>
+              <a:t>StockDesk served through the EKS Ingress ELB</a:t>
+            </a:r>
+            <a:endParaRPr lang="en-US" sz="1050" dirty="0"/>
           </a:p>
         </p:txBody>
       </p:sp>
@@ -4510,8 +3673,44 @@
         </p:nvSpPr>
         <p:spPr>
           <a:xfrm>
-            <a:off x="548640" y="1417320"/>
-            <a:ext cx="5212080" cy="2743200"/>
+            <a:off x="548640" y="1325880"/>
+            <a:ext cx="4892040" cy="914400"/>
+          </a:xfrm>
+          <a:prstGeom prst="rect">
+            <a:avLst/>
+          </a:prstGeom>
+          <a:noFill/>
+          <a:ln/>
+        </p:spPr>
+        <p:txBody>
+          <a:bodyPr wrap="square" lIns="0" tIns="0" rIns="0" bIns="0" rtlCol="0" anchor="ctr"/>
+          <a:lstStyle/>
+          <a:p>
+            <a:pPr algn="l" indent="0" marL="0">
+              <a:buNone/>
+            </a:pPr>
+            <a:r>
+              <a:rPr lang="en-US" sz="1550" b="1" dirty="0">
+                <a:solidFill>
+                  <a:srgbClr val="141B2D"/>
+                </a:solidFill>
+              </a:rPr>
+              <a:t>Prometheus + Grafana on the four golden signals.</a:t>
+            </a:r>
+            <a:endParaRPr lang="en-US" sz="1550" dirty="0"/>
+          </a:p>
+        </p:txBody>
+      </p:sp>
+      <p:sp>
+        <p:nvSpPr>
+          <p:cNvPr id="4" name="Text 2"/>
+          <p:cNvSpPr txBox="1"/>
+          <p:nvPr/>
+        </p:nvSpPr>
+        <p:spPr>
+          <a:xfrm>
+            <a:off x="585216" y="2331720"/>
+            <a:ext cx="4846320" cy="3566160"/>
           </a:xfrm>
           <a:prstGeom prst="rect">
             <a:avLst/>
@@ -4525,95 +3724,113 @@
           <a:p>
             <a:pPr marL="342900" indent="-342900">
               <a:spcAft>
-                <a:spcPts val="1400"/>
+                <a:spcPts val="1300"/>
               </a:spcAft>
               <a:buSzPct val="100000"/>
               <a:buChar char="•"/>
             </a:pPr>
             <a:r>
-              <a:rPr lang="en-US" sz="1450" dirty="0">
+              <a:rPr lang="en-US" sz="1400" dirty="0">
                 <a:solidFill>
                   <a:srgbClr val="141B2D"/>
                 </a:solidFill>
               </a:rPr>
-              <a:t>FastAPI instrumented — request counts, latency histograms</a:t>
-            </a:r>
-            <a:endParaRPr lang="en-US" sz="1450" dirty="0"/>
+              <a:t>FastAPI instrumented — request counts &amp; latency</a:t>
+            </a:r>
+            <a:endParaRPr lang="en-US" sz="1400" dirty="0"/>
           </a:p>
           <a:p>
             <a:pPr marL="342900" indent="-342900">
               <a:spcAft>
-                <a:spcPts val="1400"/>
+                <a:spcPts val="1300"/>
               </a:spcAft>
               <a:buSzPct val="100000"/>
               <a:buChar char="•"/>
             </a:pPr>
             <a:r>
-              <a:rPr lang="en-US" sz="1450" dirty="0">
+              <a:rPr lang="en-US" sz="1400" dirty="0">
                 <a:solidFill>
                   <a:srgbClr val="141B2D"/>
                 </a:solidFill>
               </a:rPr>
-              <a:t>Prometheus scrapes /metrics every 15s via ServiceMonitor</a:t>
-            </a:r>
-            <a:endParaRPr lang="en-US" sz="1450" dirty="0"/>
+              <a:t>Prometheus scrapes /metrics every 15s</a:t>
+            </a:r>
+            <a:endParaRPr lang="en-US" sz="1400" dirty="0"/>
           </a:p>
           <a:p>
             <a:pPr marL="342900" indent="-342900">
               <a:spcAft>
-                <a:spcPts val="1400"/>
+                <a:spcPts val="1300"/>
               </a:spcAft>
               <a:buSzPct val="100000"/>
               <a:buChar char="•"/>
             </a:pPr>
             <a:r>
-              <a:rPr lang="en-US" sz="1450" dirty="0">
+              <a:rPr lang="en-US" sz="1400" dirty="0">
                 <a:solidFill>
                   <a:srgbClr val="141B2D"/>
                 </a:solidFill>
               </a:rPr>
-              <a:t>Grafana dashboard: RPS, 5xx rate, p95 latency, pods up</a:t>
-            </a:r>
-            <a:endParaRPr lang="en-US" sz="1450" dirty="0"/>
+              <a:t>ServiceMonitor wires in the backend targets</a:t>
+            </a:r>
+            <a:endParaRPr lang="en-US" sz="1400" dirty="0"/>
           </a:p>
           <a:p>
             <a:pPr marL="342900" indent="-342900">
               <a:spcAft>
-                <a:spcPts val="1400"/>
+                <a:spcPts val="1300"/>
               </a:spcAft>
               <a:buSzPct val="100000"/>
               <a:buChar char="•"/>
             </a:pPr>
             <a:r>
-              <a:rPr lang="en-US" sz="1450" dirty="0">
+              <a:rPr lang="en-US" sz="1400" dirty="0">
                 <a:solidFill>
                   <a:srgbClr val="141B2D"/>
                 </a:solidFill>
               </a:rPr>
+              <a:t>Grafana: RPS, 5xx rate, p95 latency, pods up</a:t>
+            </a:r>
+            <a:endParaRPr lang="en-US" sz="1400" dirty="0"/>
+          </a:p>
+          <a:p>
+            <a:pPr marL="342900" indent="-342900">
+              <a:spcAft>
+                <a:spcPts val="1300"/>
+              </a:spcAft>
+              <a:buSzPct val="100000"/>
+              <a:buChar char="•"/>
+            </a:pPr>
+            <a:r>
+              <a:rPr lang="en-US" sz="1400" dirty="0">
+                <a:solidFill>
+                  <a:srgbClr val="141B2D"/>
+                </a:solidFill>
+              </a:rPr>
               <a:t>Alert rules: BackendDown &amp; High5xxErrorRate</a:t>
             </a:r>
-            <a:endParaRPr lang="en-US" sz="1450" dirty="0"/>
-          </a:p>
-        </p:txBody>
-      </p:sp>
-      <p:sp>
-        <p:nvSpPr>
-          <p:cNvPr id="4" name="Shape 2"/>
+            <a:endParaRPr lang="en-US" sz="1400" dirty="0"/>
+          </a:p>
+        </p:txBody>
+      </p:sp>
+      <p:sp>
+        <p:nvSpPr>
+          <p:cNvPr id="5" name="Shape 3"/>
           <p:cNvSpPr/>
           <p:nvPr/>
         </p:nvSpPr>
         <p:spPr>
           <a:xfrm>
-            <a:off x="6035040" y="1417320"/>
-            <a:ext cx="5550408" cy="4480560"/>
+            <a:off x="5669280" y="1371600"/>
+            <a:ext cx="5961888" cy="4663440"/>
           </a:xfrm>
           <a:prstGeom prst="roundRect">
             <a:avLst>
-              <a:gd name="adj" fmla="val 2041"/>
+              <a:gd name="adj" fmla="val 1176"/>
             </a:avLst>
           </a:prstGeom>
           <a:solidFill>
-            <a:srgbClr val="F8F9FC"/>
+            <a:srgbClr val="FFFFFF"/>
           </a:solidFill>
           <a:ln w="12700">
             <a:solidFill>
@@ -4622,66 +3839,37 @@
             <a:prstDash val="solid"/>
           </a:ln>
           <a:effectLst>
-            <a:outerShdw sx="100000" sy="100000" kx="0" ky="0" algn="bl" rotWithShape="0" blurRad="76200" dist="25400" dir="5400000">
-              <a:srgbClr val="9AA3B2">
-                <a:alpha val="25000"/>
+            <a:outerShdw sx="100000" sy="100000" kx="0" ky="0" algn="bl" rotWithShape="0" blurRad="114300" dist="38100" dir="5400000">
+              <a:srgbClr val="7A8396">
+                <a:alpha val="32000"/>
               </a:srgbClr>
             </a:outerShdw>
           </a:effectLst>
         </p:spPr>
       </p:sp>
-      <p:sp>
-        <p:nvSpPr>
-          <p:cNvPr id="5" name="Text 3"/>
-          <p:cNvSpPr txBox="1"/>
-          <p:nvPr/>
-        </p:nvSpPr>
-        <p:spPr>
-          <a:xfrm>
-            <a:off x="6263640" y="1554480"/>
-            <a:ext cx="5120640" cy="365760"/>
-          </a:xfrm>
-          <a:prstGeom prst="rect">
-            <a:avLst/>
-          </a:prstGeom>
-          <a:noFill/>
-          <a:ln/>
-        </p:spPr>
-        <p:txBody>
-          <a:bodyPr wrap="square" lIns="0" tIns="0" rIns="0" bIns="0" rtlCol="0" anchor="ctr"/>
-          <a:lstStyle/>
-          <a:p>
-            <a:pPr algn="l" indent="0" marL="0">
-              <a:buNone/>
-            </a:pPr>
-            <a:r>
-              <a:rPr lang="en-US" sz="1300" b="1" dirty="0">
-                <a:solidFill>
-                  <a:srgbClr val="0F1424"/>
-                </a:solidFill>
-              </a:rPr>
-              <a:t>Requests per second by endpoint (Grafana)</a:t>
-            </a:r>
-            <a:endParaRPr lang="en-US" sz="1300" dirty="0"/>
-          </a:p>
-        </p:txBody>
-      </p:sp>
-      <p:graphicFrame>
-        <p:nvGraphicFramePr>
-          <p:cNvPr id="6" name="Chart 0" descr=""/>
-          <p:cNvGraphicFramePr/>
-          <p:nvPr/>
-        </p:nvGraphicFramePr>
-        <p:xfrm>
-          <a:off x="6172200" y="1965960"/>
-          <a:ext cx="5257800" cy="3749040"/>
-        </p:xfrm>
-        <a:graphic xmlns:a="http://schemas.openxmlformats.org/drawingml/2006/main">
-          <a:graphicData uri="http://schemas.openxmlformats.org/drawingml/2006/chart">
-            <c:chart xmlns:c="http://schemas.openxmlformats.org/drawingml/2006/chart" r:id="rId1"/>
-          </a:graphicData>
-        </a:graphic>
-      </p:graphicFrame>
+      <p:pic>
+        <p:nvPicPr>
+          <p:cNvPr id="6" name="Image 0" descr="/home/narendra/Documents/devops-project/screenshot/m9-grafana-dashboard.png">    </p:cNvPr>
+          <p:cNvPicPr>
+            <a:picLocks noChangeAspect="1"/>
+          </p:cNvPicPr>
+          <p:nvPr/>
+        </p:nvPicPr>
+        <p:blipFill>
+          <a:blip r:embed="rId1"/>
+          <a:srcRect l="0" r="0" t="0" b="0"/>
+          <a:stretch/>
+        </p:blipFill>
+        <p:spPr>
+          <a:xfrm>
+            <a:off x="5815584" y="1517904"/>
+            <a:ext cx="5669280" cy="3986784"/>
+          </a:xfrm>
+          <a:prstGeom prst="rect">
+            <a:avLst/>
+          </a:prstGeom>
+        </p:spPr>
+      </p:pic>
       <p:sp>
         <p:nvSpPr>
           <p:cNvPr id="7" name="Text 4"/>
@@ -4690,44 +3878,8 @@
         </p:nvSpPr>
         <p:spPr>
           <a:xfrm>
-            <a:off x="640080" y="4572000"/>
-            <a:ext cx="2468880" cy="822960"/>
-          </a:xfrm>
-          <a:prstGeom prst="rect">
-            <a:avLst/>
-          </a:prstGeom>
-          <a:noFill/>
-          <a:ln/>
-        </p:spPr>
-        <p:txBody>
-          <a:bodyPr wrap="square" lIns="0" tIns="0" rIns="0" bIns="0" rtlCol="0" anchor="b"/>
-          <a:lstStyle/>
-          <a:p>
-            <a:pPr algn="l" indent="0" marL="0">
-              <a:buNone/>
-            </a:pPr>
-            <a:r>
-              <a:rPr lang="en-US" sz="4800" b="1" dirty="0">
-                <a:solidFill>
-                  <a:srgbClr val="16A34A"/>
-                </a:solidFill>
-              </a:rPr>
-              <a:t>2/2</a:t>
-            </a:r>
-            <a:endParaRPr lang="en-US" sz="4800" dirty="0"/>
-          </a:p>
-        </p:txBody>
-      </p:sp>
-      <p:sp>
-        <p:nvSpPr>
-          <p:cNvPr id="8" name="Text 5"/>
-          <p:cNvSpPr txBox="1"/>
-          <p:nvPr/>
-        </p:nvSpPr>
-        <p:spPr>
-          <a:xfrm>
-            <a:off x="640080" y="5440680"/>
-            <a:ext cx="2468880" cy="457200"/>
+            <a:off x="5815584" y="5605272"/>
+            <a:ext cx="5669280" cy="384048"/>
           </a:xfrm>
           <a:prstGeom prst="rect">
             <a:avLst/>
@@ -4739,90 +3891,18 @@
           <a:bodyPr wrap="square" lIns="0" tIns="0" rIns="0" bIns="0" rtlCol="0" anchor="ctr"/>
           <a:lstStyle/>
           <a:p>
-            <a:pPr algn="l" indent="0" marL="0">
-              <a:buNone/>
-            </a:pPr>
-            <a:r>
-              <a:rPr lang="en-US" sz="1300" dirty="0">
+            <a:pPr algn="ctr" indent="0" marL="0">
+              <a:buNone/>
+            </a:pPr>
+            <a:r>
+              <a:rPr lang="en-US" sz="1050" i="1" dirty="0">
                 <a:solidFill>
                   <a:srgbClr val="6B7280"/>
                 </a:solidFill>
               </a:rPr>
-              <a:t>backend targets UP</a:t>
-            </a:r>
-            <a:endParaRPr lang="en-US" sz="1300" dirty="0"/>
-          </a:p>
-        </p:txBody>
-      </p:sp>
-      <p:sp>
-        <p:nvSpPr>
-          <p:cNvPr id="9" name="Text 6"/>
-          <p:cNvSpPr txBox="1"/>
-          <p:nvPr/>
-        </p:nvSpPr>
-        <p:spPr>
-          <a:xfrm>
-            <a:off x="3200400" y="4572000"/>
-            <a:ext cx="2468880" cy="822960"/>
-          </a:xfrm>
-          <a:prstGeom prst="rect">
-            <a:avLst/>
-          </a:prstGeom>
-          <a:noFill/>
-          <a:ln/>
-        </p:spPr>
-        <p:txBody>
-          <a:bodyPr wrap="square" lIns="0" tIns="0" rIns="0" bIns="0" rtlCol="0" anchor="b"/>
-          <a:lstStyle/>
-          <a:p>
-            <a:pPr algn="l" indent="0" marL="0">
-              <a:buNone/>
-            </a:pPr>
-            <a:r>
-              <a:rPr lang="en-US" sz="4800" b="1" dirty="0">
-                <a:solidFill>
-                  <a:srgbClr val="00A896"/>
-                </a:solidFill>
-              </a:rPr>
-              <a:t>15s</a:t>
-            </a:r>
-            <a:endParaRPr lang="en-US" sz="4800" dirty="0"/>
-          </a:p>
-        </p:txBody>
-      </p:sp>
-      <p:sp>
-        <p:nvSpPr>
-          <p:cNvPr id="10" name="Text 7"/>
-          <p:cNvSpPr txBox="1"/>
-          <p:nvPr/>
-        </p:nvSpPr>
-        <p:spPr>
-          <a:xfrm>
-            <a:off x="3200400" y="5440680"/>
-            <a:ext cx="2468880" cy="457200"/>
-          </a:xfrm>
-          <a:prstGeom prst="rect">
-            <a:avLst/>
-          </a:prstGeom>
-          <a:noFill/>
-          <a:ln/>
-        </p:spPr>
-        <p:txBody>
-          <a:bodyPr wrap="square" lIns="0" tIns="0" rIns="0" bIns="0" rtlCol="0" anchor="ctr"/>
-          <a:lstStyle/>
-          <a:p>
-            <a:pPr algn="l" indent="0" marL="0">
-              <a:buNone/>
-            </a:pPr>
-            <a:r>
-              <a:rPr lang="en-US" sz="1300" dirty="0">
-                <a:solidFill>
-                  <a:srgbClr val="6B7280"/>
-                </a:solidFill>
-              </a:rPr>
-              <a:t>scrape interval</a:t>
-            </a:r>
-            <a:endParaRPr lang="en-US" sz="1300" dirty="0"/>
+              <a:t>Grafana — StockDesk Backend dashboard (live data)</a:t>
+            </a:r>
+            <a:endParaRPr lang="en-US" sz="1050" dirty="0"/>
           </a:p>
         </p:txBody>
       </p:sp>
@@ -4932,22 +4012,170 @@
       </p:sp>
       <p:sp>
         <p:nvSpPr>
-          <p:cNvPr id="3" name="Shape 1"/>
+          <p:cNvPr id="3" name="Text 1"/>
+          <p:cNvSpPr txBox="1"/>
+          <p:nvPr/>
+        </p:nvSpPr>
+        <p:spPr>
+          <a:xfrm>
+            <a:off x="548640" y="1325880"/>
+            <a:ext cx="4892040" cy="914400"/>
+          </a:xfrm>
+          <a:prstGeom prst="rect">
+            <a:avLst/>
+          </a:prstGeom>
+          <a:noFill/>
+          <a:ln/>
+        </p:spPr>
+        <p:txBody>
+          <a:bodyPr wrap="square" lIns="0" tIns="0" rIns="0" bIns="0" rtlCol="0" anchor="ctr"/>
+          <a:lstStyle/>
+          <a:p>
+            <a:pPr algn="l" indent="0" marL="0">
+              <a:buNone/>
+            </a:pPr>
+            <a:r>
+              <a:rPr lang="en-US" sz="1550" b="1" dirty="0">
+                <a:solidFill>
+                  <a:srgbClr val="141B2D"/>
+                </a:solidFill>
+              </a:rPr>
+              <a:t>Declarative, self-healing continuous delivery on top of Helm.</a:t>
+            </a:r>
+            <a:endParaRPr lang="en-US" sz="1550" dirty="0"/>
+          </a:p>
+        </p:txBody>
+      </p:sp>
+      <p:sp>
+        <p:nvSpPr>
+          <p:cNvPr id="4" name="Text 2"/>
+          <p:cNvSpPr txBox="1"/>
+          <p:nvPr/>
+        </p:nvSpPr>
+        <p:spPr>
+          <a:xfrm>
+            <a:off x="585216" y="2331720"/>
+            <a:ext cx="4846320" cy="3566160"/>
+          </a:xfrm>
+          <a:prstGeom prst="rect">
+            <a:avLst/>
+          </a:prstGeom>
+          <a:noFill/>
+          <a:ln/>
+        </p:spPr>
+        <p:txBody>
+          <a:bodyPr wrap="square" lIns="0" tIns="0" rIns="0" bIns="0" rtlCol="0" anchor="ctr"/>
+          <a:lstStyle/>
+          <a:p>
+            <a:pPr marL="342900" indent="-342900">
+              <a:spcAft>
+                <a:spcPts val="1300"/>
+              </a:spcAft>
+              <a:buSzPct val="100000"/>
+              <a:buChar char="•"/>
+            </a:pPr>
+            <a:r>
+              <a:rPr lang="en-US" sz="1400" dirty="0">
+                <a:solidFill>
+                  <a:srgbClr val="141B2D"/>
+                </a:solidFill>
+              </a:rPr>
+              <a:t>Git is the single source of truth</a:t>
+            </a:r>
+            <a:endParaRPr lang="en-US" sz="1400" dirty="0"/>
+          </a:p>
+          <a:p>
+            <a:pPr marL="342900" indent="-342900">
+              <a:spcAft>
+                <a:spcPts val="1300"/>
+              </a:spcAft>
+              <a:buSzPct val="100000"/>
+              <a:buChar char="•"/>
+            </a:pPr>
+            <a:r>
+              <a:rPr lang="en-US" sz="1400" dirty="0">
+                <a:solidFill>
+                  <a:srgbClr val="141B2D"/>
+                </a:solidFill>
+              </a:rPr>
+              <a:t>ArgoCD watches helm/stockdesk</a:t>
+            </a:r>
+            <a:endParaRPr lang="en-US" sz="1400" dirty="0"/>
+          </a:p>
+          <a:p>
+            <a:pPr marL="342900" indent="-342900">
+              <a:spcAft>
+                <a:spcPts val="1300"/>
+              </a:spcAft>
+              <a:buSzPct val="100000"/>
+              <a:buChar char="•"/>
+            </a:pPr>
+            <a:r>
+              <a:rPr lang="en-US" sz="1400" dirty="0">
+                <a:solidFill>
+                  <a:srgbClr val="141B2D"/>
+                </a:solidFill>
+              </a:rPr>
+              <a:t>Automated sync + prune</a:t>
+            </a:r>
+            <a:endParaRPr lang="en-US" sz="1400" dirty="0"/>
+          </a:p>
+          <a:p>
+            <a:pPr marL="342900" indent="-342900">
+              <a:spcAft>
+                <a:spcPts val="1300"/>
+              </a:spcAft>
+              <a:buSzPct val="100000"/>
+              <a:buChar char="•"/>
+            </a:pPr>
+            <a:r>
+              <a:rPr lang="en-US" sz="1400" dirty="0">
+                <a:solidFill>
+                  <a:srgbClr val="141B2D"/>
+                </a:solidFill>
+              </a:rPr>
+              <a:t>Self-heals manual kubectl drift</a:t>
+            </a:r>
+            <a:endParaRPr lang="en-US" sz="1400" dirty="0"/>
+          </a:p>
+          <a:p>
+            <a:pPr marL="342900" indent="-342900">
+              <a:spcAft>
+                <a:spcPts val="1300"/>
+              </a:spcAft>
+              <a:buSzPct val="100000"/>
+              <a:buChar char="•"/>
+            </a:pPr>
+            <a:r>
+              <a:rPr lang="en-US" sz="1400" dirty="0">
+                <a:solidFill>
+                  <a:srgbClr val="141B2D"/>
+                </a:solidFill>
+              </a:rPr>
+              <a:t>Result: Synced &amp; Healthy (17 resources)</a:t>
+            </a:r>
+            <a:endParaRPr lang="en-US" sz="1400" dirty="0"/>
+          </a:p>
+        </p:txBody>
+      </p:sp>
+      <p:sp>
+        <p:nvSpPr>
+          <p:cNvPr id="5" name="Shape 3"/>
           <p:cNvSpPr/>
           <p:nvPr/>
         </p:nvSpPr>
         <p:spPr>
           <a:xfrm>
-            <a:off x="548640" y="1463040"/>
-            <a:ext cx="11036808" cy="1024128"/>
+            <a:off x="5669280" y="1371600"/>
+            <a:ext cx="5961888" cy="4663440"/>
           </a:xfrm>
           <a:prstGeom prst="roundRect">
             <a:avLst>
-              <a:gd name="adj" fmla="val 8929"/>
+              <a:gd name="adj" fmla="val 1176"/>
             </a:avLst>
           </a:prstGeom>
           <a:solidFill>
-            <a:srgbClr val="F8F9FC"/>
+            <a:srgbClr val="FFFFFF"/>
           </a:solidFill>
           <a:ln w="12700">
             <a:solidFill>
@@ -4956,46 +4184,47 @@
             <a:prstDash val="solid"/>
           </a:ln>
           <a:effectLst>
-            <a:outerShdw sx="100000" sy="100000" kx="0" ky="0" algn="bl" rotWithShape="0" blurRad="76200" dist="25400" dir="5400000">
-              <a:srgbClr val="9AA3B2">
-                <a:alpha val="25000"/>
+            <a:outerShdw sx="100000" sy="100000" kx="0" ky="0" algn="bl" rotWithShape="0" blurRad="114300" dist="38100" dir="5400000">
+              <a:srgbClr val="7A8396">
+                <a:alpha val="32000"/>
               </a:srgbClr>
             </a:outerShdw>
           </a:effectLst>
         </p:spPr>
       </p:sp>
-      <p:sp>
-        <p:nvSpPr>
-          <p:cNvPr id="4" name="Shape 2"/>
-          <p:cNvSpPr/>
-          <p:nvPr/>
-        </p:nvSpPr>
-        <p:spPr>
-          <a:xfrm>
-            <a:off x="777240" y="1700784"/>
-            <a:ext cx="548640" cy="548640"/>
-          </a:xfrm>
-          <a:prstGeom prst="roundRect">
-            <a:avLst>
-              <a:gd name="adj" fmla="val 50000"/>
-            </a:avLst>
-          </a:prstGeom>
-          <a:solidFill>
-            <a:srgbClr val="4F46E5"/>
-          </a:solidFill>
-          <a:ln/>
-        </p:spPr>
-      </p:sp>
-      <p:sp>
-        <p:nvSpPr>
-          <p:cNvPr id="5" name="Text 3"/>
+      <p:pic>
+        <p:nvPicPr>
+          <p:cNvPr id="6" name="Image 0" descr="/home/narendra/Documents/devops-project/screenshot/argocd-synced-healthy.png">    </p:cNvPr>
+          <p:cNvPicPr>
+            <a:picLocks noChangeAspect="1"/>
+          </p:cNvPicPr>
+          <p:nvPr/>
+        </p:nvPicPr>
+        <p:blipFill>
+          <a:blip r:embed="rId1"/>
+          <a:srcRect l="0" r="0" t="0" b="0"/>
+          <a:stretch/>
+        </p:blipFill>
+        <p:spPr>
+          <a:xfrm>
+            <a:off x="5815584" y="1517904"/>
+            <a:ext cx="5669280" cy="3986784"/>
+          </a:xfrm>
+          <a:prstGeom prst="rect">
+            <a:avLst/>
+          </a:prstGeom>
+        </p:spPr>
+      </p:pic>
+      <p:sp>
+        <p:nvSpPr>
+          <p:cNvPr id="7" name="Text 4"/>
           <p:cNvSpPr txBox="1"/>
           <p:nvPr/>
         </p:nvSpPr>
         <p:spPr>
           <a:xfrm>
-            <a:off x="777240" y="1700784"/>
-            <a:ext cx="548640" cy="548640"/>
+            <a:off x="5815584" y="5605272"/>
+            <a:ext cx="5669280" cy="384048"/>
           </a:xfrm>
           <a:prstGeom prst="rect">
             <a:avLst/>
@@ -5011,578 +4240,14 @@
               <a:buNone/>
             </a:pPr>
             <a:r>
-              <a:rPr lang="en-US" sz="1800" b="1" dirty="0">
-                <a:solidFill>
-                  <a:srgbClr val="FFFFFF"/>
-                </a:solidFill>
-              </a:rPr>
-              <a:t>1</a:t>
-            </a:r>
-            <a:endParaRPr lang="en-US" sz="1800" dirty="0"/>
-          </a:p>
-        </p:txBody>
-      </p:sp>
-      <p:sp>
-        <p:nvSpPr>
-          <p:cNvPr id="6" name="Text 4"/>
-          <p:cNvSpPr txBox="1"/>
-          <p:nvPr/>
-        </p:nvSpPr>
-        <p:spPr>
-          <a:xfrm>
-            <a:off x="1508760" y="1627632"/>
-            <a:ext cx="5943600" cy="411480"/>
-          </a:xfrm>
-          <a:prstGeom prst="rect">
-            <a:avLst/>
-          </a:prstGeom>
-          <a:noFill/>
-          <a:ln/>
-        </p:spPr>
-        <p:txBody>
-          <a:bodyPr wrap="square" lIns="0" tIns="0" rIns="0" bIns="0" rtlCol="0" anchor="ctr"/>
-          <a:lstStyle/>
-          <a:p>
-            <a:pPr algn="l" indent="0" marL="0">
-              <a:buNone/>
-            </a:pPr>
-            <a:r>
-              <a:rPr lang="en-US" sz="1600" b="1" dirty="0">
-                <a:solidFill>
-                  <a:srgbClr val="0F1424"/>
-                </a:solidFill>
-              </a:rPr>
-              <a:t>Git is the source of truth</a:t>
-            </a:r>
-            <a:endParaRPr lang="en-US" sz="1600" dirty="0"/>
-          </a:p>
-        </p:txBody>
-      </p:sp>
-      <p:sp>
-        <p:nvSpPr>
-          <p:cNvPr id="7" name="Text 5"/>
-          <p:cNvSpPr txBox="1"/>
-          <p:nvPr/>
-        </p:nvSpPr>
-        <p:spPr>
-          <a:xfrm>
-            <a:off x="1508760" y="2011680"/>
-            <a:ext cx="9875520" cy="411480"/>
-          </a:xfrm>
-          <a:prstGeom prst="rect">
-            <a:avLst/>
-          </a:prstGeom>
-          <a:noFill/>
-          <a:ln/>
-        </p:spPr>
-        <p:txBody>
-          <a:bodyPr wrap="square" lIns="0" tIns="0" rIns="0" bIns="0" rtlCol="0" anchor="ctr"/>
-          <a:lstStyle/>
-          <a:p>
-            <a:pPr algn="l" indent="0" marL="0">
-              <a:buNone/>
-            </a:pPr>
-            <a:r>
-              <a:rPr lang="en-US" sz="1300" dirty="0">
+              <a:rPr lang="en-US" sz="1050" i="1" dirty="0">
                 <a:solidFill>
                   <a:srgbClr val="6B7280"/>
                 </a:solidFill>
               </a:rPr>
-              <a:t>ArgoCD watches helm/stockdesk and reconciles the cluster to it</a:t>
-            </a:r>
-            <a:endParaRPr lang="en-US" sz="1300" dirty="0"/>
-          </a:p>
-        </p:txBody>
-      </p:sp>
-      <p:sp>
-        <p:nvSpPr>
-          <p:cNvPr id="8" name="Shape 6"/>
-          <p:cNvSpPr/>
-          <p:nvPr/>
-        </p:nvSpPr>
-        <p:spPr>
-          <a:xfrm>
-            <a:off x="548640" y="2633472"/>
-            <a:ext cx="11036808" cy="1024128"/>
-          </a:xfrm>
-          <a:prstGeom prst="roundRect">
-            <a:avLst>
-              <a:gd name="adj" fmla="val 8929"/>
-            </a:avLst>
-          </a:prstGeom>
-          <a:solidFill>
-            <a:srgbClr val="F8F9FC"/>
-          </a:solidFill>
-          <a:ln w="12700">
-            <a:solidFill>
-              <a:srgbClr val="E6E8F0"/>
-            </a:solidFill>
-            <a:prstDash val="solid"/>
-          </a:ln>
-          <a:effectLst>
-            <a:outerShdw sx="100000" sy="100000" kx="0" ky="0" algn="bl" rotWithShape="0" blurRad="76200" dist="25400" dir="5400000">
-              <a:srgbClr val="9AA3B2">
-                <a:alpha val="25000"/>
-              </a:srgbClr>
-            </a:outerShdw>
-          </a:effectLst>
-        </p:spPr>
-      </p:sp>
-      <p:sp>
-        <p:nvSpPr>
-          <p:cNvPr id="9" name="Shape 7"/>
-          <p:cNvSpPr/>
-          <p:nvPr/>
-        </p:nvSpPr>
-        <p:spPr>
-          <a:xfrm>
-            <a:off x="777240" y="2871216"/>
-            <a:ext cx="548640" cy="548640"/>
-          </a:xfrm>
-          <a:prstGeom prst="roundRect">
-            <a:avLst>
-              <a:gd name="adj" fmla="val 50000"/>
-            </a:avLst>
-          </a:prstGeom>
-          <a:solidFill>
-            <a:srgbClr val="00A896"/>
-          </a:solidFill>
-          <a:ln/>
-        </p:spPr>
-      </p:sp>
-      <p:sp>
-        <p:nvSpPr>
-          <p:cNvPr id="10" name="Text 8"/>
-          <p:cNvSpPr txBox="1"/>
-          <p:nvPr/>
-        </p:nvSpPr>
-        <p:spPr>
-          <a:xfrm>
-            <a:off x="777240" y="2871216"/>
-            <a:ext cx="548640" cy="548640"/>
-          </a:xfrm>
-          <a:prstGeom prst="rect">
-            <a:avLst/>
-          </a:prstGeom>
-          <a:noFill/>
-          <a:ln/>
-        </p:spPr>
-        <p:txBody>
-          <a:bodyPr wrap="square" lIns="0" tIns="0" rIns="0" bIns="0" rtlCol="0" anchor="ctr"/>
-          <a:lstStyle/>
-          <a:p>
-            <a:pPr algn="ctr" indent="0" marL="0">
-              <a:buNone/>
-            </a:pPr>
-            <a:r>
-              <a:rPr lang="en-US" sz="1800" b="1" dirty="0">
-                <a:solidFill>
-                  <a:srgbClr val="FFFFFF"/>
-                </a:solidFill>
-              </a:rPr>
-              <a:t>2</a:t>
-            </a:r>
-            <a:endParaRPr lang="en-US" sz="1800" dirty="0"/>
-          </a:p>
-        </p:txBody>
-      </p:sp>
-      <p:sp>
-        <p:nvSpPr>
-          <p:cNvPr id="11" name="Text 9"/>
-          <p:cNvSpPr txBox="1"/>
-          <p:nvPr/>
-        </p:nvSpPr>
-        <p:spPr>
-          <a:xfrm>
-            <a:off x="1508760" y="2798064"/>
-            <a:ext cx="5943600" cy="411480"/>
-          </a:xfrm>
-          <a:prstGeom prst="rect">
-            <a:avLst/>
-          </a:prstGeom>
-          <a:noFill/>
-          <a:ln/>
-        </p:spPr>
-        <p:txBody>
-          <a:bodyPr wrap="square" lIns="0" tIns="0" rIns="0" bIns="0" rtlCol="0" anchor="ctr"/>
-          <a:lstStyle/>
-          <a:p>
-            <a:pPr algn="l" indent="0" marL="0">
-              <a:buNone/>
-            </a:pPr>
-            <a:r>
-              <a:rPr lang="en-US" sz="1600" b="1" dirty="0">
-                <a:solidFill>
-                  <a:srgbClr val="0F1424"/>
-                </a:solidFill>
-              </a:rPr>
-              <a:t>Pull-based delivery</a:t>
-            </a:r>
-            <a:endParaRPr lang="en-US" sz="1600" dirty="0"/>
-          </a:p>
-        </p:txBody>
-      </p:sp>
-      <p:sp>
-        <p:nvSpPr>
-          <p:cNvPr id="12" name="Text 10"/>
-          <p:cNvSpPr txBox="1"/>
-          <p:nvPr/>
-        </p:nvSpPr>
-        <p:spPr>
-          <a:xfrm>
-            <a:off x="1508760" y="3182112"/>
-            <a:ext cx="9875520" cy="411480"/>
-          </a:xfrm>
-          <a:prstGeom prst="rect">
-            <a:avLst/>
-          </a:prstGeom>
-          <a:noFill/>
-          <a:ln/>
-        </p:spPr>
-        <p:txBody>
-          <a:bodyPr wrap="square" lIns="0" tIns="0" rIns="0" bIns="0" rtlCol="0" anchor="ctr"/>
-          <a:lstStyle/>
-          <a:p>
-            <a:pPr algn="l" indent="0" marL="0">
-              <a:buNone/>
-            </a:pPr>
-            <a:r>
-              <a:rPr lang="en-US" sz="1300" dirty="0">
-                <a:solidFill>
-                  <a:srgbClr val="6B7280"/>
-                </a:solidFill>
-              </a:rPr>
-              <a:t>The cluster pulls desired state — no pushing kubeconfig around</a:t>
-            </a:r>
-            <a:endParaRPr lang="en-US" sz="1300" dirty="0"/>
-          </a:p>
-        </p:txBody>
-      </p:sp>
-      <p:sp>
-        <p:nvSpPr>
-          <p:cNvPr id="13" name="Shape 11"/>
-          <p:cNvSpPr/>
-          <p:nvPr/>
-        </p:nvSpPr>
-        <p:spPr>
-          <a:xfrm>
-            <a:off x="548640" y="3803904"/>
-            <a:ext cx="11036808" cy="1024128"/>
-          </a:xfrm>
-          <a:prstGeom prst="roundRect">
-            <a:avLst>
-              <a:gd name="adj" fmla="val 8929"/>
-            </a:avLst>
-          </a:prstGeom>
-          <a:solidFill>
-            <a:srgbClr val="F8F9FC"/>
-          </a:solidFill>
-          <a:ln w="12700">
-            <a:solidFill>
-              <a:srgbClr val="E6E8F0"/>
-            </a:solidFill>
-            <a:prstDash val="solid"/>
-          </a:ln>
-          <a:effectLst>
-            <a:outerShdw sx="100000" sy="100000" kx="0" ky="0" algn="bl" rotWithShape="0" blurRad="76200" dist="25400" dir="5400000">
-              <a:srgbClr val="9AA3B2">
-                <a:alpha val="25000"/>
-              </a:srgbClr>
-            </a:outerShdw>
-          </a:effectLst>
-        </p:spPr>
-      </p:sp>
-      <p:sp>
-        <p:nvSpPr>
-          <p:cNvPr id="14" name="Shape 12"/>
-          <p:cNvSpPr/>
-          <p:nvPr/>
-        </p:nvSpPr>
-        <p:spPr>
-          <a:xfrm>
-            <a:off x="777240" y="4041648"/>
-            <a:ext cx="548640" cy="548640"/>
-          </a:xfrm>
-          <a:prstGeom prst="roundRect">
-            <a:avLst>
-              <a:gd name="adj" fmla="val 50000"/>
-            </a:avLst>
-          </a:prstGeom>
-          <a:solidFill>
-            <a:srgbClr val="16A34A"/>
-          </a:solidFill>
-          <a:ln/>
-        </p:spPr>
-      </p:sp>
-      <p:sp>
-        <p:nvSpPr>
-          <p:cNvPr id="15" name="Text 13"/>
-          <p:cNvSpPr txBox="1"/>
-          <p:nvPr/>
-        </p:nvSpPr>
-        <p:spPr>
-          <a:xfrm>
-            <a:off x="777240" y="4041648"/>
-            <a:ext cx="548640" cy="548640"/>
-          </a:xfrm>
-          <a:prstGeom prst="rect">
-            <a:avLst/>
-          </a:prstGeom>
-          <a:noFill/>
-          <a:ln/>
-        </p:spPr>
-        <p:txBody>
-          <a:bodyPr wrap="square" lIns="0" tIns="0" rIns="0" bIns="0" rtlCol="0" anchor="ctr"/>
-          <a:lstStyle/>
-          <a:p>
-            <a:pPr algn="ctr" indent="0" marL="0">
-              <a:buNone/>
-            </a:pPr>
-            <a:r>
-              <a:rPr lang="en-US" sz="1800" b="1" dirty="0">
-                <a:solidFill>
-                  <a:srgbClr val="FFFFFF"/>
-                </a:solidFill>
-              </a:rPr>
-              <a:t>3</a:t>
-            </a:r>
-            <a:endParaRPr lang="en-US" sz="1800" dirty="0"/>
-          </a:p>
-        </p:txBody>
-      </p:sp>
-      <p:sp>
-        <p:nvSpPr>
-          <p:cNvPr id="16" name="Text 14"/>
-          <p:cNvSpPr txBox="1"/>
-          <p:nvPr/>
-        </p:nvSpPr>
-        <p:spPr>
-          <a:xfrm>
-            <a:off x="1508760" y="3968496"/>
-            <a:ext cx="5943600" cy="411480"/>
-          </a:xfrm>
-          <a:prstGeom prst="rect">
-            <a:avLst/>
-          </a:prstGeom>
-          <a:noFill/>
-          <a:ln/>
-        </p:spPr>
-        <p:txBody>
-          <a:bodyPr wrap="square" lIns="0" tIns="0" rIns="0" bIns="0" rtlCol="0" anchor="ctr"/>
-          <a:lstStyle/>
-          <a:p>
-            <a:pPr algn="l" indent="0" marL="0">
-              <a:buNone/>
-            </a:pPr>
-            <a:r>
-              <a:rPr lang="en-US" sz="1600" b="1" dirty="0">
-                <a:solidFill>
-                  <a:srgbClr val="0F1424"/>
-                </a:solidFill>
-              </a:rPr>
-              <a:t>Self-healing</a:t>
-            </a:r>
-            <a:endParaRPr lang="en-US" sz="1600" dirty="0"/>
-          </a:p>
-        </p:txBody>
-      </p:sp>
-      <p:sp>
-        <p:nvSpPr>
-          <p:cNvPr id="17" name="Text 15"/>
-          <p:cNvSpPr txBox="1"/>
-          <p:nvPr/>
-        </p:nvSpPr>
-        <p:spPr>
-          <a:xfrm>
-            <a:off x="1508760" y="4352544"/>
-            <a:ext cx="9875520" cy="411480"/>
-          </a:xfrm>
-          <a:prstGeom prst="rect">
-            <a:avLst/>
-          </a:prstGeom>
-          <a:noFill/>
-          <a:ln/>
-        </p:spPr>
-        <p:txBody>
-          <a:bodyPr wrap="square" lIns="0" tIns="0" rIns="0" bIns="0" rtlCol="0" anchor="ctr"/>
-          <a:lstStyle/>
-          <a:p>
-            <a:pPr algn="l" indent="0" marL="0">
-              <a:buNone/>
-            </a:pPr>
-            <a:r>
-              <a:rPr lang="en-US" sz="1300" dirty="0">
-                <a:solidFill>
-                  <a:srgbClr val="6B7280"/>
-                </a:solidFill>
-              </a:rPr>
-              <a:t>Manual kubectl drift is automatically reverted to Git</a:t>
-            </a:r>
-            <a:endParaRPr lang="en-US" sz="1300" dirty="0"/>
-          </a:p>
-        </p:txBody>
-      </p:sp>
-      <p:sp>
-        <p:nvSpPr>
-          <p:cNvPr id="18" name="Shape 16"/>
-          <p:cNvSpPr/>
-          <p:nvPr/>
-        </p:nvSpPr>
-        <p:spPr>
-          <a:xfrm>
-            <a:off x="548640" y="4974336"/>
-            <a:ext cx="11036808" cy="1024128"/>
-          </a:xfrm>
-          <a:prstGeom prst="roundRect">
-            <a:avLst>
-              <a:gd name="adj" fmla="val 8929"/>
-            </a:avLst>
-          </a:prstGeom>
-          <a:solidFill>
-            <a:srgbClr val="F8F9FC"/>
-          </a:solidFill>
-          <a:ln w="12700">
-            <a:solidFill>
-              <a:srgbClr val="E6E8F0"/>
-            </a:solidFill>
-            <a:prstDash val="solid"/>
-          </a:ln>
-          <a:effectLst>
-            <a:outerShdw sx="100000" sy="100000" kx="0" ky="0" algn="bl" rotWithShape="0" blurRad="76200" dist="25400" dir="5400000">
-              <a:srgbClr val="9AA3B2">
-                <a:alpha val="25000"/>
-              </a:srgbClr>
-            </a:outerShdw>
-          </a:effectLst>
-        </p:spPr>
-      </p:sp>
-      <p:sp>
-        <p:nvSpPr>
-          <p:cNvPr id="19" name="Shape 17"/>
-          <p:cNvSpPr/>
-          <p:nvPr/>
-        </p:nvSpPr>
-        <p:spPr>
-          <a:xfrm>
-            <a:off x="777240" y="5212080"/>
-            <a:ext cx="548640" cy="548640"/>
-          </a:xfrm>
-          <a:prstGeom prst="roundRect">
-            <a:avLst>
-              <a:gd name="adj" fmla="val 50000"/>
-            </a:avLst>
-          </a:prstGeom>
-          <a:solidFill>
-            <a:srgbClr val="7C3AED"/>
-          </a:solidFill>
-          <a:ln/>
-        </p:spPr>
-      </p:sp>
-      <p:sp>
-        <p:nvSpPr>
-          <p:cNvPr id="20" name="Text 18"/>
-          <p:cNvSpPr txBox="1"/>
-          <p:nvPr/>
-        </p:nvSpPr>
-        <p:spPr>
-          <a:xfrm>
-            <a:off x="777240" y="5212080"/>
-            <a:ext cx="548640" cy="548640"/>
-          </a:xfrm>
-          <a:prstGeom prst="rect">
-            <a:avLst/>
-          </a:prstGeom>
-          <a:noFill/>
-          <a:ln/>
-        </p:spPr>
-        <p:txBody>
-          <a:bodyPr wrap="square" lIns="0" tIns="0" rIns="0" bIns="0" rtlCol="0" anchor="ctr"/>
-          <a:lstStyle/>
-          <a:p>
-            <a:pPr algn="ctr" indent="0" marL="0">
-              <a:buNone/>
-            </a:pPr>
-            <a:r>
-              <a:rPr lang="en-US" sz="1800" b="1" dirty="0">
-                <a:solidFill>
-                  <a:srgbClr val="FFFFFF"/>
-                </a:solidFill>
-              </a:rPr>
-              <a:t>4</a:t>
-            </a:r>
-            <a:endParaRPr lang="en-US" sz="1800" dirty="0"/>
-          </a:p>
-        </p:txBody>
-      </p:sp>
-      <p:sp>
-        <p:nvSpPr>
-          <p:cNvPr id="21" name="Text 19"/>
-          <p:cNvSpPr txBox="1"/>
-          <p:nvPr/>
-        </p:nvSpPr>
-        <p:spPr>
-          <a:xfrm>
-            <a:off x="1508760" y="5138928"/>
-            <a:ext cx="5943600" cy="411480"/>
-          </a:xfrm>
-          <a:prstGeom prst="rect">
-            <a:avLst/>
-          </a:prstGeom>
-          <a:noFill/>
-          <a:ln/>
-        </p:spPr>
-        <p:txBody>
-          <a:bodyPr wrap="square" lIns="0" tIns="0" rIns="0" bIns="0" rtlCol="0" anchor="ctr"/>
-          <a:lstStyle/>
-          <a:p>
-            <a:pPr algn="l" indent="0" marL="0">
-              <a:buNone/>
-            </a:pPr>
-            <a:r>
-              <a:rPr lang="en-US" sz="1600" b="1" dirty="0">
-                <a:solidFill>
-                  <a:srgbClr val="0F1424"/>
-                </a:solidFill>
-              </a:rPr>
-              <a:t>Observed result</a:t>
-            </a:r>
-            <a:endParaRPr lang="en-US" sz="1600" dirty="0"/>
-          </a:p>
-        </p:txBody>
-      </p:sp>
-      <p:sp>
-        <p:nvSpPr>
-          <p:cNvPr id="22" name="Text 20"/>
-          <p:cNvSpPr txBox="1"/>
-          <p:nvPr/>
-        </p:nvSpPr>
-        <p:spPr>
-          <a:xfrm>
-            <a:off x="1508760" y="5522976"/>
-            <a:ext cx="9875520" cy="411480"/>
-          </a:xfrm>
-          <a:prstGeom prst="rect">
-            <a:avLst/>
-          </a:prstGeom>
-          <a:noFill/>
-          <a:ln/>
-        </p:spPr>
-        <p:txBody>
-          <a:bodyPr wrap="square" lIns="0" tIns="0" rIns="0" bIns="0" rtlCol="0" anchor="ctr"/>
-          <a:lstStyle/>
-          <a:p>
-            <a:pPr algn="l" indent="0" marL="0">
-              <a:buNone/>
-            </a:pPr>
-            <a:r>
-              <a:rPr lang="en-US" sz="1300" dirty="0">
-                <a:solidFill>
-                  <a:srgbClr val="6B7280"/>
-                </a:solidFill>
-              </a:rPr>
-              <a:t>Application stockdesk-capstone: Synced &amp; Healthy (17 resources)</a:t>
-            </a:r>
-            <a:endParaRPr lang="en-US" sz="1300" dirty="0"/>
+              <a:t>ArgoCD — stockdesk-capstone Synced &amp; Healthy</a:t>
+            </a:r>
+            <a:endParaRPr lang="en-US" sz="1050" dirty="0"/>
           </a:p>
         </p:txBody>
       </p:sp>
@@ -6730,12 +5395,12 @@
         </p:nvSpPr>
         <p:spPr>
           <a:xfrm>
-            <a:off x="548640" y="2148840"/>
-            <a:ext cx="3474720" cy="1600200"/>
+            <a:off x="548640" y="2103120"/>
+            <a:ext cx="3474720" cy="1371600"/>
           </a:xfrm>
           <a:prstGeom prst="roundRect">
             <a:avLst>
-              <a:gd name="adj" fmla="val 5714"/>
+              <a:gd name="adj" fmla="val 6667"/>
             </a:avLst>
           </a:prstGeom>
           <a:solidFill>
@@ -6764,7 +5429,7 @@
         </p:nvSpPr>
         <p:spPr>
           <a:xfrm>
-            <a:off x="822960" y="2395728"/>
+            <a:off x="822960" y="2331720"/>
             <a:ext cx="256032" cy="256032"/>
           </a:xfrm>
           <a:prstGeom prst="ellipse">
@@ -6784,7 +5449,7 @@
         </p:nvSpPr>
         <p:spPr>
           <a:xfrm>
-            <a:off x="1234440" y="2331720"/>
+            <a:off x="1234440" y="2267712"/>
             <a:ext cx="2560320" cy="411480"/>
           </a:xfrm>
           <a:prstGeom prst="rect">
@@ -6820,8 +5485,8 @@
         </p:nvSpPr>
         <p:spPr>
           <a:xfrm>
-            <a:off x="822960" y="2788920"/>
-            <a:ext cx="2926080" cy="822960"/>
+            <a:off x="822960" y="2724912"/>
+            <a:ext cx="2926080" cy="640080"/>
           </a:xfrm>
           <a:prstGeom prst="rect">
             <a:avLst/>
@@ -6837,14 +5502,14 @@
               <a:buNone/>
             </a:pPr>
             <a:r>
-              <a:rPr lang="en-US" sz="1300" dirty="0">
+              <a:rPr lang="en-US" sz="1250" dirty="0">
                 <a:solidFill>
                   <a:srgbClr val="6B7280"/>
                 </a:solidFill>
               </a:rPr>
               <a:t>React + Vite SPA served by unprivileged Nginx</a:t>
             </a:r>
-            <a:endParaRPr lang="en-US" sz="1300" dirty="0"/>
+            <a:endParaRPr lang="en-US" sz="1250" dirty="0"/>
           </a:p>
         </p:txBody>
       </p:sp>
@@ -6856,12 +5521,12 @@
         </p:nvSpPr>
         <p:spPr>
           <a:xfrm>
-            <a:off x="4270248" y="2148840"/>
-            <a:ext cx="3474720" cy="1600200"/>
+            <a:off x="4270248" y="2103120"/>
+            <a:ext cx="3474720" cy="1371600"/>
           </a:xfrm>
           <a:prstGeom prst="roundRect">
             <a:avLst>
-              <a:gd name="adj" fmla="val 5714"/>
+              <a:gd name="adj" fmla="val 6667"/>
             </a:avLst>
           </a:prstGeom>
           <a:solidFill>
@@ -6890,7 +5555,7 @@
         </p:nvSpPr>
         <p:spPr>
           <a:xfrm>
-            <a:off x="4544568" y="2395728"/>
+            <a:off x="4544568" y="2331720"/>
             <a:ext cx="256032" cy="256032"/>
           </a:xfrm>
           <a:prstGeom prst="ellipse">
@@ -6910,7 +5575,7 @@
         </p:nvSpPr>
         <p:spPr>
           <a:xfrm>
-            <a:off x="4956048" y="2331720"/>
+            <a:off x="4956048" y="2267712"/>
             <a:ext cx="2560320" cy="411480"/>
           </a:xfrm>
           <a:prstGeom prst="rect">
@@ -6946,8 +5611,8 @@
         </p:nvSpPr>
         <p:spPr>
           <a:xfrm>
-            <a:off x="4544568" y="2788920"/>
-            <a:ext cx="2926080" cy="822960"/>
+            <a:off x="4544568" y="2724912"/>
+            <a:ext cx="2926080" cy="640080"/>
           </a:xfrm>
           <a:prstGeom prst="rect">
             <a:avLst/>
@@ -6963,14 +5628,14 @@
               <a:buNone/>
             </a:pPr>
             <a:r>
-              <a:rPr lang="en-US" sz="1300" dirty="0">
+              <a:rPr lang="en-US" sz="1250" dirty="0">
                 <a:solidFill>
                   <a:srgbClr val="6B7280"/>
                 </a:solidFill>
               </a:rPr>
               <a:t>FastAPI (Python 3.12) REST API, SQLAlchemy ORM</a:t>
             </a:r>
-            <a:endParaRPr lang="en-US" sz="1300" dirty="0"/>
+            <a:endParaRPr lang="en-US" sz="1250" dirty="0"/>
           </a:p>
         </p:txBody>
       </p:sp>
@@ -6982,12 +5647,12 @@
         </p:nvSpPr>
         <p:spPr>
           <a:xfrm>
-            <a:off x="7991856" y="2148840"/>
-            <a:ext cx="3474720" cy="1600200"/>
+            <a:off x="7991856" y="2103120"/>
+            <a:ext cx="3474720" cy="1371600"/>
           </a:xfrm>
           <a:prstGeom prst="roundRect">
             <a:avLst>
-              <a:gd name="adj" fmla="val 5714"/>
+              <a:gd name="adj" fmla="val 6667"/>
             </a:avLst>
           </a:prstGeom>
           <a:solidFill>
@@ -7016,7 +5681,7 @@
         </p:nvSpPr>
         <p:spPr>
           <a:xfrm>
-            <a:off x="8266176" y="2395728"/>
+            <a:off x="8266176" y="2331720"/>
             <a:ext cx="256032" cy="256032"/>
           </a:xfrm>
           <a:prstGeom prst="ellipse">
@@ -7036,7 +5701,7 @@
         </p:nvSpPr>
         <p:spPr>
           <a:xfrm>
-            <a:off x="8677656" y="2331720"/>
+            <a:off x="8677656" y="2267712"/>
             <a:ext cx="2560320" cy="411480"/>
           </a:xfrm>
           <a:prstGeom prst="rect">
@@ -7072,8 +5737,8 @@
         </p:nvSpPr>
         <p:spPr>
           <a:xfrm>
-            <a:off x="8266176" y="2788920"/>
-            <a:ext cx="2926080" cy="822960"/>
+            <a:off x="8266176" y="2724912"/>
+            <a:ext cx="2926080" cy="640080"/>
           </a:xfrm>
           <a:prstGeom prst="rect">
             <a:avLst/>
@@ -7089,14 +5754,14 @@
               <a:buNone/>
             </a:pPr>
             <a:r>
-              <a:rPr lang="en-US" sz="1300" dirty="0">
+              <a:rPr lang="en-US" sz="1250" dirty="0">
                 <a:solidFill>
                   <a:srgbClr val="6B7280"/>
                 </a:solidFill>
               </a:rPr>
               <a:t>PostgreSQL 16 with Alembic migrations</a:t>
             </a:r>
-            <a:endParaRPr lang="en-US" sz="1300" dirty="0"/>
+            <a:endParaRPr lang="en-US" sz="1250" dirty="0"/>
           </a:p>
         </p:txBody>
       </p:sp>
@@ -7108,16 +5773,16 @@
         </p:nvSpPr>
         <p:spPr>
           <a:xfrm>
-            <a:off x="548640" y="4069080"/>
-            <a:ext cx="11036808" cy="1737360"/>
+            <a:off x="548640" y="3703320"/>
+            <a:ext cx="11036808" cy="2331720"/>
           </a:xfrm>
           <a:prstGeom prst="roundRect">
             <a:avLst>
-              <a:gd name="adj" fmla="val 5263"/>
+              <a:gd name="adj" fmla="val 2353"/>
             </a:avLst>
           </a:prstGeom>
           <a:solidFill>
-            <a:srgbClr val="F2F4FF"/>
+            <a:srgbClr val="FFFFFF"/>
           </a:solidFill>
           <a:ln w="12700">
             <a:solidFill>
@@ -7126,24 +5791,47 @@
             <a:prstDash val="solid"/>
           </a:ln>
           <a:effectLst>
-            <a:outerShdw sx="100000" sy="100000" kx="0" ky="0" algn="bl" rotWithShape="0" blurRad="76200" dist="25400" dir="5400000">
-              <a:srgbClr val="9AA3B2">
-                <a:alpha val="25000"/>
+            <a:outerShdw sx="100000" sy="100000" kx="0" ky="0" algn="bl" rotWithShape="0" blurRad="114300" dist="38100" dir="5400000">
+              <a:srgbClr val="7A8396">
+                <a:alpha val="32000"/>
               </a:srgbClr>
             </a:outerShdw>
           </a:effectLst>
         </p:spPr>
       </p:sp>
-      <p:sp>
-        <p:nvSpPr>
-          <p:cNvPr id="17" name="Text 15"/>
+      <p:pic>
+        <p:nvPicPr>
+          <p:cNvPr id="17" name="Image 0" descr="/home/narendra/Documents/devops-project/screenshot/m1-app-localhost-3000.png">    </p:cNvPr>
+          <p:cNvPicPr>
+            <a:picLocks noChangeAspect="1"/>
+          </p:cNvPicPr>
+          <p:nvPr/>
+        </p:nvPicPr>
+        <p:blipFill>
+          <a:blip r:embed="rId1"/>
+          <a:srcRect l="0" r="0" t="0" b="0"/>
+          <a:stretch/>
+        </p:blipFill>
+        <p:spPr>
+          <a:xfrm>
+            <a:off x="694944" y="3849624"/>
+            <a:ext cx="10744200" cy="1655064"/>
+          </a:xfrm>
+          <a:prstGeom prst="rect">
+            <a:avLst/>
+          </a:prstGeom>
+        </p:spPr>
+      </p:pic>
+      <p:sp>
+        <p:nvSpPr>
+          <p:cNvPr id="18" name="Text 15"/>
           <p:cNvSpPr txBox="1"/>
           <p:nvPr/>
         </p:nvSpPr>
         <p:spPr>
           <a:xfrm>
-            <a:off x="822960" y="4206240"/>
-            <a:ext cx="10515600" cy="457200"/>
+            <a:off x="694944" y="5605272"/>
+            <a:ext cx="10744200" cy="384048"/>
           </a:xfrm>
           <a:prstGeom prst="rect">
             <a:avLst/>
@@ -7155,330 +5843,18 @@
           <a:bodyPr wrap="square" lIns="0" tIns="0" rIns="0" bIns="0" rtlCol="0" anchor="ctr"/>
           <a:lstStyle/>
           <a:p>
-            <a:pPr algn="l" indent="0" marL="0">
-              <a:buNone/>
-            </a:pPr>
-            <a:r>
-              <a:rPr lang="en-US" sz="1600" b="1" dirty="0">
-                <a:solidFill>
-                  <a:srgbClr val="0F1424"/>
-                </a:solidFill>
-              </a:rPr>
-              <a:t>Stock status is derived from quantity</a:t>
-            </a:r>
-            <a:endParaRPr lang="en-US" sz="1600" dirty="0"/>
-          </a:p>
-        </p:txBody>
-      </p:sp>
-      <p:sp>
-        <p:nvSpPr>
-          <p:cNvPr id="18" name="Shape 16"/>
-          <p:cNvSpPr/>
-          <p:nvPr/>
-        </p:nvSpPr>
-        <p:spPr>
-          <a:xfrm>
-            <a:off x="914400" y="4892040"/>
-            <a:ext cx="201168" cy="201168"/>
-          </a:xfrm>
-          <a:prstGeom prst="ellipse">
-            <a:avLst/>
-          </a:prstGeom>
-          <a:solidFill>
-            <a:srgbClr val="16A34A"/>
-          </a:solidFill>
-          <a:ln/>
-        </p:spPr>
-      </p:sp>
-      <p:sp>
-        <p:nvSpPr>
-          <p:cNvPr id="19" name="Text 17"/>
-          <p:cNvSpPr txBox="1"/>
-          <p:nvPr/>
-        </p:nvSpPr>
-        <p:spPr>
-          <a:xfrm>
-            <a:off x="1207008" y="4809744"/>
-            <a:ext cx="2011680" cy="365760"/>
-          </a:xfrm>
-          <a:prstGeom prst="rect">
-            <a:avLst/>
-          </a:prstGeom>
-          <a:noFill/>
-          <a:ln/>
-        </p:spPr>
-        <p:txBody>
-          <a:bodyPr wrap="square" lIns="0" tIns="0" rIns="0" bIns="0" rtlCol="0" anchor="ctr"/>
-          <a:lstStyle/>
-          <a:p>
-            <a:pPr algn="l" indent="0" marL="0">
-              <a:buNone/>
-            </a:pPr>
-            <a:r>
-              <a:rPr lang="en-US" sz="1400" b="1" dirty="0">
-                <a:solidFill>
-                  <a:srgbClr val="16A34A"/>
-                </a:solidFill>
-              </a:rPr>
-              <a:t>IN_STOCK</a:t>
-            </a:r>
-            <a:endParaRPr lang="en-US" sz="1400" dirty="0"/>
-          </a:p>
-        </p:txBody>
-      </p:sp>
-      <p:sp>
-        <p:nvSpPr>
-          <p:cNvPr id="20" name="Text 18"/>
-          <p:cNvSpPr txBox="1"/>
-          <p:nvPr/>
-        </p:nvSpPr>
-        <p:spPr>
-          <a:xfrm>
-            <a:off x="1207008" y="5138928"/>
-            <a:ext cx="2743200" cy="457200"/>
-          </a:xfrm>
-          <a:prstGeom prst="rect">
-            <a:avLst/>
-          </a:prstGeom>
-          <a:noFill/>
-          <a:ln/>
-        </p:spPr>
-        <p:txBody>
-          <a:bodyPr wrap="square" lIns="0" tIns="0" rIns="0" bIns="0" rtlCol="0" anchor="ctr"/>
-          <a:lstStyle/>
-          <a:p>
-            <a:pPr algn="l" indent="0" marL="0">
-              <a:buNone/>
-            </a:pPr>
-            <a:r>
-              <a:rPr lang="en-US" sz="1200" dirty="0">
+            <a:pPr algn="ctr" indent="0" marL="0">
+              <a:buNone/>
+            </a:pPr>
+            <a:r>
+              <a:rPr lang="en-US" sz="1050" i="1" dirty="0">
                 <a:solidFill>
                   <a:srgbClr val="6B7280"/>
                 </a:solidFill>
               </a:rPr>
-              <a:t>quantity &gt; 5</a:t>
-            </a:r>
-            <a:endParaRPr lang="en-US" sz="1200" dirty="0"/>
-          </a:p>
-        </p:txBody>
-      </p:sp>
-      <p:sp>
-        <p:nvSpPr>
-          <p:cNvPr id="21" name="Shape 19"/>
-          <p:cNvSpPr/>
-          <p:nvPr/>
-        </p:nvSpPr>
-        <p:spPr>
-          <a:xfrm>
-            <a:off x="4480560" y="4892040"/>
-            <a:ext cx="201168" cy="201168"/>
-          </a:xfrm>
-          <a:prstGeom prst="ellipse">
-            <a:avLst/>
-          </a:prstGeom>
-          <a:solidFill>
-            <a:srgbClr val="D97706"/>
-          </a:solidFill>
-          <a:ln/>
-        </p:spPr>
-      </p:sp>
-      <p:sp>
-        <p:nvSpPr>
-          <p:cNvPr id="22" name="Text 20"/>
-          <p:cNvSpPr txBox="1"/>
-          <p:nvPr/>
-        </p:nvSpPr>
-        <p:spPr>
-          <a:xfrm>
-            <a:off x="4773168" y="4809744"/>
-            <a:ext cx="2011680" cy="365760"/>
-          </a:xfrm>
-          <a:prstGeom prst="rect">
-            <a:avLst/>
-          </a:prstGeom>
-          <a:noFill/>
-          <a:ln/>
-        </p:spPr>
-        <p:txBody>
-          <a:bodyPr wrap="square" lIns="0" tIns="0" rIns="0" bIns="0" rtlCol="0" anchor="ctr"/>
-          <a:lstStyle/>
-          <a:p>
-            <a:pPr algn="l" indent="0" marL="0">
-              <a:buNone/>
-            </a:pPr>
-            <a:r>
-              <a:rPr lang="en-US" sz="1400" b="1" dirty="0">
-                <a:solidFill>
-                  <a:srgbClr val="D97706"/>
-                </a:solidFill>
-              </a:rPr>
-              <a:t>LOW_STOCK</a:t>
-            </a:r>
-            <a:endParaRPr lang="en-US" sz="1400" dirty="0"/>
-          </a:p>
-        </p:txBody>
-      </p:sp>
-      <p:sp>
-        <p:nvSpPr>
-          <p:cNvPr id="23" name="Text 21"/>
-          <p:cNvSpPr txBox="1"/>
-          <p:nvPr/>
-        </p:nvSpPr>
-        <p:spPr>
-          <a:xfrm>
-            <a:off x="4773168" y="5138928"/>
-            <a:ext cx="2743200" cy="457200"/>
-          </a:xfrm>
-          <a:prstGeom prst="rect">
-            <a:avLst/>
-          </a:prstGeom>
-          <a:noFill/>
-          <a:ln/>
-        </p:spPr>
-        <p:txBody>
-          <a:bodyPr wrap="square" lIns="0" tIns="0" rIns="0" bIns="0" rtlCol="0" anchor="ctr"/>
-          <a:lstStyle/>
-          <a:p>
-            <a:pPr algn="l" indent="0" marL="0">
-              <a:buNone/>
-            </a:pPr>
-            <a:r>
-              <a:rPr lang="en-US" sz="1200" dirty="0">
-                <a:solidFill>
-                  <a:srgbClr val="6B7280"/>
-                </a:solidFill>
-              </a:rPr>
-              <a:t>1 – 5 left</a:t>
-            </a:r>
-            <a:endParaRPr lang="en-US" sz="1200" dirty="0"/>
-          </a:p>
-        </p:txBody>
-      </p:sp>
-      <p:sp>
-        <p:nvSpPr>
-          <p:cNvPr id="24" name="Shape 22"/>
-          <p:cNvSpPr/>
-          <p:nvPr/>
-        </p:nvSpPr>
-        <p:spPr>
-          <a:xfrm>
-            <a:off x="8046720" y="4892040"/>
-            <a:ext cx="201168" cy="201168"/>
-          </a:xfrm>
-          <a:prstGeom prst="ellipse">
-            <a:avLst/>
-          </a:prstGeom>
-          <a:solidFill>
-            <a:srgbClr val="DC2626"/>
-          </a:solidFill>
-          <a:ln/>
-        </p:spPr>
-      </p:sp>
-      <p:sp>
-        <p:nvSpPr>
-          <p:cNvPr id="25" name="Text 23"/>
-          <p:cNvSpPr txBox="1"/>
-          <p:nvPr/>
-        </p:nvSpPr>
-        <p:spPr>
-          <a:xfrm>
-            <a:off x="8339328" y="4809744"/>
-            <a:ext cx="2011680" cy="365760"/>
-          </a:xfrm>
-          <a:prstGeom prst="rect">
-            <a:avLst/>
-          </a:prstGeom>
-          <a:noFill/>
-          <a:ln/>
-        </p:spPr>
-        <p:txBody>
-          <a:bodyPr wrap="square" lIns="0" tIns="0" rIns="0" bIns="0" rtlCol="0" anchor="ctr"/>
-          <a:lstStyle/>
-          <a:p>
-            <a:pPr algn="l" indent="0" marL="0">
-              <a:buNone/>
-            </a:pPr>
-            <a:r>
-              <a:rPr lang="en-US" sz="1400" b="1" dirty="0">
-                <a:solidFill>
-                  <a:srgbClr val="DC2626"/>
-                </a:solidFill>
-              </a:rPr>
-              <a:t>OUT_OF_STOCK</a:t>
-            </a:r>
-            <a:endParaRPr lang="en-US" sz="1400" dirty="0"/>
-          </a:p>
-        </p:txBody>
-      </p:sp>
-      <p:sp>
-        <p:nvSpPr>
-          <p:cNvPr id="26" name="Text 24"/>
-          <p:cNvSpPr txBox="1"/>
-          <p:nvPr/>
-        </p:nvSpPr>
-        <p:spPr>
-          <a:xfrm>
-            <a:off x="8339328" y="5138928"/>
-            <a:ext cx="2743200" cy="457200"/>
-          </a:xfrm>
-          <a:prstGeom prst="rect">
-            <a:avLst/>
-          </a:prstGeom>
-          <a:noFill/>
-          <a:ln/>
-        </p:spPr>
-        <p:txBody>
-          <a:bodyPr wrap="square" lIns="0" tIns="0" rIns="0" bIns="0" rtlCol="0" anchor="ctr"/>
-          <a:lstStyle/>
-          <a:p>
-            <a:pPr algn="l" indent="0" marL="0">
-              <a:buNone/>
-            </a:pPr>
-            <a:r>
-              <a:rPr lang="en-US" sz="1200" dirty="0">
-                <a:solidFill>
-                  <a:srgbClr val="6B7280"/>
-                </a:solidFill>
-              </a:rPr>
-              <a:t>quantity = 0</a:t>
-            </a:r>
-            <a:endParaRPr lang="en-US" sz="1200" dirty="0"/>
-          </a:p>
-        </p:txBody>
-      </p:sp>
-      <p:sp>
-        <p:nvSpPr>
-          <p:cNvPr id="27" name="Text 25"/>
-          <p:cNvSpPr txBox="1"/>
-          <p:nvPr/>
-        </p:nvSpPr>
-        <p:spPr>
-          <a:xfrm>
-            <a:off x="548640" y="5943600"/>
-            <a:ext cx="11064240" cy="365760"/>
-          </a:xfrm>
-          <a:prstGeom prst="rect">
-            <a:avLst/>
-          </a:prstGeom>
-          <a:noFill/>
-          <a:ln/>
-        </p:spPr>
-        <p:txBody>
-          <a:bodyPr wrap="square" lIns="0" tIns="0" rIns="0" bIns="0" rtlCol="0" anchor="ctr"/>
-          <a:lstStyle/>
-          <a:p>
-            <a:pPr algn="l" indent="0" marL="0">
-              <a:buNone/>
-            </a:pPr>
-            <a:r>
-              <a:rPr lang="en-US" sz="1300" i="1" dirty="0">
-                <a:solidFill>
-                  <a:srgbClr val="4F46E5"/>
-                </a:solidFill>
-              </a:rPr>
-              <a:t>The point of the capstone is not the app — it is the DevOps lifecycle applied to it.</a:t>
-            </a:r>
-            <a:endParaRPr lang="en-US" sz="1300" dirty="0"/>
+              <a:t>StockDesk dashboard — derived stock status: in-stock (green), low (amber), out (red)</a:t>
+            </a:r>
+            <a:endParaRPr lang="en-US" sz="1050" dirty="0"/>
           </a:p>
         </p:txBody>
       </p:sp>
@@ -10248,31 +8624,31 @@
         </p:nvSpPr>
         <p:spPr>
           <a:xfrm>
-            <a:off x="640080" y="1371600"/>
-            <a:ext cx="2743200" cy="822960"/>
-          </a:xfrm>
-          <a:prstGeom prst="rect">
-            <a:avLst/>
-          </a:prstGeom>
-          <a:noFill/>
-          <a:ln/>
-        </p:spPr>
-        <p:txBody>
-          <a:bodyPr wrap="square" lIns="0" tIns="0" rIns="0" bIns="0" rtlCol="0" anchor="b"/>
+            <a:off x="548640" y="1325880"/>
+            <a:ext cx="4892040" cy="914400"/>
+          </a:xfrm>
+          <a:prstGeom prst="rect">
+            <a:avLst/>
+          </a:prstGeom>
+          <a:noFill/>
+          <a:ln/>
+        </p:spPr>
+        <p:txBody>
+          <a:bodyPr wrap="square" lIns="0" tIns="0" rIns="0" bIns="0" rtlCol="0" anchor="ctr"/>
           <a:lstStyle/>
           <a:p>
             <a:pPr algn="l" indent="0" marL="0">
               <a:buNone/>
             </a:pPr>
             <a:r>
-              <a:rPr lang="en-US" sz="4800" b="1" dirty="0">
-                <a:solidFill>
-                  <a:srgbClr val="4F46E5"/>
-                </a:solidFill>
-              </a:rPr>
-              <a:t>9</a:t>
-            </a:r>
-            <a:endParaRPr lang="en-US" sz="4800" dirty="0"/>
+              <a:rPr lang="en-US" sz="1550" b="1" dirty="0">
+                <a:solidFill>
+                  <a:srgbClr val="141B2D"/>
+                </a:solidFill>
+              </a:rPr>
+              <a:t>FastAPI + React + PostgreSQL — 9 REST endpoints, 11 passing tests.</a:t>
+            </a:r>
+            <a:endParaRPr lang="en-US" sz="1550" dirty="0"/>
           </a:p>
         </p:txBody>
       </p:sp>
@@ -10284,8 +8660,8 @@
         </p:nvSpPr>
         <p:spPr>
           <a:xfrm>
-            <a:off x="640080" y="2240280"/>
-            <a:ext cx="2743200" cy="457200"/>
+            <a:off x="585216" y="2331720"/>
+            <a:ext cx="4846320" cy="3566160"/>
           </a:xfrm>
           <a:prstGeom prst="rect">
             <a:avLst/>
@@ -10297,183 +8673,133 @@
           <a:bodyPr wrap="square" lIns="0" tIns="0" rIns="0" bIns="0" rtlCol="0" anchor="ctr"/>
           <a:lstStyle/>
           <a:p>
-            <a:pPr algn="l" indent="0" marL="0">
-              <a:buNone/>
-            </a:pPr>
-            <a:r>
-              <a:rPr lang="en-US" sz="1300" dirty="0">
-                <a:solidFill>
-                  <a:srgbClr val="6B7280"/>
-                </a:solidFill>
-              </a:rPr>
-              <a:t>REST endpoints</a:t>
-            </a:r>
-            <a:endParaRPr lang="en-US" sz="1300" dirty="0"/>
-          </a:p>
-        </p:txBody>
-      </p:sp>
-      <p:sp>
-        <p:nvSpPr>
-          <p:cNvPr id="5" name="Text 3"/>
-          <p:cNvSpPr txBox="1"/>
-          <p:nvPr/>
-        </p:nvSpPr>
-        <p:spPr>
-          <a:xfrm>
-            <a:off x="3657600" y="1371600"/>
-            <a:ext cx="2743200" cy="822960"/>
-          </a:xfrm>
-          <a:prstGeom prst="rect">
-            <a:avLst/>
-          </a:prstGeom>
-          <a:noFill/>
-          <a:ln/>
-        </p:spPr>
-        <p:txBody>
-          <a:bodyPr wrap="square" lIns="0" tIns="0" rIns="0" bIns="0" rtlCol="0" anchor="b"/>
-          <a:lstStyle/>
-          <a:p>
-            <a:pPr algn="l" indent="0" marL="0">
-              <a:buNone/>
-            </a:pPr>
-            <a:r>
-              <a:rPr lang="en-US" sz="4800" b="1" dirty="0">
-                <a:solidFill>
-                  <a:srgbClr val="16A34A"/>
-                </a:solidFill>
-              </a:rPr>
-              <a:t>11</a:t>
-            </a:r>
-            <a:endParaRPr lang="en-US" sz="4800" dirty="0"/>
-          </a:p>
-        </p:txBody>
-      </p:sp>
-      <p:sp>
-        <p:nvSpPr>
-          <p:cNvPr id="6" name="Text 4"/>
-          <p:cNvSpPr txBox="1"/>
-          <p:nvPr/>
-        </p:nvSpPr>
-        <p:spPr>
-          <a:xfrm>
-            <a:off x="3657600" y="2240280"/>
-            <a:ext cx="2743200" cy="457200"/>
-          </a:xfrm>
-          <a:prstGeom prst="rect">
-            <a:avLst/>
-          </a:prstGeom>
-          <a:noFill/>
-          <a:ln/>
-        </p:spPr>
-        <p:txBody>
-          <a:bodyPr wrap="square" lIns="0" tIns="0" rIns="0" bIns="0" rtlCol="0" anchor="ctr"/>
-          <a:lstStyle/>
-          <a:p>
-            <a:pPr algn="l" indent="0" marL="0">
-              <a:buNone/>
-            </a:pPr>
-            <a:r>
-              <a:rPr lang="en-US" sz="1300" dirty="0">
-                <a:solidFill>
-                  <a:srgbClr val="6B7280"/>
-                </a:solidFill>
-              </a:rPr>
-              <a:t>Pytest cases, all green</a:t>
-            </a:r>
-            <a:endParaRPr lang="en-US" sz="1300" dirty="0"/>
-          </a:p>
-        </p:txBody>
-      </p:sp>
-      <p:sp>
-        <p:nvSpPr>
-          <p:cNvPr id="7" name="Text 5"/>
-          <p:cNvSpPr txBox="1"/>
-          <p:nvPr/>
-        </p:nvSpPr>
-        <p:spPr>
-          <a:xfrm>
-            <a:off x="6675120" y="1371600"/>
-            <a:ext cx="2743200" cy="822960"/>
-          </a:xfrm>
-          <a:prstGeom prst="rect">
-            <a:avLst/>
-          </a:prstGeom>
-          <a:noFill/>
-          <a:ln/>
-        </p:spPr>
-        <p:txBody>
-          <a:bodyPr wrap="square" lIns="0" tIns="0" rIns="0" bIns="0" rtlCol="0" anchor="b"/>
-          <a:lstStyle/>
-          <a:p>
-            <a:pPr algn="l" indent="0" marL="0">
-              <a:buNone/>
-            </a:pPr>
-            <a:r>
-              <a:rPr lang="en-US" sz="4800" b="1" dirty="0">
-                <a:solidFill>
-                  <a:srgbClr val="00A896"/>
-                </a:solidFill>
-              </a:rPr>
-              <a:t>100%</a:t>
-            </a:r>
-            <a:endParaRPr lang="en-US" sz="4800" dirty="0"/>
-          </a:p>
-        </p:txBody>
-      </p:sp>
-      <p:sp>
-        <p:nvSpPr>
-          <p:cNvPr id="8" name="Text 6"/>
-          <p:cNvSpPr txBox="1"/>
-          <p:nvPr/>
-        </p:nvSpPr>
-        <p:spPr>
-          <a:xfrm>
-            <a:off x="6675120" y="2240280"/>
-            <a:ext cx="2743200" cy="457200"/>
-          </a:xfrm>
-          <a:prstGeom prst="rect">
-            <a:avLst/>
-          </a:prstGeom>
-          <a:noFill/>
-          <a:ln/>
-        </p:spPr>
-        <p:txBody>
-          <a:bodyPr wrap="square" lIns="0" tIns="0" rIns="0" bIns="0" rtlCol="0" anchor="ctr"/>
-          <a:lstStyle/>
-          <a:p>
-            <a:pPr algn="l" indent="0" marL="0">
-              <a:buNone/>
-            </a:pPr>
-            <a:r>
-              <a:rPr lang="en-US" sz="1300" dirty="0">
-                <a:solidFill>
-                  <a:srgbClr val="6B7280"/>
-                </a:solidFill>
-              </a:rPr>
-              <a:t>API test pass rate</a:t>
-            </a:r>
-            <a:endParaRPr lang="en-US" sz="1300" dirty="0"/>
-          </a:p>
-        </p:txBody>
-      </p:sp>
-      <p:sp>
-        <p:nvSpPr>
-          <p:cNvPr id="9" name="Shape 7"/>
+            <a:pPr marL="342900" indent="-342900">
+              <a:spcAft>
+                <a:spcPts val="1300"/>
+              </a:spcAft>
+              <a:buSzPct val="100000"/>
+              <a:buChar char="•"/>
+            </a:pPr>
+            <a:r>
+              <a:rPr lang="en-US" sz="1400" dirty="0">
+                <a:solidFill>
+                  <a:srgbClr val="141B2D"/>
+                </a:solidFill>
+              </a:rPr>
+              <a:t>Full CRUD on /api/products + stats</a:t>
+            </a:r>
+            <a:endParaRPr lang="en-US" sz="1400" dirty="0"/>
+          </a:p>
+          <a:p>
+            <a:pPr marL="342900" indent="-342900">
+              <a:spcAft>
+                <a:spcPts val="1300"/>
+              </a:spcAft>
+              <a:buSzPct val="100000"/>
+              <a:buChar char="•"/>
+            </a:pPr>
+            <a:r>
+              <a:rPr lang="en-US" sz="1400" dirty="0">
+                <a:solidFill>
+                  <a:srgbClr val="141B2D"/>
+                </a:solidFill>
+              </a:rPr>
+              <a:t>Stock status derived from quantity</a:t>
+            </a:r>
+            <a:endParaRPr lang="en-US" sz="1400" dirty="0"/>
+          </a:p>
+          <a:p>
+            <a:pPr marL="342900" indent="-342900">
+              <a:spcAft>
+                <a:spcPts val="1300"/>
+              </a:spcAft>
+              <a:buSzPct val="100000"/>
+              <a:buChar char="•"/>
+            </a:pPr>
+            <a:r>
+              <a:rPr lang="en-US" sz="1400" dirty="0">
+                <a:solidFill>
+                  <a:srgbClr val="141B2D"/>
+                </a:solidFill>
+              </a:rPr>
+              <a:t>11 Pytest cases on an isolated SQLite DB</a:t>
+            </a:r>
+            <a:endParaRPr lang="en-US" sz="1400" dirty="0"/>
+          </a:p>
+          <a:p>
+            <a:pPr marL="342900" indent="-342900">
+              <a:spcAft>
+                <a:spcPts val="1300"/>
+              </a:spcAft>
+              <a:buSzPct val="100000"/>
+              <a:buChar char="•"/>
+            </a:pPr>
+            <a:r>
+              <a:rPr lang="en-US" sz="1400" dirty="0">
+                <a:solidFill>
+                  <a:srgbClr val="141B2D"/>
+                </a:solidFill>
+              </a:rPr>
+              <a:t>pytest.ini + conftest.py fixtures</a:t>
+            </a:r>
+            <a:endParaRPr lang="en-US" sz="1400" dirty="0"/>
+          </a:p>
+          <a:p>
+            <a:pPr marL="342900" indent="-342900">
+              <a:spcAft>
+                <a:spcPts val="1300"/>
+              </a:spcAft>
+              <a:buSzPct val="100000"/>
+              <a:buChar char="•"/>
+            </a:pPr>
+            <a:r>
+              <a:rPr lang="en-US" sz="1400" dirty="0">
+                <a:solidFill>
+                  <a:srgbClr val="141B2D"/>
+                </a:solidFill>
+              </a:rPr>
+              <a:t>Alembic version-controls the schema</a:t>
+            </a:r>
+            <a:endParaRPr lang="en-US" sz="1400" dirty="0"/>
+          </a:p>
+          <a:p>
+            <a:pPr marL="342900" indent="-342900">
+              <a:spcAft>
+                <a:spcPts val="1300"/>
+              </a:spcAft>
+              <a:buSzPct val="100000"/>
+              <a:buChar char="•"/>
+            </a:pPr>
+            <a:r>
+              <a:rPr lang="en-US" sz="1400" dirty="0">
+                <a:solidFill>
+                  <a:srgbClr val="141B2D"/>
+                </a:solidFill>
+              </a:rPr>
+              <a:t>Tests gate the pipeline — green before build</a:t>
+            </a:r>
+            <a:endParaRPr lang="en-US" sz="1400" dirty="0"/>
+          </a:p>
+        </p:txBody>
+      </p:sp>
+      <p:sp>
+        <p:nvSpPr>
+          <p:cNvPr id="5" name="Shape 3"/>
           <p:cNvSpPr/>
           <p:nvPr/>
         </p:nvSpPr>
         <p:spPr>
           <a:xfrm>
-            <a:off x="548640" y="2971800"/>
-            <a:ext cx="5486400" cy="2971800"/>
+            <a:off x="5669280" y="1371600"/>
+            <a:ext cx="5961888" cy="4663440"/>
           </a:xfrm>
           <a:prstGeom prst="roundRect">
             <a:avLst>
-              <a:gd name="adj" fmla="val 3077"/>
+              <a:gd name="adj" fmla="val 1176"/>
             </a:avLst>
           </a:prstGeom>
           <a:solidFill>
-            <a:srgbClr val="F8F9FC"/>
+            <a:srgbClr val="FFFFFF"/>
           </a:solidFill>
           <a:ln w="12700">
             <a:solidFill>
@@ -10482,24 +8808,47 @@
             <a:prstDash val="solid"/>
           </a:ln>
           <a:effectLst>
-            <a:outerShdw sx="100000" sy="100000" kx="0" ky="0" algn="bl" rotWithShape="0" blurRad="76200" dist="25400" dir="5400000">
-              <a:srgbClr val="9AA3B2">
-                <a:alpha val="25000"/>
+            <a:outerShdw sx="100000" sy="100000" kx="0" ky="0" algn="bl" rotWithShape="0" blurRad="114300" dist="38100" dir="5400000">
+              <a:srgbClr val="7A8396">
+                <a:alpha val="32000"/>
               </a:srgbClr>
             </a:outerShdw>
           </a:effectLst>
         </p:spPr>
       </p:sp>
-      <p:sp>
-        <p:nvSpPr>
-          <p:cNvPr id="10" name="Text 8"/>
+      <p:pic>
+        <p:nvPicPr>
+          <p:cNvPr id="6" name="Image 0" descr="/home/narendra/Documents/devops-project/screenshot/m1-swagger-api-docs.png">    </p:cNvPr>
+          <p:cNvPicPr>
+            <a:picLocks noChangeAspect="1"/>
+          </p:cNvPicPr>
+          <p:nvPr/>
+        </p:nvPicPr>
+        <p:blipFill>
+          <a:blip r:embed="rId1"/>
+          <a:srcRect l="0" r="0" t="0" b="0"/>
+          <a:stretch/>
+        </p:blipFill>
+        <p:spPr>
+          <a:xfrm>
+            <a:off x="5815584" y="1517904"/>
+            <a:ext cx="5669280" cy="3986784"/>
+          </a:xfrm>
+          <a:prstGeom prst="rect">
+            <a:avLst/>
+          </a:prstGeom>
+        </p:spPr>
+      </p:pic>
+      <p:sp>
+        <p:nvSpPr>
+          <p:cNvPr id="7" name="Text 4"/>
           <p:cNvSpPr txBox="1"/>
           <p:nvPr/>
         </p:nvSpPr>
         <p:spPr>
           <a:xfrm>
-            <a:off x="777240" y="3108960"/>
-            <a:ext cx="5029200" cy="365760"/>
+            <a:off x="5815584" y="5605272"/>
+            <a:ext cx="5669280" cy="384048"/>
           </a:xfrm>
           <a:prstGeom prst="rect">
             <a:avLst/>
@@ -10511,369 +8860,18 @@
           <a:bodyPr wrap="square" lIns="0" tIns="0" rIns="0" bIns="0" rtlCol="0" anchor="ctr"/>
           <a:lstStyle/>
           <a:p>
-            <a:pPr algn="l" indent="0" marL="0">
-              <a:buNone/>
-            </a:pPr>
-            <a:r>
-              <a:rPr lang="en-US" sz="1500" b="1" dirty="0">
-                <a:solidFill>
-                  <a:srgbClr val="0F1424"/>
-                </a:solidFill>
-              </a:rPr>
-              <a:t>REST API — /api/products</a:t>
-            </a:r>
-            <a:endParaRPr lang="en-US" sz="1500" dirty="0"/>
-          </a:p>
-        </p:txBody>
-      </p:sp>
-      <p:sp>
-        <p:nvSpPr>
-          <p:cNvPr id="11" name="Text 9"/>
-          <p:cNvSpPr txBox="1"/>
-          <p:nvPr/>
-        </p:nvSpPr>
-        <p:spPr>
-          <a:xfrm>
-            <a:off x="822960" y="3520440"/>
-            <a:ext cx="5029200" cy="2286000"/>
-          </a:xfrm>
-          <a:prstGeom prst="rect">
-            <a:avLst/>
-          </a:prstGeom>
-          <a:noFill/>
-          <a:ln/>
-        </p:spPr>
-        <p:txBody>
-          <a:bodyPr wrap="square" lIns="0" tIns="0" rIns="0" bIns="0" rtlCol="0" anchor="ctr"/>
-          <a:lstStyle/>
-          <a:p>
-            <a:pPr marL="342900" indent="-342900">
-              <a:spcAft>
-                <a:spcPts val="600"/>
-              </a:spcAft>
-              <a:buSzPct val="100000"/>
-              <a:buChar char="•"/>
-            </a:pPr>
-            <a:r>
-              <a:rPr lang="en-US" sz="1250" dirty="0">
+            <a:pPr algn="ctr" indent="0" marL="0">
+              <a:buNone/>
+            </a:pPr>
+            <a:r>
+              <a:rPr lang="en-US" sz="1050" i="1" dirty="0">
                 <a:solidFill>
                   <a:srgbClr val="6B7280"/>
                 </a:solidFill>
-                <a:latin typeface="Consolas" pitchFamily="34" charset="0"/>
-                <a:ea typeface="Consolas" pitchFamily="34" charset="-122"/>
-                <a:cs typeface="Consolas" pitchFamily="34" charset="-120"/>
-              </a:rPr>
-              <a:t>GET  /health · /ready · /metrics</a:t>
-            </a:r>
-            <a:endParaRPr lang="en-US" sz="1250" dirty="0"/>
-          </a:p>
-          <a:p>
-            <a:pPr marL="342900" indent="-342900">
-              <a:spcAft>
-                <a:spcPts val="600"/>
-              </a:spcAft>
-              <a:buSzPct val="100000"/>
-              <a:buChar char="•"/>
-            </a:pPr>
-            <a:r>
-              <a:rPr lang="en-US" sz="1250" dirty="0">
-                <a:solidFill>
-                  <a:srgbClr val="141B2D"/>
-                </a:solidFill>
-                <a:latin typeface="Consolas" pitchFamily="34" charset="0"/>
-                <a:ea typeface="Consolas" pitchFamily="34" charset="-122"/>
-                <a:cs typeface="Consolas" pitchFamily="34" charset="-120"/>
-              </a:rPr>
-              <a:t>GET  /api/products   — list</a:t>
-            </a:r>
-            <a:endParaRPr lang="en-US" sz="1250" dirty="0"/>
-          </a:p>
-          <a:p>
-            <a:pPr marL="342900" indent="-342900">
-              <a:spcAft>
-                <a:spcPts val="600"/>
-              </a:spcAft>
-              <a:buSzPct val="100000"/>
-              <a:buChar char="•"/>
-            </a:pPr>
-            <a:r>
-              <a:rPr lang="en-US" sz="1250" dirty="0">
-                <a:solidFill>
-                  <a:srgbClr val="141B2D"/>
-                </a:solidFill>
-                <a:latin typeface="Consolas" pitchFamily="34" charset="0"/>
-                <a:ea typeface="Consolas" pitchFamily="34" charset="-122"/>
-                <a:cs typeface="Consolas" pitchFamily="34" charset="-120"/>
-              </a:rPr>
-              <a:t>POST  /api/products   — create</a:t>
-            </a:r>
-            <a:endParaRPr lang="en-US" sz="1250" dirty="0"/>
-          </a:p>
-          <a:p>
-            <a:pPr marL="342900" indent="-342900">
-              <a:spcAft>
-                <a:spcPts val="600"/>
-              </a:spcAft>
-              <a:buSzPct val="100000"/>
-              <a:buChar char="•"/>
-            </a:pPr>
-            <a:r>
-              <a:rPr lang="en-US" sz="1250" dirty="0">
-                <a:solidFill>
-                  <a:srgbClr val="141B2D"/>
-                </a:solidFill>
-                <a:latin typeface="Consolas" pitchFamily="34" charset="0"/>
-                <a:ea typeface="Consolas" pitchFamily="34" charset="-122"/>
-                <a:cs typeface="Consolas" pitchFamily="34" charset="-120"/>
-              </a:rPr>
-              <a:t>GET  /api/products/{id}</a:t>
-            </a:r>
-            <a:endParaRPr lang="en-US" sz="1250" dirty="0"/>
-          </a:p>
-          <a:p>
-            <a:pPr marL="342900" indent="-342900">
-              <a:spcAft>
-                <a:spcPts val="600"/>
-              </a:spcAft>
-              <a:buSzPct val="100000"/>
-              <a:buChar char="•"/>
-            </a:pPr>
-            <a:r>
-              <a:rPr lang="en-US" sz="1250" dirty="0">
-                <a:solidFill>
-                  <a:srgbClr val="141B2D"/>
-                </a:solidFill>
-                <a:latin typeface="Consolas" pitchFamily="34" charset="0"/>
-                <a:ea typeface="Consolas" pitchFamily="34" charset="-122"/>
-                <a:cs typeface="Consolas" pitchFamily="34" charset="-120"/>
-              </a:rPr>
-              <a:t>PUT  /api/products/{id}   — update</a:t>
-            </a:r>
-            <a:endParaRPr lang="en-US" sz="1250" dirty="0"/>
-          </a:p>
-          <a:p>
-            <a:pPr marL="342900" indent="-342900">
-              <a:spcAft>
-                <a:spcPts val="600"/>
-              </a:spcAft>
-              <a:buSzPct val="100000"/>
-              <a:buChar char="•"/>
-            </a:pPr>
-            <a:r>
-              <a:rPr lang="en-US" sz="1250" dirty="0">
-                <a:solidFill>
-                  <a:srgbClr val="141B2D"/>
-                </a:solidFill>
-                <a:latin typeface="Consolas" pitchFamily="34" charset="0"/>
-                <a:ea typeface="Consolas" pitchFamily="34" charset="-122"/>
-                <a:cs typeface="Consolas" pitchFamily="34" charset="-120"/>
-              </a:rPr>
-              <a:t>DELETE  /api/products/{id}</a:t>
-            </a:r>
-            <a:endParaRPr lang="en-US" sz="1250" dirty="0"/>
-          </a:p>
-          <a:p>
-            <a:pPr marL="342900" indent="-342900">
-              <a:spcAft>
-                <a:spcPts val="600"/>
-              </a:spcAft>
-              <a:buSzPct val="100000"/>
-              <a:buChar char="•"/>
-            </a:pPr>
-            <a:r>
-              <a:rPr lang="en-US" sz="1250" dirty="0">
-                <a:solidFill>
-                  <a:srgbClr val="141B2D"/>
-                </a:solidFill>
-                <a:latin typeface="Consolas" pitchFamily="34" charset="0"/>
-                <a:ea typeface="Consolas" pitchFamily="34" charset="-122"/>
-                <a:cs typeface="Consolas" pitchFamily="34" charset="-120"/>
-              </a:rPr>
-              <a:t>GET  /api/products/stats   — summary</a:t>
-            </a:r>
-            <a:endParaRPr lang="en-US" sz="1250" dirty="0"/>
-          </a:p>
-        </p:txBody>
-      </p:sp>
-      <p:sp>
-        <p:nvSpPr>
-          <p:cNvPr id="12" name="Shape 10"/>
-          <p:cNvSpPr/>
-          <p:nvPr/>
-        </p:nvSpPr>
-        <p:spPr>
-          <a:xfrm>
-            <a:off x="6263640" y="2971800"/>
-            <a:ext cx="5321808" cy="2971800"/>
-          </a:xfrm>
-          <a:prstGeom prst="roundRect">
-            <a:avLst>
-              <a:gd name="adj" fmla="val 3077"/>
-            </a:avLst>
-          </a:prstGeom>
-          <a:solidFill>
-            <a:srgbClr val="F2F4FF"/>
-          </a:solidFill>
-          <a:ln w="12700">
-            <a:solidFill>
-              <a:srgbClr val="E6E8F0"/>
-            </a:solidFill>
-            <a:prstDash val="solid"/>
-          </a:ln>
-          <a:effectLst>
-            <a:outerShdw sx="100000" sy="100000" kx="0" ky="0" algn="bl" rotWithShape="0" blurRad="76200" dist="25400" dir="5400000">
-              <a:srgbClr val="9AA3B2">
-                <a:alpha val="25000"/>
-              </a:srgbClr>
-            </a:outerShdw>
-          </a:effectLst>
-        </p:spPr>
-      </p:sp>
-      <p:sp>
-        <p:nvSpPr>
-          <p:cNvPr id="13" name="Text 11"/>
-          <p:cNvSpPr txBox="1"/>
-          <p:nvPr/>
-        </p:nvSpPr>
-        <p:spPr>
-          <a:xfrm>
-            <a:off x="6492240" y="3108960"/>
-            <a:ext cx="4846320" cy="365760"/>
-          </a:xfrm>
-          <a:prstGeom prst="rect">
-            <a:avLst/>
-          </a:prstGeom>
-          <a:noFill/>
-          <a:ln/>
-        </p:spPr>
-        <p:txBody>
-          <a:bodyPr wrap="square" lIns="0" tIns="0" rIns="0" bIns="0" rtlCol="0" anchor="ctr"/>
-          <a:lstStyle/>
-          <a:p>
-            <a:pPr algn="l" indent="0" marL="0">
-              <a:buNone/>
-            </a:pPr>
-            <a:r>
-              <a:rPr lang="en-US" sz="1500" b="1" dirty="0">
-                <a:solidFill>
-                  <a:srgbClr val="0F1424"/>
-                </a:solidFill>
-              </a:rPr>
-              <a:t>Quality gates</a:t>
-            </a:r>
-            <a:endParaRPr lang="en-US" sz="1500" dirty="0"/>
-          </a:p>
-        </p:txBody>
-      </p:sp>
-      <p:sp>
-        <p:nvSpPr>
-          <p:cNvPr id="14" name="Text 12"/>
-          <p:cNvSpPr txBox="1"/>
-          <p:nvPr/>
-        </p:nvSpPr>
-        <p:spPr>
-          <a:xfrm>
-            <a:off x="6537960" y="3566160"/>
-            <a:ext cx="4846320" cy="2286000"/>
-          </a:xfrm>
-          <a:prstGeom prst="rect">
-            <a:avLst/>
-          </a:prstGeom>
-          <a:noFill/>
-          <a:ln/>
-        </p:spPr>
-        <p:txBody>
-          <a:bodyPr wrap="square" lIns="0" tIns="0" rIns="0" bIns="0" rtlCol="0" anchor="ctr"/>
-          <a:lstStyle/>
-          <a:p>
-            <a:pPr marL="342900" indent="-342900">
-              <a:spcAft>
-                <a:spcPts val="800"/>
-              </a:spcAft>
-              <a:buSzPct val="100000"/>
-              <a:buChar char="✓"/>
-            </a:pPr>
-            <a:r>
-              <a:rPr lang="en-US" sz="1300" dirty="0">
-                <a:solidFill>
-                  <a:srgbClr val="141B2D"/>
-                </a:solidFill>
-              </a:rPr>
-              <a:t>Pytest runs against an isolated SQLite test DB</a:t>
-            </a:r>
-            <a:endParaRPr lang="en-US" sz="1300" dirty="0"/>
-          </a:p>
-          <a:p>
-            <a:pPr marL="342900" indent="-342900">
-              <a:spcAft>
-                <a:spcPts val="800"/>
-              </a:spcAft>
-              <a:buSzPct val="100000"/>
-              <a:buChar char="✓"/>
-            </a:pPr>
-            <a:r>
-              <a:rPr lang="en-US" sz="1300" dirty="0">
-                <a:solidFill>
-                  <a:srgbClr val="141B2D"/>
-                </a:solidFill>
-              </a:rPr>
-              <a:t>Covers CRUD, status derivation, stats &amp; /metrics</a:t>
-            </a:r>
-            <a:endParaRPr lang="en-US" sz="1300" dirty="0"/>
-          </a:p>
-          <a:p>
-            <a:pPr marL="342900" indent="-342900">
-              <a:spcAft>
-                <a:spcPts val="800"/>
-              </a:spcAft>
-              <a:buSzPct val="100000"/>
-              <a:buChar char="✓"/>
-            </a:pPr>
-            <a:r>
-              <a:rPr lang="en-US" sz="1300" dirty="0">
-                <a:solidFill>
-                  <a:srgbClr val="141B2D"/>
-                </a:solidFill>
-              </a:rPr>
-              <a:t>pytest.ini + conftest.py fixtures</a:t>
-            </a:r>
-            <a:endParaRPr lang="en-US" sz="1300" dirty="0"/>
-          </a:p>
-          <a:p>
-            <a:pPr marL="342900" indent="-342900">
-              <a:spcAft>
-                <a:spcPts val="800"/>
-              </a:spcAft>
-              <a:buSzPct val="100000"/>
-              <a:buChar char="✓"/>
-            </a:pPr>
-            <a:r>
-              <a:rPr lang="en-US" sz="1300" dirty="0">
-                <a:solidFill>
-                  <a:srgbClr val="141B2D"/>
-                </a:solidFill>
-              </a:rPr>
-              <a:t>Tests must pass before any image is built</a:t>
-            </a:r>
-            <a:endParaRPr lang="en-US" sz="1300" dirty="0"/>
-          </a:p>
-          <a:p>
-            <a:pPr marL="342900" indent="-342900">
-              <a:spcAft>
-                <a:spcPts val="800"/>
-              </a:spcAft>
-              <a:buSzPct val="100000"/>
-              <a:buChar char="✓"/>
-            </a:pPr>
-            <a:r>
-              <a:rPr lang="en-US" sz="1300" dirty="0">
-                <a:solidFill>
-                  <a:srgbClr val="141B2D"/>
-                </a:solidFill>
-              </a:rPr>
-              <a:t>Alembic migration version-controls the schema</a:t>
-            </a:r>
-            <a:endParaRPr lang="en-US" sz="1300" dirty="0"/>
+              </a:rPr>
+              <a:t>FastAPI auto-generated API docs at /docs</a:t>
+            </a:r>
+            <a:endParaRPr lang="en-US" sz="1050" dirty="0"/>
           </a:p>
         </p:txBody>
       </p:sp>
@@ -10983,22 +8981,152 @@
       </p:sp>
       <p:sp>
         <p:nvSpPr>
-          <p:cNvPr id="3" name="Shape 1"/>
+          <p:cNvPr id="3" name="Text 1"/>
+          <p:cNvSpPr txBox="1"/>
+          <p:nvPr/>
+        </p:nvSpPr>
+        <p:spPr>
+          <a:xfrm>
+            <a:off x="548640" y="1325880"/>
+            <a:ext cx="4892040" cy="914400"/>
+          </a:xfrm>
+          <a:prstGeom prst="rect">
+            <a:avLst/>
+          </a:prstGeom>
+          <a:noFill/>
+          <a:ln/>
+        </p:spPr>
+        <p:txBody>
+          <a:bodyPr wrap="square" lIns="0" tIns="0" rIns="0" bIns="0" rtlCol="0" anchor="ctr"/>
+          <a:lstStyle/>
+          <a:p>
+            <a:pPr algn="l" indent="0" marL="0">
+              <a:buNone/>
+            </a:pPr>
+            <a:r>
+              <a:rPr lang="en-US" sz="1550" b="1" dirty="0">
+                <a:solidFill>
+                  <a:srgbClr val="141B2D"/>
+                </a:solidFill>
+              </a:rPr>
+              <a:t>Hardened multi-stage images; the whole stack in one command.</a:t>
+            </a:r>
+            <a:endParaRPr lang="en-US" sz="1550" dirty="0"/>
+          </a:p>
+        </p:txBody>
+      </p:sp>
+      <p:sp>
+        <p:nvSpPr>
+          <p:cNvPr id="4" name="Text 2"/>
+          <p:cNvSpPr txBox="1"/>
+          <p:nvPr/>
+        </p:nvSpPr>
+        <p:spPr>
+          <a:xfrm>
+            <a:off x="585216" y="2331720"/>
+            <a:ext cx="4846320" cy="3566160"/>
+          </a:xfrm>
+          <a:prstGeom prst="rect">
+            <a:avLst/>
+          </a:prstGeom>
+          <a:noFill/>
+          <a:ln/>
+        </p:spPr>
+        <p:txBody>
+          <a:bodyPr wrap="square" lIns="0" tIns="0" rIns="0" bIns="0" rtlCol="0" anchor="ctr"/>
+          <a:lstStyle/>
+          <a:p>
+            <a:pPr marL="342900" indent="-342900">
+              <a:spcAft>
+                <a:spcPts val="1300"/>
+              </a:spcAft>
+              <a:buSzPct val="100000"/>
+              <a:buChar char="•"/>
+            </a:pPr>
+            <a:r>
+              <a:rPr lang="en-US" sz="1400" dirty="0">
+                <a:solidFill>
+                  <a:srgbClr val="141B2D"/>
+                </a:solidFill>
+              </a:rPr>
+              <a:t>Multi-stage builds — slim runtime images</a:t>
+            </a:r>
+            <a:endParaRPr lang="en-US" sz="1400" dirty="0"/>
+          </a:p>
+          <a:p>
+            <a:pPr marL="342900" indent="-342900">
+              <a:spcAft>
+                <a:spcPts val="1300"/>
+              </a:spcAft>
+              <a:buSzPct val="100000"/>
+              <a:buChar char="•"/>
+            </a:pPr>
+            <a:r>
+              <a:rPr lang="en-US" sz="1400" dirty="0">
+                <a:solidFill>
+                  <a:srgbClr val="141B2D"/>
+                </a:solidFill>
+              </a:rPr>
+              <a:t>Non-root: backend UID 10001, Nginx on :8080</a:t>
+            </a:r>
+            <a:endParaRPr lang="en-US" sz="1400" dirty="0"/>
+          </a:p>
+          <a:p>
+            <a:pPr marL="342900" indent="-342900">
+              <a:spcAft>
+                <a:spcPts val="1300"/>
+              </a:spcAft>
+              <a:buSzPct val="100000"/>
+              <a:buChar char="•"/>
+            </a:pPr>
+            <a:r>
+              <a:rPr lang="en-US" sz="1400" dirty="0">
+                <a:solidFill>
+                  <a:srgbClr val="141B2D"/>
+                </a:solidFill>
+              </a:rPr>
+              <a:t>docker compose up --build boots all 3 tiers</a:t>
+            </a:r>
+            <a:endParaRPr lang="en-US" sz="1400" dirty="0"/>
+          </a:p>
+          <a:p>
+            <a:pPr marL="342900" indent="-342900">
+              <a:spcAft>
+                <a:spcPts val="1300"/>
+              </a:spcAft>
+              <a:buSzPct val="100000"/>
+              <a:buChar char="•"/>
+            </a:pPr>
+            <a:r>
+              <a:rPr lang="en-US" sz="1400" dirty="0">
+                <a:solidFill>
+                  <a:srgbClr val="141B2D"/>
+                </a:solidFill>
+              </a:rPr>
+              <a:t>.dockerignore keeps .git / .venv out of layers</a:t>
+            </a:r>
+            <a:endParaRPr lang="en-US" sz="1400" dirty="0"/>
+          </a:p>
+        </p:txBody>
+      </p:sp>
+      <p:sp>
+        <p:nvSpPr>
+          <p:cNvPr id="5" name="Shape 3"/>
           <p:cNvSpPr/>
           <p:nvPr/>
         </p:nvSpPr>
         <p:spPr>
           <a:xfrm>
-            <a:off x="548640" y="1463040"/>
-            <a:ext cx="11036808" cy="1024128"/>
+            <a:off x="5669280" y="1371600"/>
+            <a:ext cx="5961888" cy="4663440"/>
           </a:xfrm>
           <a:prstGeom prst="roundRect">
             <a:avLst>
-              <a:gd name="adj" fmla="val 8929"/>
+              <a:gd name="adj" fmla="val 1176"/>
             </a:avLst>
           </a:prstGeom>
           <a:solidFill>
-            <a:srgbClr val="F8F9FC"/>
+            <a:srgbClr val="FFFFFF"/>
           </a:solidFill>
           <a:ln w="12700">
             <a:solidFill>
@@ -11007,46 +9135,47 @@
             <a:prstDash val="solid"/>
           </a:ln>
           <a:effectLst>
-            <a:outerShdw sx="100000" sy="100000" kx="0" ky="0" algn="bl" rotWithShape="0" blurRad="76200" dist="25400" dir="5400000">
-              <a:srgbClr val="9AA3B2">
-                <a:alpha val="25000"/>
+            <a:outerShdw sx="100000" sy="100000" kx="0" ky="0" algn="bl" rotWithShape="0" blurRad="114300" dist="38100" dir="5400000">
+              <a:srgbClr val="7A8396">
+                <a:alpha val="32000"/>
               </a:srgbClr>
             </a:outerShdw>
           </a:effectLst>
         </p:spPr>
       </p:sp>
-      <p:sp>
-        <p:nvSpPr>
-          <p:cNvPr id="4" name="Shape 2"/>
-          <p:cNvSpPr/>
-          <p:nvPr/>
-        </p:nvSpPr>
-        <p:spPr>
-          <a:xfrm>
-            <a:off x="777240" y="1700784"/>
-            <a:ext cx="548640" cy="548640"/>
-          </a:xfrm>
-          <a:prstGeom prst="roundRect">
-            <a:avLst>
-              <a:gd name="adj" fmla="val 20000"/>
-            </a:avLst>
-          </a:prstGeom>
-          <a:solidFill>
-            <a:srgbClr val="4F46E5"/>
-          </a:solidFill>
-          <a:ln/>
-        </p:spPr>
-      </p:sp>
-      <p:sp>
-        <p:nvSpPr>
-          <p:cNvPr id="5" name="Text 3"/>
+      <p:pic>
+        <p:nvPicPr>
+          <p:cNvPr id="6" name="Image 0" descr="/home/narendra/Documents/devops-project/screenshot/m4-docker-compose-build.png">    </p:cNvPr>
+          <p:cNvPicPr>
+            <a:picLocks noChangeAspect="1"/>
+          </p:cNvPicPr>
+          <p:nvPr/>
+        </p:nvPicPr>
+        <p:blipFill>
+          <a:blip r:embed="rId1"/>
+          <a:srcRect l="0" r="0" t="0" b="0"/>
+          <a:stretch/>
+        </p:blipFill>
+        <p:spPr>
+          <a:xfrm>
+            <a:off x="5815584" y="1517904"/>
+            <a:ext cx="5669280" cy="3986784"/>
+          </a:xfrm>
+          <a:prstGeom prst="rect">
+            <a:avLst/>
+          </a:prstGeom>
+        </p:spPr>
+      </p:pic>
+      <p:sp>
+        <p:nvSpPr>
+          <p:cNvPr id="7" name="Text 4"/>
           <p:cNvSpPr txBox="1"/>
           <p:nvPr/>
         </p:nvSpPr>
         <p:spPr>
           <a:xfrm>
-            <a:off x="1508760" y="1627632"/>
-            <a:ext cx="4572000" cy="411480"/>
+            <a:off x="5815584" y="5605272"/>
+            <a:ext cx="5669280" cy="384048"/>
           </a:xfrm>
           <a:prstGeom prst="rect">
             <a:avLst/>
@@ -11058,438 +9187,18 @@
           <a:bodyPr wrap="square" lIns="0" tIns="0" rIns="0" bIns="0" rtlCol="0" anchor="ctr"/>
           <a:lstStyle/>
           <a:p>
-            <a:pPr algn="l" indent="0" marL="0">
-              <a:buNone/>
-            </a:pPr>
-            <a:r>
-              <a:rPr lang="en-US" sz="1600" b="1" dirty="0">
-                <a:solidFill>
-                  <a:srgbClr val="0F1424"/>
-                </a:solidFill>
-              </a:rPr>
-              <a:t>Multi-stage builds</a:t>
-            </a:r>
-            <a:endParaRPr lang="en-US" sz="1600" dirty="0"/>
-          </a:p>
-        </p:txBody>
-      </p:sp>
-      <p:sp>
-        <p:nvSpPr>
-          <p:cNvPr id="6" name="Text 4"/>
-          <p:cNvSpPr txBox="1"/>
-          <p:nvPr/>
-        </p:nvSpPr>
-        <p:spPr>
-          <a:xfrm>
-            <a:off x="1508760" y="2011680"/>
-            <a:ext cx="9784080" cy="411480"/>
-          </a:xfrm>
-          <a:prstGeom prst="rect">
-            <a:avLst/>
-          </a:prstGeom>
-          <a:noFill/>
-          <a:ln/>
-        </p:spPr>
-        <p:txBody>
-          <a:bodyPr wrap="square" lIns="0" tIns="0" rIns="0" bIns="0" rtlCol="0" anchor="ctr"/>
-          <a:lstStyle/>
-          <a:p>
-            <a:pPr algn="l" indent="0" marL="0">
-              <a:buNone/>
-            </a:pPr>
-            <a:r>
-              <a:rPr lang="en-US" sz="1300" dirty="0">
+            <a:pPr algn="ctr" indent="0" marL="0">
+              <a:buNone/>
+            </a:pPr>
+            <a:r>
+              <a:rPr lang="en-US" sz="1050" i="1" dirty="0">
                 <a:solidFill>
                   <a:srgbClr val="6B7280"/>
                 </a:solidFill>
               </a:rPr>
-              <a:t>Build tools stripped from runtime images — small, clean layers</a:t>
-            </a:r>
-            <a:endParaRPr lang="en-US" sz="1300" dirty="0"/>
-          </a:p>
-        </p:txBody>
-      </p:sp>
-      <p:sp>
-        <p:nvSpPr>
-          <p:cNvPr id="7" name="Shape 5"/>
-          <p:cNvSpPr/>
-          <p:nvPr/>
-        </p:nvSpPr>
-        <p:spPr>
-          <a:xfrm>
-            <a:off x="548640" y="2633472"/>
-            <a:ext cx="11036808" cy="1024128"/>
-          </a:xfrm>
-          <a:prstGeom prst="roundRect">
-            <a:avLst>
-              <a:gd name="adj" fmla="val 8929"/>
-            </a:avLst>
-          </a:prstGeom>
-          <a:solidFill>
-            <a:srgbClr val="F8F9FC"/>
-          </a:solidFill>
-          <a:ln w="12700">
-            <a:solidFill>
-              <a:srgbClr val="E6E8F0"/>
-            </a:solidFill>
-            <a:prstDash val="solid"/>
-          </a:ln>
-          <a:effectLst>
-            <a:outerShdw sx="100000" sy="100000" kx="0" ky="0" algn="bl" rotWithShape="0" blurRad="76200" dist="25400" dir="5400000">
-              <a:srgbClr val="9AA3B2">
-                <a:alpha val="25000"/>
-              </a:srgbClr>
-            </a:outerShdw>
-          </a:effectLst>
-        </p:spPr>
-      </p:sp>
-      <p:sp>
-        <p:nvSpPr>
-          <p:cNvPr id="8" name="Shape 6"/>
-          <p:cNvSpPr/>
-          <p:nvPr/>
-        </p:nvSpPr>
-        <p:spPr>
-          <a:xfrm>
-            <a:off x="777240" y="2871216"/>
-            <a:ext cx="548640" cy="548640"/>
-          </a:xfrm>
-          <a:prstGeom prst="roundRect">
-            <a:avLst>
-              <a:gd name="adj" fmla="val 20000"/>
-            </a:avLst>
-          </a:prstGeom>
-          <a:solidFill>
-            <a:srgbClr val="00A896"/>
-          </a:solidFill>
-          <a:ln/>
-        </p:spPr>
-      </p:sp>
-      <p:sp>
-        <p:nvSpPr>
-          <p:cNvPr id="9" name="Text 7"/>
-          <p:cNvSpPr txBox="1"/>
-          <p:nvPr/>
-        </p:nvSpPr>
-        <p:spPr>
-          <a:xfrm>
-            <a:off x="1508760" y="2798064"/>
-            <a:ext cx="4572000" cy="411480"/>
-          </a:xfrm>
-          <a:prstGeom prst="rect">
-            <a:avLst/>
-          </a:prstGeom>
-          <a:noFill/>
-          <a:ln/>
-        </p:spPr>
-        <p:txBody>
-          <a:bodyPr wrap="square" lIns="0" tIns="0" rIns="0" bIns="0" rtlCol="0" anchor="ctr"/>
-          <a:lstStyle/>
-          <a:p>
-            <a:pPr algn="l" indent="0" marL="0">
-              <a:buNone/>
-            </a:pPr>
-            <a:r>
-              <a:rPr lang="en-US" sz="1600" b="1" dirty="0">
-                <a:solidFill>
-                  <a:srgbClr val="0F1424"/>
-                </a:solidFill>
-              </a:rPr>
-              <a:t>Non-root by default</a:t>
-            </a:r>
-            <a:endParaRPr lang="en-US" sz="1600" dirty="0"/>
-          </a:p>
-        </p:txBody>
-      </p:sp>
-      <p:sp>
-        <p:nvSpPr>
-          <p:cNvPr id="10" name="Text 8"/>
-          <p:cNvSpPr txBox="1"/>
-          <p:nvPr/>
-        </p:nvSpPr>
-        <p:spPr>
-          <a:xfrm>
-            <a:off x="1508760" y="3182112"/>
-            <a:ext cx="9784080" cy="411480"/>
-          </a:xfrm>
-          <a:prstGeom prst="rect">
-            <a:avLst/>
-          </a:prstGeom>
-          <a:noFill/>
-          <a:ln/>
-        </p:spPr>
-        <p:txBody>
-          <a:bodyPr wrap="square" lIns="0" tIns="0" rIns="0" bIns="0" rtlCol="0" anchor="ctr"/>
-          <a:lstStyle/>
-          <a:p>
-            <a:pPr algn="l" indent="0" marL="0">
-              <a:buNone/>
-            </a:pPr>
-            <a:r>
-              <a:rPr lang="en-US" sz="1300" dirty="0">
-                <a:solidFill>
-                  <a:srgbClr val="6B7280"/>
-                </a:solidFill>
-              </a:rPr>
-              <a:t>Backend UID 10001 · frontend unprivileged Nginx on :8080</a:t>
-            </a:r>
-            <a:endParaRPr lang="en-US" sz="1300" dirty="0"/>
-          </a:p>
-        </p:txBody>
-      </p:sp>
-      <p:sp>
-        <p:nvSpPr>
-          <p:cNvPr id="11" name="Shape 9"/>
-          <p:cNvSpPr/>
-          <p:nvPr/>
-        </p:nvSpPr>
-        <p:spPr>
-          <a:xfrm>
-            <a:off x="548640" y="3803904"/>
-            <a:ext cx="11036808" cy="1024128"/>
-          </a:xfrm>
-          <a:prstGeom prst="roundRect">
-            <a:avLst>
-              <a:gd name="adj" fmla="val 8929"/>
-            </a:avLst>
-          </a:prstGeom>
-          <a:solidFill>
-            <a:srgbClr val="F8F9FC"/>
-          </a:solidFill>
-          <a:ln w="12700">
-            <a:solidFill>
-              <a:srgbClr val="E6E8F0"/>
-            </a:solidFill>
-            <a:prstDash val="solid"/>
-          </a:ln>
-          <a:effectLst>
-            <a:outerShdw sx="100000" sy="100000" kx="0" ky="0" algn="bl" rotWithShape="0" blurRad="76200" dist="25400" dir="5400000">
-              <a:srgbClr val="9AA3B2">
-                <a:alpha val="25000"/>
-              </a:srgbClr>
-            </a:outerShdw>
-          </a:effectLst>
-        </p:spPr>
-      </p:sp>
-      <p:sp>
-        <p:nvSpPr>
-          <p:cNvPr id="12" name="Shape 10"/>
-          <p:cNvSpPr/>
-          <p:nvPr/>
-        </p:nvSpPr>
-        <p:spPr>
-          <a:xfrm>
-            <a:off x="777240" y="4041648"/>
-            <a:ext cx="548640" cy="548640"/>
-          </a:xfrm>
-          <a:prstGeom prst="roundRect">
-            <a:avLst>
-              <a:gd name="adj" fmla="val 20000"/>
-            </a:avLst>
-          </a:prstGeom>
-          <a:solidFill>
-            <a:srgbClr val="16A34A"/>
-          </a:solidFill>
-          <a:ln/>
-        </p:spPr>
-      </p:sp>
-      <p:sp>
-        <p:nvSpPr>
-          <p:cNvPr id="13" name="Text 11"/>
-          <p:cNvSpPr txBox="1"/>
-          <p:nvPr/>
-        </p:nvSpPr>
-        <p:spPr>
-          <a:xfrm>
-            <a:off x="1508760" y="3968496"/>
-            <a:ext cx="4572000" cy="411480"/>
-          </a:xfrm>
-          <a:prstGeom prst="rect">
-            <a:avLst/>
-          </a:prstGeom>
-          <a:noFill/>
-          <a:ln/>
-        </p:spPr>
-        <p:txBody>
-          <a:bodyPr wrap="square" lIns="0" tIns="0" rIns="0" bIns="0" rtlCol="0" anchor="ctr"/>
-          <a:lstStyle/>
-          <a:p>
-            <a:pPr algn="l" indent="0" marL="0">
-              <a:buNone/>
-            </a:pPr>
-            <a:r>
-              <a:rPr lang="en-US" sz="1600" b="1" dirty="0">
-                <a:solidFill>
-                  <a:srgbClr val="0F1424"/>
-                </a:solidFill>
-              </a:rPr>
-              <a:t>One-command stack</a:t>
-            </a:r>
-            <a:endParaRPr lang="en-US" sz="1600" dirty="0"/>
-          </a:p>
-        </p:txBody>
-      </p:sp>
-      <p:sp>
-        <p:nvSpPr>
-          <p:cNvPr id="14" name="Text 12"/>
-          <p:cNvSpPr txBox="1"/>
-          <p:nvPr/>
-        </p:nvSpPr>
-        <p:spPr>
-          <a:xfrm>
-            <a:off x="1508760" y="4352544"/>
-            <a:ext cx="9784080" cy="411480"/>
-          </a:xfrm>
-          <a:prstGeom prst="rect">
-            <a:avLst/>
-          </a:prstGeom>
-          <a:noFill/>
-          <a:ln/>
-        </p:spPr>
-        <p:txBody>
-          <a:bodyPr wrap="square" lIns="0" tIns="0" rIns="0" bIns="0" rtlCol="0" anchor="ctr"/>
-          <a:lstStyle/>
-          <a:p>
-            <a:pPr algn="l" indent="0" marL="0">
-              <a:buNone/>
-            </a:pPr>
-            <a:r>
-              <a:rPr lang="en-US" sz="1300" dirty="0">
-                <a:solidFill>
-                  <a:srgbClr val="6B7280"/>
-                </a:solidFill>
-              </a:rPr>
-              <a:t>docker compose up --build boots Postgres + backend + frontend</a:t>
-            </a:r>
-            <a:endParaRPr lang="en-US" sz="1300" dirty="0"/>
-          </a:p>
-        </p:txBody>
-      </p:sp>
-      <p:sp>
-        <p:nvSpPr>
-          <p:cNvPr id="15" name="Shape 13"/>
-          <p:cNvSpPr/>
-          <p:nvPr/>
-        </p:nvSpPr>
-        <p:spPr>
-          <a:xfrm>
-            <a:off x="548640" y="4974336"/>
-            <a:ext cx="11036808" cy="1024128"/>
-          </a:xfrm>
-          <a:prstGeom prst="roundRect">
-            <a:avLst>
-              <a:gd name="adj" fmla="val 8929"/>
-            </a:avLst>
-          </a:prstGeom>
-          <a:solidFill>
-            <a:srgbClr val="F8F9FC"/>
-          </a:solidFill>
-          <a:ln w="12700">
-            <a:solidFill>
-              <a:srgbClr val="E6E8F0"/>
-            </a:solidFill>
-            <a:prstDash val="solid"/>
-          </a:ln>
-          <a:effectLst>
-            <a:outerShdw sx="100000" sy="100000" kx="0" ky="0" algn="bl" rotWithShape="0" blurRad="76200" dist="25400" dir="5400000">
-              <a:srgbClr val="9AA3B2">
-                <a:alpha val="25000"/>
-              </a:srgbClr>
-            </a:outerShdw>
-          </a:effectLst>
-        </p:spPr>
-      </p:sp>
-      <p:sp>
-        <p:nvSpPr>
-          <p:cNvPr id="16" name="Shape 14"/>
-          <p:cNvSpPr/>
-          <p:nvPr/>
-        </p:nvSpPr>
-        <p:spPr>
-          <a:xfrm>
-            <a:off x="777240" y="5212080"/>
-            <a:ext cx="548640" cy="548640"/>
-          </a:xfrm>
-          <a:prstGeom prst="roundRect">
-            <a:avLst>
-              <a:gd name="adj" fmla="val 20000"/>
-            </a:avLst>
-          </a:prstGeom>
-          <a:solidFill>
-            <a:srgbClr val="7C3AED"/>
-          </a:solidFill>
-          <a:ln/>
-        </p:spPr>
-      </p:sp>
-      <p:sp>
-        <p:nvSpPr>
-          <p:cNvPr id="17" name="Text 15"/>
-          <p:cNvSpPr txBox="1"/>
-          <p:nvPr/>
-        </p:nvSpPr>
-        <p:spPr>
-          <a:xfrm>
-            <a:off x="1508760" y="5138928"/>
-            <a:ext cx="4572000" cy="411480"/>
-          </a:xfrm>
-          <a:prstGeom prst="rect">
-            <a:avLst/>
-          </a:prstGeom>
-          <a:noFill/>
-          <a:ln/>
-        </p:spPr>
-        <p:txBody>
-          <a:bodyPr wrap="square" lIns="0" tIns="0" rIns="0" bIns="0" rtlCol="0" anchor="ctr"/>
-          <a:lstStyle/>
-          <a:p>
-            <a:pPr algn="l" indent="0" marL="0">
-              <a:buNone/>
-            </a:pPr>
-            <a:r>
-              <a:rPr lang="en-US" sz="1600" b="1" dirty="0">
-                <a:solidFill>
-                  <a:srgbClr val="0F1424"/>
-                </a:solidFill>
-              </a:rPr>
-              <a:t>.dockerignore hygiene</a:t>
-            </a:r>
-            <a:endParaRPr lang="en-US" sz="1600" dirty="0"/>
-          </a:p>
-        </p:txBody>
-      </p:sp>
-      <p:sp>
-        <p:nvSpPr>
-          <p:cNvPr id="18" name="Text 16"/>
-          <p:cNvSpPr txBox="1"/>
-          <p:nvPr/>
-        </p:nvSpPr>
-        <p:spPr>
-          <a:xfrm>
-            <a:off x="1508760" y="5522976"/>
-            <a:ext cx="9784080" cy="411480"/>
-          </a:xfrm>
-          <a:prstGeom prst="rect">
-            <a:avLst/>
-          </a:prstGeom>
-          <a:noFill/>
-          <a:ln/>
-        </p:spPr>
-        <p:txBody>
-          <a:bodyPr wrap="square" lIns="0" tIns="0" rIns="0" bIns="0" rtlCol="0" anchor="ctr"/>
-          <a:lstStyle/>
-          <a:p>
-            <a:pPr algn="l" indent="0" marL="0">
-              <a:buNone/>
-            </a:pPr>
-            <a:r>
-              <a:rPr lang="en-US" sz="1300" dirty="0">
-                <a:solidFill>
-                  <a:srgbClr val="6B7280"/>
-                </a:solidFill>
-              </a:rPr>
-              <a:t>No .git, node_modules, .venv or test DBs baked into layers</a:t>
-            </a:r>
-            <a:endParaRPr lang="en-US" sz="1300" dirty="0"/>
+              <a:t>docker compose up --build — backend + frontend + Postgres</a:t>
+            </a:r>
+            <a:endParaRPr lang="en-US" sz="1050" dirty="0"/>
           </a:p>
         </p:txBody>
       </p:sp>
@@ -11605,8 +9314,8 @@
         </p:nvSpPr>
         <p:spPr>
           <a:xfrm>
-            <a:off x="548640" y="1234440"/>
-            <a:ext cx="11064240" cy="457200"/>
+            <a:off x="548640" y="1325880"/>
+            <a:ext cx="4892040" cy="914400"/>
           </a:xfrm>
           <a:prstGeom prst="rect">
             <a:avLst/>
@@ -11622,35 +9331,147 @@
               <a:buNone/>
             </a:pPr>
             <a:r>
-              <a:rPr lang="en-US" sz="1500" dirty="0">
+              <a:rPr lang="en-US" sz="1550" b="1" dirty="0">
                 <a:solidFill>
                   <a:srgbClr val="141B2D"/>
                 </a:solidFill>
               </a:rPr>
-              <a:t>GitHub Actions runs on every push &amp; PR to main. Each stage gates the next.</a:t>
-            </a:r>
-            <a:endParaRPr lang="en-US" sz="1500" dirty="0"/>
-          </a:p>
-        </p:txBody>
-      </p:sp>
-      <p:sp>
-        <p:nvSpPr>
-          <p:cNvPr id="4" name="Shape 2"/>
+              <a:t>GitHub Actions on every push to main: test → scan → build → push → deploy.</a:t>
+            </a:r>
+            <a:endParaRPr lang="en-US" sz="1550" dirty="0"/>
+          </a:p>
+        </p:txBody>
+      </p:sp>
+      <p:sp>
+        <p:nvSpPr>
+          <p:cNvPr id="4" name="Text 2"/>
+          <p:cNvSpPr txBox="1"/>
+          <p:nvPr/>
+        </p:nvSpPr>
+        <p:spPr>
+          <a:xfrm>
+            <a:off x="585216" y="2331720"/>
+            <a:ext cx="4846320" cy="3566160"/>
+          </a:xfrm>
+          <a:prstGeom prst="rect">
+            <a:avLst/>
+          </a:prstGeom>
+          <a:noFill/>
+          <a:ln/>
+        </p:spPr>
+        <p:txBody>
+          <a:bodyPr wrap="square" lIns="0" tIns="0" rIns="0" bIns="0" rtlCol="0" anchor="ctr"/>
+          <a:lstStyle/>
+          <a:p>
+            <a:pPr marL="342900" indent="-342900">
+              <a:spcAft>
+                <a:spcPts val="1300"/>
+              </a:spcAft>
+              <a:buSzPct val="100000"/>
+              <a:buChar char="•"/>
+            </a:pPr>
+            <a:r>
+              <a:rPr lang="en-US" sz="1400" dirty="0">
+                <a:solidFill>
+                  <a:srgbClr val="141B2D"/>
+                </a:solidFill>
+              </a:rPr>
+              <a:t>Pytest + Vite build gate the pipeline</a:t>
+            </a:r>
+            <a:endParaRPr lang="en-US" sz="1400" dirty="0"/>
+          </a:p>
+          <a:p>
+            <a:pPr marL="342900" indent="-342900">
+              <a:spcAft>
+                <a:spcPts val="1300"/>
+              </a:spcAft>
+              <a:buSzPct val="100000"/>
+              <a:buChar char="•"/>
+            </a:pPr>
+            <a:r>
+              <a:rPr lang="en-US" sz="1400" dirty="0">
+                <a:solidFill>
+                  <a:srgbClr val="141B2D"/>
+                </a:solidFill>
+              </a:rPr>
+              <a:t>Trivy CVE scan (HIGH/CRITICAL)</a:t>
+            </a:r>
+            <a:endParaRPr lang="en-US" sz="1400" dirty="0"/>
+          </a:p>
+          <a:p>
+            <a:pPr marL="342900" indent="-342900">
+              <a:spcAft>
+                <a:spcPts val="1300"/>
+              </a:spcAft>
+              <a:buSzPct val="100000"/>
+              <a:buChar char="•"/>
+            </a:pPr>
+            <a:r>
+              <a:rPr lang="en-US" sz="1400" dirty="0">
+                <a:solidFill>
+                  <a:srgbClr val="141B2D"/>
+                </a:solidFill>
+              </a:rPr>
+              <a:t>Images tagged by exact commit SHA — never :latest</a:t>
+            </a:r>
+            <a:endParaRPr lang="en-US" sz="1400" dirty="0"/>
+          </a:p>
+          <a:p>
+            <a:pPr marL="342900" indent="-342900">
+              <a:spcAft>
+                <a:spcPts val="1300"/>
+              </a:spcAft>
+              <a:buSzPct val="100000"/>
+              <a:buChar char="•"/>
+            </a:pPr>
+            <a:r>
+              <a:rPr lang="en-US" sz="1400" dirty="0">
+                <a:solidFill>
+                  <a:srgbClr val="141B2D"/>
+                </a:solidFill>
+              </a:rPr>
+              <a:t>Pushed to GitHub Container Registry (GHCR)</a:t>
+            </a:r>
+            <a:endParaRPr lang="en-US" sz="1400" dirty="0"/>
+          </a:p>
+          <a:p>
+            <a:pPr marL="342900" indent="-342900">
+              <a:spcAft>
+                <a:spcPts val="1300"/>
+              </a:spcAft>
+              <a:buSzPct val="100000"/>
+              <a:buChar char="•"/>
+            </a:pPr>
+            <a:r>
+              <a:rPr lang="en-US" sz="1400" dirty="0">
+                <a:solidFill>
+                  <a:srgbClr val="141B2D"/>
+                </a:solidFill>
+              </a:rPr>
+              <a:t>Deploy job runs helm upgrade to EKS</a:t>
+            </a:r>
+            <a:endParaRPr lang="en-US" sz="1400" dirty="0"/>
+          </a:p>
+        </p:txBody>
+      </p:sp>
+      <p:sp>
+        <p:nvSpPr>
+          <p:cNvPr id="5" name="Shape 3"/>
           <p:cNvSpPr/>
           <p:nvPr/>
         </p:nvSpPr>
         <p:spPr>
           <a:xfrm>
-            <a:off x="548640" y="1965960"/>
-            <a:ext cx="2084832" cy="1783080"/>
+            <a:off x="5669280" y="1371600"/>
+            <a:ext cx="5961888" cy="4663440"/>
           </a:xfrm>
           <a:prstGeom prst="roundRect">
             <a:avLst>
-              <a:gd name="adj" fmla="val 5128"/>
+              <a:gd name="adj" fmla="val 1176"/>
             </a:avLst>
           </a:prstGeom>
           <a:solidFill>
-            <a:srgbClr val="F8F9FC"/>
+            <a:srgbClr val="FFFFFF"/>
           </a:solidFill>
           <a:ln w="12700">
             <a:solidFill>
@@ -11659,44 +9480,47 @@
             <a:prstDash val="solid"/>
           </a:ln>
           <a:effectLst>
-            <a:outerShdw sx="100000" sy="100000" kx="0" ky="0" algn="bl" rotWithShape="0" blurRad="76200" dist="25400" dir="5400000">
-              <a:srgbClr val="9AA3B2">
-                <a:alpha val="25000"/>
+            <a:outerShdw sx="100000" sy="100000" kx="0" ky="0" algn="bl" rotWithShape="0" blurRad="114300" dist="38100" dir="5400000">
+              <a:srgbClr val="7A8396">
+                <a:alpha val="32000"/>
               </a:srgbClr>
             </a:outerShdw>
           </a:effectLst>
         </p:spPr>
       </p:sp>
-      <p:sp>
-        <p:nvSpPr>
-          <p:cNvPr id="5" name="Shape 3"/>
-          <p:cNvSpPr/>
-          <p:nvPr/>
-        </p:nvSpPr>
-        <p:spPr>
-          <a:xfrm>
-            <a:off x="1316736" y="2176272"/>
-            <a:ext cx="548640" cy="548640"/>
-          </a:xfrm>
-          <a:prstGeom prst="ellipse">
-            <a:avLst/>
-          </a:prstGeom>
-          <a:solidFill>
-            <a:srgbClr val="4F46E5"/>
-          </a:solidFill>
-          <a:ln/>
-        </p:spPr>
-      </p:sp>
-      <p:sp>
-        <p:nvSpPr>
-          <p:cNvPr id="6" name="Text 4"/>
+      <p:pic>
+        <p:nvPicPr>
+          <p:cNvPr id="6" name="Image 0" descr="/home/narendra/Documents/devops-project/screenshot/m5-ci-cd-workflow-runs.png">    </p:cNvPr>
+          <p:cNvPicPr>
+            <a:picLocks noChangeAspect="1"/>
+          </p:cNvPicPr>
+          <p:nvPr/>
+        </p:nvPicPr>
+        <p:blipFill>
+          <a:blip r:embed="rId1"/>
+          <a:srcRect l="0" r="0" t="0" b="0"/>
+          <a:stretch/>
+        </p:blipFill>
+        <p:spPr>
+          <a:xfrm>
+            <a:off x="5815584" y="1517904"/>
+            <a:ext cx="5669280" cy="3986784"/>
+          </a:xfrm>
+          <a:prstGeom prst="rect">
+            <a:avLst/>
+          </a:prstGeom>
+        </p:spPr>
+      </p:pic>
+      <p:sp>
+        <p:nvSpPr>
+          <p:cNvPr id="7" name="Text 4"/>
           <p:cNvSpPr txBox="1"/>
           <p:nvPr/>
         </p:nvSpPr>
         <p:spPr>
           <a:xfrm>
-            <a:off x="1316736" y="2176272"/>
-            <a:ext cx="548640" cy="548640"/>
+            <a:off x="5815584" y="5605272"/>
+            <a:ext cx="5669280" cy="384048"/>
           </a:xfrm>
           <a:prstGeom prst="rect">
             <a:avLst/>
@@ -11712,880 +9536,14 @@
               <a:buNone/>
             </a:pPr>
             <a:r>
-              <a:rPr lang="en-US" sz="1600" b="1" dirty="0">
-                <a:solidFill>
-                  <a:srgbClr val="FFFFFF"/>
-                </a:solidFill>
-              </a:rPr>
-              <a:t>1</a:t>
-            </a:r>
-            <a:endParaRPr lang="en-US" sz="1600" dirty="0"/>
-          </a:p>
-        </p:txBody>
-      </p:sp>
-      <p:sp>
-        <p:nvSpPr>
-          <p:cNvPr id="7" name="Text 5"/>
-          <p:cNvSpPr txBox="1"/>
-          <p:nvPr/>
-        </p:nvSpPr>
-        <p:spPr>
-          <a:xfrm>
-            <a:off x="640080" y="2816352"/>
-            <a:ext cx="1901952" cy="365760"/>
-          </a:xfrm>
-          <a:prstGeom prst="rect">
-            <a:avLst/>
-          </a:prstGeom>
-          <a:noFill/>
-          <a:ln/>
-        </p:spPr>
-        <p:txBody>
-          <a:bodyPr wrap="square" lIns="0" tIns="0" rIns="0" bIns="0" rtlCol="0" anchor="ctr"/>
-          <a:lstStyle/>
-          <a:p>
-            <a:pPr algn="ctr" indent="0" marL="0">
-              <a:buNone/>
-            </a:pPr>
-            <a:r>
-              <a:rPr lang="en-US" sz="1600" b="1" dirty="0">
-                <a:solidFill>
-                  <a:srgbClr val="0F1424"/>
-                </a:solidFill>
-              </a:rPr>
-              <a:t>Test</a:t>
-            </a:r>
-            <a:endParaRPr lang="en-US" sz="1600" dirty="0"/>
-          </a:p>
-        </p:txBody>
-      </p:sp>
-      <p:sp>
-        <p:nvSpPr>
-          <p:cNvPr id="8" name="Text 6"/>
-          <p:cNvSpPr txBox="1"/>
-          <p:nvPr/>
-        </p:nvSpPr>
-        <p:spPr>
-          <a:xfrm>
-            <a:off x="621792" y="3182112"/>
-            <a:ext cx="1938528" cy="502920"/>
-          </a:xfrm>
-          <a:prstGeom prst="rect">
-            <a:avLst/>
-          </a:prstGeom>
-          <a:noFill/>
-          <a:ln/>
-        </p:spPr>
-        <p:txBody>
-          <a:bodyPr wrap="square" lIns="0" tIns="0" rIns="0" bIns="0" rtlCol="0" anchor="ctr"/>
-          <a:lstStyle/>
-          <a:p>
-            <a:pPr algn="ctr" indent="0" marL="0">
-              <a:buNone/>
-            </a:pPr>
-            <a:r>
-              <a:rPr lang="en-US" sz="1150" dirty="0">
+              <a:rPr lang="en-US" sz="1050" i="1" dirty="0">
                 <a:solidFill>
                   <a:srgbClr val="6B7280"/>
                 </a:solidFill>
               </a:rPr>
-              <a:t>Pytest + Vite build</a:t>
-            </a:r>
-            <a:endParaRPr lang="en-US" sz="1150" dirty="0"/>
-          </a:p>
-        </p:txBody>
-      </p:sp>
-      <p:sp>
-        <p:nvSpPr>
-          <p:cNvPr id="9" name="Shape 7"/>
-          <p:cNvSpPr/>
-          <p:nvPr/>
-        </p:nvSpPr>
-        <p:spPr>
-          <a:xfrm>
-            <a:off x="2816352" y="1965960"/>
-            <a:ext cx="2084832" cy="1783080"/>
-          </a:xfrm>
-          <a:prstGeom prst="roundRect">
-            <a:avLst>
-              <a:gd name="adj" fmla="val 5128"/>
-            </a:avLst>
-          </a:prstGeom>
-          <a:solidFill>
-            <a:srgbClr val="F8F9FC"/>
-          </a:solidFill>
-          <a:ln w="12700">
-            <a:solidFill>
-              <a:srgbClr val="E6E8F0"/>
-            </a:solidFill>
-            <a:prstDash val="solid"/>
-          </a:ln>
-          <a:effectLst>
-            <a:outerShdw sx="100000" sy="100000" kx="0" ky="0" algn="bl" rotWithShape="0" blurRad="76200" dist="25400" dir="5400000">
-              <a:srgbClr val="9AA3B2">
-                <a:alpha val="25000"/>
-              </a:srgbClr>
-            </a:outerShdw>
-          </a:effectLst>
-        </p:spPr>
-      </p:sp>
-      <p:sp>
-        <p:nvSpPr>
-          <p:cNvPr id="10" name="Shape 8"/>
-          <p:cNvSpPr/>
-          <p:nvPr/>
-        </p:nvSpPr>
-        <p:spPr>
-          <a:xfrm>
-            <a:off x="3584448" y="2176272"/>
-            <a:ext cx="548640" cy="548640"/>
-          </a:xfrm>
-          <a:prstGeom prst="ellipse">
-            <a:avLst/>
-          </a:prstGeom>
-          <a:solidFill>
-            <a:srgbClr val="DC2626"/>
-          </a:solidFill>
-          <a:ln/>
-        </p:spPr>
-      </p:sp>
-      <p:sp>
-        <p:nvSpPr>
-          <p:cNvPr id="11" name="Text 9"/>
-          <p:cNvSpPr txBox="1"/>
-          <p:nvPr/>
-        </p:nvSpPr>
-        <p:spPr>
-          <a:xfrm>
-            <a:off x="3584448" y="2176272"/>
-            <a:ext cx="548640" cy="548640"/>
-          </a:xfrm>
-          <a:prstGeom prst="rect">
-            <a:avLst/>
-          </a:prstGeom>
-          <a:noFill/>
-          <a:ln/>
-        </p:spPr>
-        <p:txBody>
-          <a:bodyPr wrap="square" lIns="0" tIns="0" rIns="0" bIns="0" rtlCol="0" anchor="ctr"/>
-          <a:lstStyle/>
-          <a:p>
-            <a:pPr algn="ctr" indent="0" marL="0">
-              <a:buNone/>
-            </a:pPr>
-            <a:r>
-              <a:rPr lang="en-US" sz="1600" b="1" dirty="0">
-                <a:solidFill>
-                  <a:srgbClr val="FFFFFF"/>
-                </a:solidFill>
-              </a:rPr>
-              <a:t>2</a:t>
-            </a:r>
-            <a:endParaRPr lang="en-US" sz="1600" dirty="0"/>
-          </a:p>
-        </p:txBody>
-      </p:sp>
-      <p:sp>
-        <p:nvSpPr>
-          <p:cNvPr id="12" name="Text 10"/>
-          <p:cNvSpPr txBox="1"/>
-          <p:nvPr/>
-        </p:nvSpPr>
-        <p:spPr>
-          <a:xfrm>
-            <a:off x="2907792" y="2816352"/>
-            <a:ext cx="1901952" cy="365760"/>
-          </a:xfrm>
-          <a:prstGeom prst="rect">
-            <a:avLst/>
-          </a:prstGeom>
-          <a:noFill/>
-          <a:ln/>
-        </p:spPr>
-        <p:txBody>
-          <a:bodyPr wrap="square" lIns="0" tIns="0" rIns="0" bIns="0" rtlCol="0" anchor="ctr"/>
-          <a:lstStyle/>
-          <a:p>
-            <a:pPr algn="ctr" indent="0" marL="0">
-              <a:buNone/>
-            </a:pPr>
-            <a:r>
-              <a:rPr lang="en-US" sz="1600" b="1" dirty="0">
-                <a:solidFill>
-                  <a:srgbClr val="0F1424"/>
-                </a:solidFill>
-              </a:rPr>
-              <a:t>Scan</a:t>
-            </a:r>
-            <a:endParaRPr lang="en-US" sz="1600" dirty="0"/>
-          </a:p>
-        </p:txBody>
-      </p:sp>
-      <p:sp>
-        <p:nvSpPr>
-          <p:cNvPr id="13" name="Text 11"/>
-          <p:cNvSpPr txBox="1"/>
-          <p:nvPr/>
-        </p:nvSpPr>
-        <p:spPr>
-          <a:xfrm>
-            <a:off x="2889504" y="3182112"/>
-            <a:ext cx="1938528" cy="502920"/>
-          </a:xfrm>
-          <a:prstGeom prst="rect">
-            <a:avLst/>
-          </a:prstGeom>
-          <a:noFill/>
-          <a:ln/>
-        </p:spPr>
-        <p:txBody>
-          <a:bodyPr wrap="square" lIns="0" tIns="0" rIns="0" bIns="0" rtlCol="0" anchor="ctr"/>
-          <a:lstStyle/>
-          <a:p>
-            <a:pPr algn="ctr" indent="0" marL="0">
-              <a:buNone/>
-            </a:pPr>
-            <a:r>
-              <a:rPr lang="en-US" sz="1150" dirty="0">
-                <a:solidFill>
-                  <a:srgbClr val="6B7280"/>
-                </a:solidFill>
-              </a:rPr>
-              <a:t>Trivy CVE gate</a:t>
-            </a:r>
-            <a:endParaRPr lang="en-US" sz="1150" dirty="0"/>
-          </a:p>
-        </p:txBody>
-      </p:sp>
-      <p:sp>
-        <p:nvSpPr>
-          <p:cNvPr id="14" name="Shape 12"/>
-          <p:cNvSpPr/>
-          <p:nvPr/>
-        </p:nvSpPr>
-        <p:spPr>
-          <a:xfrm>
-            <a:off x="5084064" y="1965960"/>
-            <a:ext cx="2084832" cy="1783080"/>
-          </a:xfrm>
-          <a:prstGeom prst="roundRect">
-            <a:avLst>
-              <a:gd name="adj" fmla="val 5128"/>
-            </a:avLst>
-          </a:prstGeom>
-          <a:solidFill>
-            <a:srgbClr val="F8F9FC"/>
-          </a:solidFill>
-          <a:ln w="12700">
-            <a:solidFill>
-              <a:srgbClr val="E6E8F0"/>
-            </a:solidFill>
-            <a:prstDash val="solid"/>
-          </a:ln>
-          <a:effectLst>
-            <a:outerShdw sx="100000" sy="100000" kx="0" ky="0" algn="bl" rotWithShape="0" blurRad="76200" dist="25400" dir="5400000">
-              <a:srgbClr val="9AA3B2">
-                <a:alpha val="25000"/>
-              </a:srgbClr>
-            </a:outerShdw>
-          </a:effectLst>
-        </p:spPr>
-      </p:sp>
-      <p:sp>
-        <p:nvSpPr>
-          <p:cNvPr id="15" name="Shape 13"/>
-          <p:cNvSpPr/>
-          <p:nvPr/>
-        </p:nvSpPr>
-        <p:spPr>
-          <a:xfrm>
-            <a:off x="5852160" y="2176272"/>
-            <a:ext cx="548640" cy="548640"/>
-          </a:xfrm>
-          <a:prstGeom prst="ellipse">
-            <a:avLst/>
-          </a:prstGeom>
-          <a:solidFill>
-            <a:srgbClr val="00A896"/>
-          </a:solidFill>
-          <a:ln/>
-        </p:spPr>
-      </p:sp>
-      <p:sp>
-        <p:nvSpPr>
-          <p:cNvPr id="16" name="Text 14"/>
-          <p:cNvSpPr txBox="1"/>
-          <p:nvPr/>
-        </p:nvSpPr>
-        <p:spPr>
-          <a:xfrm>
-            <a:off x="5852160" y="2176272"/>
-            <a:ext cx="548640" cy="548640"/>
-          </a:xfrm>
-          <a:prstGeom prst="rect">
-            <a:avLst/>
-          </a:prstGeom>
-          <a:noFill/>
-          <a:ln/>
-        </p:spPr>
-        <p:txBody>
-          <a:bodyPr wrap="square" lIns="0" tIns="0" rIns="0" bIns="0" rtlCol="0" anchor="ctr"/>
-          <a:lstStyle/>
-          <a:p>
-            <a:pPr algn="ctr" indent="0" marL="0">
-              <a:buNone/>
-            </a:pPr>
-            <a:r>
-              <a:rPr lang="en-US" sz="1600" b="1" dirty="0">
-                <a:solidFill>
-                  <a:srgbClr val="FFFFFF"/>
-                </a:solidFill>
-              </a:rPr>
-              <a:t>3</a:t>
-            </a:r>
-            <a:endParaRPr lang="en-US" sz="1600" dirty="0"/>
-          </a:p>
-        </p:txBody>
-      </p:sp>
-      <p:sp>
-        <p:nvSpPr>
-          <p:cNvPr id="17" name="Text 15"/>
-          <p:cNvSpPr txBox="1"/>
-          <p:nvPr/>
-        </p:nvSpPr>
-        <p:spPr>
-          <a:xfrm>
-            <a:off x="5175504" y="2816352"/>
-            <a:ext cx="1901952" cy="365760"/>
-          </a:xfrm>
-          <a:prstGeom prst="rect">
-            <a:avLst/>
-          </a:prstGeom>
-          <a:noFill/>
-          <a:ln/>
-        </p:spPr>
-        <p:txBody>
-          <a:bodyPr wrap="square" lIns="0" tIns="0" rIns="0" bIns="0" rtlCol="0" anchor="ctr"/>
-          <a:lstStyle/>
-          <a:p>
-            <a:pPr algn="ctr" indent="0" marL="0">
-              <a:buNone/>
-            </a:pPr>
-            <a:r>
-              <a:rPr lang="en-US" sz="1600" b="1" dirty="0">
-                <a:solidFill>
-                  <a:srgbClr val="0F1424"/>
-                </a:solidFill>
-              </a:rPr>
-              <a:t>Build</a:t>
-            </a:r>
-            <a:endParaRPr lang="en-US" sz="1600" dirty="0"/>
-          </a:p>
-        </p:txBody>
-      </p:sp>
-      <p:sp>
-        <p:nvSpPr>
-          <p:cNvPr id="18" name="Text 16"/>
-          <p:cNvSpPr txBox="1"/>
-          <p:nvPr/>
-        </p:nvSpPr>
-        <p:spPr>
-          <a:xfrm>
-            <a:off x="5157216" y="3182112"/>
-            <a:ext cx="1938528" cy="502920"/>
-          </a:xfrm>
-          <a:prstGeom prst="rect">
-            <a:avLst/>
-          </a:prstGeom>
-          <a:noFill/>
-          <a:ln/>
-        </p:spPr>
-        <p:txBody>
-          <a:bodyPr wrap="square" lIns="0" tIns="0" rIns="0" bIns="0" rtlCol="0" anchor="ctr"/>
-          <a:lstStyle/>
-          <a:p>
-            <a:pPr algn="ctr" indent="0" marL="0">
-              <a:buNone/>
-            </a:pPr>
-            <a:r>
-              <a:rPr lang="en-US" sz="1150" dirty="0">
-                <a:solidFill>
-                  <a:srgbClr val="6B7280"/>
-                </a:solidFill>
-              </a:rPr>
-              <a:t>Multi-stage images</a:t>
-            </a:r>
-            <a:endParaRPr lang="en-US" sz="1150" dirty="0"/>
-          </a:p>
-        </p:txBody>
-      </p:sp>
-      <p:sp>
-        <p:nvSpPr>
-          <p:cNvPr id="19" name="Shape 17"/>
-          <p:cNvSpPr/>
-          <p:nvPr/>
-        </p:nvSpPr>
-        <p:spPr>
-          <a:xfrm>
-            <a:off x="7351776" y="1965960"/>
-            <a:ext cx="2084832" cy="1783080"/>
-          </a:xfrm>
-          <a:prstGeom prst="roundRect">
-            <a:avLst>
-              <a:gd name="adj" fmla="val 5128"/>
-            </a:avLst>
-          </a:prstGeom>
-          <a:solidFill>
-            <a:srgbClr val="F8F9FC"/>
-          </a:solidFill>
-          <a:ln w="12700">
-            <a:solidFill>
-              <a:srgbClr val="E6E8F0"/>
-            </a:solidFill>
-            <a:prstDash val="solid"/>
-          </a:ln>
-          <a:effectLst>
-            <a:outerShdw sx="100000" sy="100000" kx="0" ky="0" algn="bl" rotWithShape="0" blurRad="76200" dist="25400" dir="5400000">
-              <a:srgbClr val="9AA3B2">
-                <a:alpha val="25000"/>
-              </a:srgbClr>
-            </a:outerShdw>
-          </a:effectLst>
-        </p:spPr>
-      </p:sp>
-      <p:sp>
-        <p:nvSpPr>
-          <p:cNvPr id="20" name="Shape 18"/>
-          <p:cNvSpPr/>
-          <p:nvPr/>
-        </p:nvSpPr>
-        <p:spPr>
-          <a:xfrm>
-            <a:off x="8119872" y="2176272"/>
-            <a:ext cx="548640" cy="548640"/>
-          </a:xfrm>
-          <a:prstGeom prst="ellipse">
-            <a:avLst/>
-          </a:prstGeom>
-          <a:solidFill>
-            <a:srgbClr val="7C3AED"/>
-          </a:solidFill>
-          <a:ln/>
-        </p:spPr>
-      </p:sp>
-      <p:sp>
-        <p:nvSpPr>
-          <p:cNvPr id="21" name="Text 19"/>
-          <p:cNvSpPr txBox="1"/>
-          <p:nvPr/>
-        </p:nvSpPr>
-        <p:spPr>
-          <a:xfrm>
-            <a:off x="8119872" y="2176272"/>
-            <a:ext cx="548640" cy="548640"/>
-          </a:xfrm>
-          <a:prstGeom prst="rect">
-            <a:avLst/>
-          </a:prstGeom>
-          <a:noFill/>
-          <a:ln/>
-        </p:spPr>
-        <p:txBody>
-          <a:bodyPr wrap="square" lIns="0" tIns="0" rIns="0" bIns="0" rtlCol="0" anchor="ctr"/>
-          <a:lstStyle/>
-          <a:p>
-            <a:pPr algn="ctr" indent="0" marL="0">
-              <a:buNone/>
-            </a:pPr>
-            <a:r>
-              <a:rPr lang="en-US" sz="1600" b="1" dirty="0">
-                <a:solidFill>
-                  <a:srgbClr val="FFFFFF"/>
-                </a:solidFill>
-              </a:rPr>
-              <a:t>4</a:t>
-            </a:r>
-            <a:endParaRPr lang="en-US" sz="1600" dirty="0"/>
-          </a:p>
-        </p:txBody>
-      </p:sp>
-      <p:sp>
-        <p:nvSpPr>
-          <p:cNvPr id="22" name="Text 20"/>
-          <p:cNvSpPr txBox="1"/>
-          <p:nvPr/>
-        </p:nvSpPr>
-        <p:spPr>
-          <a:xfrm>
-            <a:off x="7443216" y="2816352"/>
-            <a:ext cx="1901952" cy="365760"/>
-          </a:xfrm>
-          <a:prstGeom prst="rect">
-            <a:avLst/>
-          </a:prstGeom>
-          <a:noFill/>
-          <a:ln/>
-        </p:spPr>
-        <p:txBody>
-          <a:bodyPr wrap="square" lIns="0" tIns="0" rIns="0" bIns="0" rtlCol="0" anchor="ctr"/>
-          <a:lstStyle/>
-          <a:p>
-            <a:pPr algn="ctr" indent="0" marL="0">
-              <a:buNone/>
-            </a:pPr>
-            <a:r>
-              <a:rPr lang="en-US" sz="1600" b="1" dirty="0">
-                <a:solidFill>
-                  <a:srgbClr val="0F1424"/>
-                </a:solidFill>
-              </a:rPr>
-              <a:t>Push</a:t>
-            </a:r>
-            <a:endParaRPr lang="en-US" sz="1600" dirty="0"/>
-          </a:p>
-        </p:txBody>
-      </p:sp>
-      <p:sp>
-        <p:nvSpPr>
-          <p:cNvPr id="23" name="Text 21"/>
-          <p:cNvSpPr txBox="1"/>
-          <p:nvPr/>
-        </p:nvSpPr>
-        <p:spPr>
-          <a:xfrm>
-            <a:off x="7424928" y="3182112"/>
-            <a:ext cx="1938528" cy="502920"/>
-          </a:xfrm>
-          <a:prstGeom prst="rect">
-            <a:avLst/>
-          </a:prstGeom>
-          <a:noFill/>
-          <a:ln/>
-        </p:spPr>
-        <p:txBody>
-          <a:bodyPr wrap="square" lIns="0" tIns="0" rIns="0" bIns="0" rtlCol="0" anchor="ctr"/>
-          <a:lstStyle/>
-          <a:p>
-            <a:pPr algn="ctr" indent="0" marL="0">
-              <a:buNone/>
-            </a:pPr>
-            <a:r>
-              <a:rPr lang="en-US" sz="1150" dirty="0">
-                <a:solidFill>
-                  <a:srgbClr val="6B7280"/>
-                </a:solidFill>
-              </a:rPr>
-              <a:t>GHCR :&lt;git-sha&gt;</a:t>
-            </a:r>
-            <a:endParaRPr lang="en-US" sz="1150" dirty="0"/>
-          </a:p>
-        </p:txBody>
-      </p:sp>
-      <p:sp>
-        <p:nvSpPr>
-          <p:cNvPr id="24" name="Shape 22"/>
-          <p:cNvSpPr/>
-          <p:nvPr/>
-        </p:nvSpPr>
-        <p:spPr>
-          <a:xfrm>
-            <a:off x="9619488" y="1965960"/>
-            <a:ext cx="2084832" cy="1783080"/>
-          </a:xfrm>
-          <a:prstGeom prst="roundRect">
-            <a:avLst>
-              <a:gd name="adj" fmla="val 5128"/>
-            </a:avLst>
-          </a:prstGeom>
-          <a:solidFill>
-            <a:srgbClr val="F8F9FC"/>
-          </a:solidFill>
-          <a:ln w="12700">
-            <a:solidFill>
-              <a:srgbClr val="E6E8F0"/>
-            </a:solidFill>
-            <a:prstDash val="solid"/>
-          </a:ln>
-          <a:effectLst>
-            <a:outerShdw sx="100000" sy="100000" kx="0" ky="0" algn="bl" rotWithShape="0" blurRad="76200" dist="25400" dir="5400000">
-              <a:srgbClr val="9AA3B2">
-                <a:alpha val="25000"/>
-              </a:srgbClr>
-            </a:outerShdw>
-          </a:effectLst>
-        </p:spPr>
-      </p:sp>
-      <p:sp>
-        <p:nvSpPr>
-          <p:cNvPr id="25" name="Shape 23"/>
-          <p:cNvSpPr/>
-          <p:nvPr/>
-        </p:nvSpPr>
-        <p:spPr>
-          <a:xfrm>
-            <a:off x="10387584" y="2176272"/>
-            <a:ext cx="548640" cy="548640"/>
-          </a:xfrm>
-          <a:prstGeom prst="ellipse">
-            <a:avLst/>
-          </a:prstGeom>
-          <a:solidFill>
-            <a:srgbClr val="16A34A"/>
-          </a:solidFill>
-          <a:ln/>
-        </p:spPr>
-      </p:sp>
-      <p:sp>
-        <p:nvSpPr>
-          <p:cNvPr id="26" name="Text 24"/>
-          <p:cNvSpPr txBox="1"/>
-          <p:nvPr/>
-        </p:nvSpPr>
-        <p:spPr>
-          <a:xfrm>
-            <a:off x="10387584" y="2176272"/>
-            <a:ext cx="548640" cy="548640"/>
-          </a:xfrm>
-          <a:prstGeom prst="rect">
-            <a:avLst/>
-          </a:prstGeom>
-          <a:noFill/>
-          <a:ln/>
-        </p:spPr>
-        <p:txBody>
-          <a:bodyPr wrap="square" lIns="0" tIns="0" rIns="0" bIns="0" rtlCol="0" anchor="ctr"/>
-          <a:lstStyle/>
-          <a:p>
-            <a:pPr algn="ctr" indent="0" marL="0">
-              <a:buNone/>
-            </a:pPr>
-            <a:r>
-              <a:rPr lang="en-US" sz="1600" b="1" dirty="0">
-                <a:solidFill>
-                  <a:srgbClr val="FFFFFF"/>
-                </a:solidFill>
-              </a:rPr>
-              <a:t>5</a:t>
-            </a:r>
-            <a:endParaRPr lang="en-US" sz="1600" dirty="0"/>
-          </a:p>
-        </p:txBody>
-      </p:sp>
-      <p:sp>
-        <p:nvSpPr>
-          <p:cNvPr id="27" name="Text 25"/>
-          <p:cNvSpPr txBox="1"/>
-          <p:nvPr/>
-        </p:nvSpPr>
-        <p:spPr>
-          <a:xfrm>
-            <a:off x="9710928" y="2816352"/>
-            <a:ext cx="1901952" cy="365760"/>
-          </a:xfrm>
-          <a:prstGeom prst="rect">
-            <a:avLst/>
-          </a:prstGeom>
-          <a:noFill/>
-          <a:ln/>
-        </p:spPr>
-        <p:txBody>
-          <a:bodyPr wrap="square" lIns="0" tIns="0" rIns="0" bIns="0" rtlCol="0" anchor="ctr"/>
-          <a:lstStyle/>
-          <a:p>
-            <a:pPr algn="ctr" indent="0" marL="0">
-              <a:buNone/>
-            </a:pPr>
-            <a:r>
-              <a:rPr lang="en-US" sz="1600" b="1" dirty="0">
-                <a:solidFill>
-                  <a:srgbClr val="0F1424"/>
-                </a:solidFill>
-              </a:rPr>
-              <a:t>Deploy</a:t>
-            </a:r>
-            <a:endParaRPr lang="en-US" sz="1600" dirty="0"/>
-          </a:p>
-        </p:txBody>
-      </p:sp>
-      <p:sp>
-        <p:nvSpPr>
-          <p:cNvPr id="28" name="Text 26"/>
-          <p:cNvSpPr txBox="1"/>
-          <p:nvPr/>
-        </p:nvSpPr>
-        <p:spPr>
-          <a:xfrm>
-            <a:off x="9692640" y="3182112"/>
-            <a:ext cx="1938528" cy="502920"/>
-          </a:xfrm>
-          <a:prstGeom prst="rect">
-            <a:avLst/>
-          </a:prstGeom>
-          <a:noFill/>
-          <a:ln/>
-        </p:spPr>
-        <p:txBody>
-          <a:bodyPr wrap="square" lIns="0" tIns="0" rIns="0" bIns="0" rtlCol="0" anchor="ctr"/>
-          <a:lstStyle/>
-          <a:p>
-            <a:pPr algn="ctr" indent="0" marL="0">
-              <a:buNone/>
-            </a:pPr>
-            <a:r>
-              <a:rPr lang="en-US" sz="1150" dirty="0">
-                <a:solidFill>
-                  <a:srgbClr val="6B7280"/>
-                </a:solidFill>
-              </a:rPr>
-              <a:t>Helm upgrade → EKS</a:t>
-            </a:r>
-            <a:endParaRPr lang="en-US" sz="1150" dirty="0"/>
-          </a:p>
-        </p:txBody>
-      </p:sp>
-      <p:sp>
-        <p:nvSpPr>
-          <p:cNvPr id="29" name="Shape 27"/>
-          <p:cNvSpPr/>
-          <p:nvPr/>
-        </p:nvSpPr>
-        <p:spPr>
-          <a:xfrm>
-            <a:off x="548640" y="4114800"/>
-            <a:ext cx="11036808" cy="1783080"/>
-          </a:xfrm>
-          <a:prstGeom prst="roundRect">
-            <a:avLst>
-              <a:gd name="adj" fmla="val 5128"/>
-            </a:avLst>
-          </a:prstGeom>
-          <a:solidFill>
-            <a:srgbClr val="F2F4FF"/>
-          </a:solidFill>
-          <a:ln w="12700">
-            <a:solidFill>
-              <a:srgbClr val="E6E8F0"/>
-            </a:solidFill>
-            <a:prstDash val="solid"/>
-          </a:ln>
-          <a:effectLst>
-            <a:outerShdw sx="100000" sy="100000" kx="0" ky="0" algn="bl" rotWithShape="0" blurRad="76200" dist="25400" dir="5400000">
-              <a:srgbClr val="9AA3B2">
-                <a:alpha val="25000"/>
-              </a:srgbClr>
-            </a:outerShdw>
-          </a:effectLst>
-        </p:spPr>
-      </p:sp>
-      <p:sp>
-        <p:nvSpPr>
-          <p:cNvPr id="30" name="Text 28"/>
-          <p:cNvSpPr txBox="1"/>
-          <p:nvPr/>
-        </p:nvSpPr>
-        <p:spPr>
-          <a:xfrm>
-            <a:off x="822960" y="4251960"/>
-            <a:ext cx="10058400" cy="365760"/>
-          </a:xfrm>
-          <a:prstGeom prst="rect">
-            <a:avLst/>
-          </a:prstGeom>
-          <a:noFill/>
-          <a:ln/>
-        </p:spPr>
-        <p:txBody>
-          <a:bodyPr wrap="square" lIns="0" tIns="0" rIns="0" bIns="0" rtlCol="0" anchor="ctr"/>
-          <a:lstStyle/>
-          <a:p>
-            <a:pPr algn="l" indent="0" marL="0">
-              <a:buNone/>
-            </a:pPr>
-            <a:r>
-              <a:rPr lang="en-US" sz="1500" b="1" dirty="0">
-                <a:solidFill>
-                  <a:srgbClr val="0F1424"/>
-                </a:solidFill>
-              </a:rPr>
-              <a:t>Pipeline principles</a:t>
-            </a:r>
-            <a:endParaRPr lang="en-US" sz="1500" dirty="0"/>
-          </a:p>
-        </p:txBody>
-      </p:sp>
-      <p:sp>
-        <p:nvSpPr>
-          <p:cNvPr id="31" name="Text 29"/>
-          <p:cNvSpPr txBox="1"/>
-          <p:nvPr/>
-        </p:nvSpPr>
-        <p:spPr>
-          <a:xfrm>
-            <a:off x="868680" y="4663440"/>
-            <a:ext cx="10332720" cy="1188720"/>
-          </a:xfrm>
-          <a:prstGeom prst="rect">
-            <a:avLst/>
-          </a:prstGeom>
-          <a:noFill/>
-          <a:ln/>
-        </p:spPr>
-        <p:txBody>
-          <a:bodyPr wrap="square" lIns="0" tIns="0" rIns="0" bIns="0" rtlCol="0" anchor="ctr"/>
-          <a:lstStyle/>
-          <a:p>
-            <a:pPr marL="342900" indent="-342900">
-              <a:spcAft>
-                <a:spcPts val="700"/>
-              </a:spcAft>
-              <a:buSzPct val="100000"/>
-              <a:buChar char="•"/>
-            </a:pPr>
-            <a:r>
-              <a:rPr lang="en-US" sz="1300" dirty="0">
-                <a:solidFill>
-                  <a:srgbClr val="141B2D"/>
-                </a:solidFill>
-              </a:rPr>
-              <a:t>Quality gates — test or CVE failures abort before any image is pushed</a:t>
-            </a:r>
-            <a:endParaRPr lang="en-US" sz="1300" dirty="0"/>
-          </a:p>
-          <a:p>
-            <a:pPr marL="342900" indent="-342900">
-              <a:spcAft>
-                <a:spcPts val="700"/>
-              </a:spcAft>
-              <a:buSzPct val="100000"/>
-              <a:buChar char="•"/>
-            </a:pPr>
-            <a:r>
-              <a:rPr lang="en-US" sz="1300" dirty="0">
-                <a:solidFill>
-                  <a:srgbClr val="141B2D"/>
-                </a:solidFill>
-              </a:rPr>
-              <a:t>Immutable, traceable images — every image tagged with the exact commit SHA (never :latest)</a:t>
-            </a:r>
-            <a:endParaRPr lang="en-US" sz="1300" dirty="0"/>
-          </a:p>
-          <a:p>
-            <a:pPr marL="342900" indent="-342900">
-              <a:spcAft>
-                <a:spcPts val="700"/>
-              </a:spcAft>
-              <a:buSzPct val="100000"/>
-              <a:buChar char="•"/>
-            </a:pPr>
-            <a:r>
-              <a:rPr lang="en-US" sz="1300" dirty="0">
-                <a:solidFill>
-                  <a:srgbClr val="141B2D"/>
-                </a:solidFill>
-              </a:rPr>
-              <a:t>Deploy job configures kubectl for EKS and runs helm upgrade --install</a:t>
-            </a:r>
-            <a:endParaRPr lang="en-US" sz="1300" dirty="0"/>
+              <a:t>GitHub Actions — green pipeline runs on main</a:t>
+            </a:r>
+            <a:endParaRPr lang="en-US" sz="1050" dirty="0"/>
           </a:p>
         </p:txBody>
       </p:sp>
@@ -12695,22 +9653,170 @@
       </p:sp>
       <p:sp>
         <p:nvSpPr>
-          <p:cNvPr id="3" name="Shape 1"/>
+          <p:cNvPr id="3" name="Text 1"/>
+          <p:cNvSpPr txBox="1"/>
+          <p:nvPr/>
+        </p:nvSpPr>
+        <p:spPr>
+          <a:xfrm>
+            <a:off x="548640" y="1325880"/>
+            <a:ext cx="4892040" cy="914400"/>
+          </a:xfrm>
+          <a:prstGeom prst="rect">
+            <a:avLst/>
+          </a:prstGeom>
+          <a:noFill/>
+          <a:ln/>
+        </p:spPr>
+        <p:txBody>
+          <a:bodyPr wrap="square" lIns="0" tIns="0" rIns="0" bIns="0" rtlCol="0" anchor="ctr"/>
+          <a:lstStyle/>
+          <a:p>
+            <a:pPr algn="l" indent="0" marL="0">
+              <a:buNone/>
+            </a:pPr>
+            <a:r>
+              <a:rPr lang="en-US" sz="1550" b="1" dirty="0">
+                <a:solidFill>
+                  <a:srgbClr val="141B2D"/>
+                </a:solidFill>
+              </a:rPr>
+              <a:t>Five security controls run before anything ships.</a:t>
+            </a:r>
+            <a:endParaRPr lang="en-US" sz="1550" dirty="0"/>
+          </a:p>
+        </p:txBody>
+      </p:sp>
+      <p:sp>
+        <p:nvSpPr>
+          <p:cNvPr id="4" name="Text 2"/>
+          <p:cNvSpPr txBox="1"/>
+          <p:nvPr/>
+        </p:nvSpPr>
+        <p:spPr>
+          <a:xfrm>
+            <a:off x="585216" y="2331720"/>
+            <a:ext cx="4846320" cy="3566160"/>
+          </a:xfrm>
+          <a:prstGeom prst="rect">
+            <a:avLst/>
+          </a:prstGeom>
+          <a:noFill/>
+          <a:ln/>
+        </p:spPr>
+        <p:txBody>
+          <a:bodyPr wrap="square" lIns="0" tIns="0" rIns="0" bIns="0" rtlCol="0" anchor="ctr"/>
+          <a:lstStyle/>
+          <a:p>
+            <a:pPr marL="342900" indent="-342900">
+              <a:spcAft>
+                <a:spcPts val="1300"/>
+              </a:spcAft>
+              <a:buSzPct val="100000"/>
+              <a:buChar char="•"/>
+            </a:pPr>
+            <a:r>
+              <a:rPr lang="en-US" sz="1400" dirty="0">
+                <a:solidFill>
+                  <a:srgbClr val="141B2D"/>
+                </a:solidFill>
+              </a:rPr>
+              <a:t>Gitleaks — secret scanning in commits</a:t>
+            </a:r>
+            <a:endParaRPr lang="en-US" sz="1400" dirty="0"/>
+          </a:p>
+          <a:p>
+            <a:pPr marL="342900" indent="-342900">
+              <a:spcAft>
+                <a:spcPts val="1300"/>
+              </a:spcAft>
+              <a:buSzPct val="100000"/>
+              <a:buChar char="•"/>
+            </a:pPr>
+            <a:r>
+              <a:rPr lang="en-US" sz="1400" dirty="0">
+                <a:solidFill>
+                  <a:srgbClr val="141B2D"/>
+                </a:solidFill>
+              </a:rPr>
+              <a:t>Bandit — Python SAST</a:t>
+            </a:r>
+            <a:endParaRPr lang="en-US" sz="1400" dirty="0"/>
+          </a:p>
+          <a:p>
+            <a:pPr marL="342900" indent="-342900">
+              <a:spcAft>
+                <a:spcPts val="1300"/>
+              </a:spcAft>
+              <a:buSzPct val="100000"/>
+              <a:buChar char="•"/>
+            </a:pPr>
+            <a:r>
+              <a:rPr lang="en-US" sz="1400" dirty="0">
+                <a:solidFill>
+                  <a:srgbClr val="141B2D"/>
+                </a:solidFill>
+              </a:rPr>
+              <a:t>pip / npm audit — dependency SCA</a:t>
+            </a:r>
+            <a:endParaRPr lang="en-US" sz="1400" dirty="0"/>
+          </a:p>
+          <a:p>
+            <a:pPr marL="342900" indent="-342900">
+              <a:spcAft>
+                <a:spcPts val="1300"/>
+              </a:spcAft>
+              <a:buSzPct val="100000"/>
+              <a:buChar char="•"/>
+            </a:pPr>
+            <a:r>
+              <a:rPr lang="en-US" sz="1400" dirty="0">
+                <a:solidFill>
+                  <a:srgbClr val="141B2D"/>
+                </a:solidFill>
+              </a:rPr>
+              <a:t>Aqua Trivy — container image CVEs</a:t>
+            </a:r>
+            <a:endParaRPr lang="en-US" sz="1400" dirty="0"/>
+          </a:p>
+          <a:p>
+            <a:pPr marL="342900" indent="-342900">
+              <a:spcAft>
+                <a:spcPts val="1300"/>
+              </a:spcAft>
+              <a:buSzPct val="100000"/>
+              <a:buChar char="•"/>
+            </a:pPr>
+            <a:r>
+              <a:rPr lang="en-US" sz="1400" dirty="0">
+                <a:solidFill>
+                  <a:srgbClr val="141B2D"/>
+                </a:solidFill>
+              </a:rPr>
+              <a:t>Gate fails only on fixable HIGH/CRITICAL</a:t>
+            </a:r>
+            <a:endParaRPr lang="en-US" sz="1400" dirty="0"/>
+          </a:p>
+        </p:txBody>
+      </p:sp>
+      <p:sp>
+        <p:nvSpPr>
+          <p:cNvPr id="5" name="Shape 3"/>
           <p:cNvSpPr/>
           <p:nvPr/>
         </p:nvSpPr>
         <p:spPr>
           <a:xfrm>
-            <a:off x="548640" y="1371600"/>
-            <a:ext cx="11036808" cy="804672"/>
+            <a:off x="5669280" y="1371600"/>
+            <a:ext cx="5961888" cy="4663440"/>
           </a:xfrm>
           <a:prstGeom prst="roundRect">
             <a:avLst>
-              <a:gd name="adj" fmla="val 11364"/>
+              <a:gd name="adj" fmla="val 1176"/>
             </a:avLst>
           </a:prstGeom>
           <a:solidFill>
-            <a:srgbClr val="F8F9FC"/>
+            <a:srgbClr val="FFFFFF"/>
           </a:solidFill>
           <a:ln w="12700">
             <a:solidFill>
@@ -12719,44 +9825,47 @@
             <a:prstDash val="solid"/>
           </a:ln>
           <a:effectLst>
-            <a:outerShdw sx="100000" sy="100000" kx="0" ky="0" algn="bl" rotWithShape="0" blurRad="76200" dist="25400" dir="5400000">
-              <a:srgbClr val="9AA3B2">
-                <a:alpha val="25000"/>
+            <a:outerShdw sx="100000" sy="100000" kx="0" ky="0" algn="bl" rotWithShape="0" blurRad="114300" dist="38100" dir="5400000">
+              <a:srgbClr val="7A8396">
+                <a:alpha val="32000"/>
               </a:srgbClr>
             </a:outerShdw>
           </a:effectLst>
         </p:spPr>
       </p:sp>
-      <p:sp>
-        <p:nvSpPr>
-          <p:cNvPr id="4" name="Shape 2"/>
-          <p:cNvSpPr/>
-          <p:nvPr/>
-        </p:nvSpPr>
-        <p:spPr>
-          <a:xfrm>
-            <a:off x="777240" y="1645920"/>
-            <a:ext cx="256032" cy="256032"/>
-          </a:xfrm>
-          <a:prstGeom prst="ellipse">
-            <a:avLst/>
-          </a:prstGeom>
-          <a:solidFill>
-            <a:srgbClr val="4F46E5"/>
-          </a:solidFill>
-          <a:ln/>
-        </p:spPr>
-      </p:sp>
-      <p:sp>
-        <p:nvSpPr>
-          <p:cNvPr id="5" name="Text 3"/>
+      <p:pic>
+        <p:nvPicPr>
+          <p:cNvPr id="6" name="Image 0" descr="/home/narendra/Documents/devops-project/screenshot/m6-trivy-scan.png">    </p:cNvPr>
+          <p:cNvPicPr>
+            <a:picLocks noChangeAspect="1"/>
+          </p:cNvPicPr>
+          <p:nvPr/>
+        </p:nvPicPr>
+        <p:blipFill>
+          <a:blip r:embed="rId1"/>
+          <a:srcRect l="0" r="0" t="0" b="0"/>
+          <a:stretch/>
+        </p:blipFill>
+        <p:spPr>
+          <a:xfrm>
+            <a:off x="5815584" y="1517904"/>
+            <a:ext cx="5669280" cy="3986784"/>
+          </a:xfrm>
+          <a:prstGeom prst="rect">
+            <a:avLst/>
+          </a:prstGeom>
+        </p:spPr>
+      </p:pic>
+      <p:sp>
+        <p:nvSpPr>
+          <p:cNvPr id="7" name="Text 4"/>
           <p:cNvSpPr txBox="1"/>
           <p:nvPr/>
         </p:nvSpPr>
         <p:spPr>
           <a:xfrm>
-            <a:off x="1188720" y="1444752"/>
-            <a:ext cx="2377440" cy="658368"/>
+            <a:off x="5815584" y="5605272"/>
+            <a:ext cx="5669280" cy="384048"/>
           </a:xfrm>
           <a:prstGeom prst="rect">
             <a:avLst/>
@@ -12768,884 +9877,18 @@
           <a:bodyPr wrap="square" lIns="0" tIns="0" rIns="0" bIns="0" rtlCol="0" anchor="ctr"/>
           <a:lstStyle/>
           <a:p>
-            <a:pPr algn="l" indent="0" marL="0">
-              <a:buNone/>
-            </a:pPr>
-            <a:r>
-              <a:rPr lang="en-US" sz="1500" b="1" dirty="0">
-                <a:solidFill>
-                  <a:srgbClr val="0F1424"/>
-                </a:solidFill>
-              </a:rPr>
-              <a:t>Gitleaks</a:t>
-            </a:r>
-            <a:endParaRPr lang="en-US" sz="1500" dirty="0"/>
-          </a:p>
-        </p:txBody>
-      </p:sp>
-      <p:sp>
-        <p:nvSpPr>
-          <p:cNvPr id="6" name="Shape 4"/>
-          <p:cNvSpPr/>
-          <p:nvPr/>
-        </p:nvSpPr>
-        <p:spPr>
-          <a:xfrm>
-            <a:off x="3611880" y="1591056"/>
-            <a:ext cx="1554480" cy="365760"/>
-          </a:xfrm>
-          <a:prstGeom prst="roundRect">
-            <a:avLst>
-              <a:gd name="adj" fmla="val 15000"/>
-            </a:avLst>
-          </a:prstGeom>
-          <a:solidFill>
-            <a:srgbClr val="4F46E5"/>
-          </a:solidFill>
-          <a:ln/>
-        </p:spPr>
-      </p:sp>
-      <p:sp>
-        <p:nvSpPr>
-          <p:cNvPr id="7" name="Text 5"/>
-          <p:cNvSpPr txBox="1"/>
-          <p:nvPr/>
-        </p:nvSpPr>
-        <p:spPr>
-          <a:xfrm>
-            <a:off x="3611880" y="1591056"/>
-            <a:ext cx="1554480" cy="365760"/>
-          </a:xfrm>
-          <a:prstGeom prst="rect">
-            <a:avLst/>
-          </a:prstGeom>
-          <a:noFill/>
-          <a:ln/>
-        </p:spPr>
-        <p:txBody>
-          <a:bodyPr wrap="square" lIns="0" tIns="0" rIns="0" bIns="0" rtlCol="0" anchor="ctr"/>
-          <a:lstStyle/>
-          <a:p>
             <a:pPr algn="ctr" indent="0" marL="0">
               <a:buNone/>
             </a:pPr>
             <a:r>
-              <a:rPr lang="en-US" sz="1100" b="1" dirty="0">
-                <a:solidFill>
-                  <a:srgbClr val="FFFFFF"/>
-                </a:solidFill>
-              </a:rPr>
-              <a:t>Secret scanning</a:t>
-            </a:r>
-            <a:endParaRPr lang="en-US" sz="1100" dirty="0"/>
-          </a:p>
-        </p:txBody>
-      </p:sp>
-      <p:sp>
-        <p:nvSpPr>
-          <p:cNvPr id="8" name="Text 6"/>
-          <p:cNvSpPr txBox="1"/>
-          <p:nvPr/>
-        </p:nvSpPr>
-        <p:spPr>
-          <a:xfrm>
-            <a:off x="5394960" y="1444752"/>
-            <a:ext cx="6035040" cy="658368"/>
-          </a:xfrm>
-          <a:prstGeom prst="rect">
-            <a:avLst/>
-          </a:prstGeom>
-          <a:noFill/>
-          <a:ln/>
-        </p:spPr>
-        <p:txBody>
-          <a:bodyPr wrap="square" lIns="0" tIns="0" rIns="0" bIns="0" rtlCol="0" anchor="ctr"/>
-          <a:lstStyle/>
-          <a:p>
-            <a:pPr algn="l" indent="0" marL="0">
-              <a:buNone/>
-            </a:pPr>
-            <a:r>
-              <a:rPr lang="en-US" sz="1300" dirty="0">
+              <a:rPr lang="en-US" sz="1050" i="1" dirty="0">
                 <a:solidFill>
                   <a:srgbClr val="6B7280"/>
                 </a:solidFill>
               </a:rPr>
-              <a:t>Finds leaked tokens, keys &amp; connection strings in commits</a:t>
-            </a:r>
-            <a:endParaRPr lang="en-US" sz="1300" dirty="0"/>
-          </a:p>
-        </p:txBody>
-      </p:sp>
-      <p:sp>
-        <p:nvSpPr>
-          <p:cNvPr id="9" name="Shape 7"/>
-          <p:cNvSpPr/>
-          <p:nvPr/>
-        </p:nvSpPr>
-        <p:spPr>
-          <a:xfrm>
-            <a:off x="548640" y="2304288"/>
-            <a:ext cx="11036808" cy="804672"/>
-          </a:xfrm>
-          <a:prstGeom prst="roundRect">
-            <a:avLst>
-              <a:gd name="adj" fmla="val 11364"/>
-            </a:avLst>
-          </a:prstGeom>
-          <a:solidFill>
-            <a:srgbClr val="F8F9FC"/>
-          </a:solidFill>
-          <a:ln w="12700">
-            <a:solidFill>
-              <a:srgbClr val="E6E8F0"/>
-            </a:solidFill>
-            <a:prstDash val="solid"/>
-          </a:ln>
-          <a:effectLst>
-            <a:outerShdw sx="100000" sy="100000" kx="0" ky="0" algn="bl" rotWithShape="0" blurRad="76200" dist="25400" dir="5400000">
-              <a:srgbClr val="9AA3B2">
-                <a:alpha val="25000"/>
-              </a:srgbClr>
-            </a:outerShdw>
-          </a:effectLst>
-        </p:spPr>
-      </p:sp>
-      <p:sp>
-        <p:nvSpPr>
-          <p:cNvPr id="10" name="Shape 8"/>
-          <p:cNvSpPr/>
-          <p:nvPr/>
-        </p:nvSpPr>
-        <p:spPr>
-          <a:xfrm>
-            <a:off x="777240" y="2578608"/>
-            <a:ext cx="256032" cy="256032"/>
-          </a:xfrm>
-          <a:prstGeom prst="ellipse">
-            <a:avLst/>
-          </a:prstGeom>
-          <a:solidFill>
-            <a:srgbClr val="00A896"/>
-          </a:solidFill>
-          <a:ln/>
-        </p:spPr>
-      </p:sp>
-      <p:sp>
-        <p:nvSpPr>
-          <p:cNvPr id="11" name="Text 9"/>
-          <p:cNvSpPr txBox="1"/>
-          <p:nvPr/>
-        </p:nvSpPr>
-        <p:spPr>
-          <a:xfrm>
-            <a:off x="1188720" y="2377440"/>
-            <a:ext cx="2377440" cy="658368"/>
-          </a:xfrm>
-          <a:prstGeom prst="rect">
-            <a:avLst/>
-          </a:prstGeom>
-          <a:noFill/>
-          <a:ln/>
-        </p:spPr>
-        <p:txBody>
-          <a:bodyPr wrap="square" lIns="0" tIns="0" rIns="0" bIns="0" rtlCol="0" anchor="ctr"/>
-          <a:lstStyle/>
-          <a:p>
-            <a:pPr algn="l" indent="0" marL="0">
-              <a:buNone/>
-            </a:pPr>
-            <a:r>
-              <a:rPr lang="en-US" sz="1500" b="1" dirty="0">
-                <a:solidFill>
-                  <a:srgbClr val="0F1424"/>
-                </a:solidFill>
-              </a:rPr>
-              <a:t>Bandit</a:t>
-            </a:r>
-            <a:endParaRPr lang="en-US" sz="1500" dirty="0"/>
-          </a:p>
-        </p:txBody>
-      </p:sp>
-      <p:sp>
-        <p:nvSpPr>
-          <p:cNvPr id="12" name="Shape 10"/>
-          <p:cNvSpPr/>
-          <p:nvPr/>
-        </p:nvSpPr>
-        <p:spPr>
-          <a:xfrm>
-            <a:off x="3611880" y="2523744"/>
-            <a:ext cx="1554480" cy="365760"/>
-          </a:xfrm>
-          <a:prstGeom prst="roundRect">
-            <a:avLst>
-              <a:gd name="adj" fmla="val 15000"/>
-            </a:avLst>
-          </a:prstGeom>
-          <a:solidFill>
-            <a:srgbClr val="00A896"/>
-          </a:solidFill>
-          <a:ln/>
-        </p:spPr>
-      </p:sp>
-      <p:sp>
-        <p:nvSpPr>
-          <p:cNvPr id="13" name="Text 11"/>
-          <p:cNvSpPr txBox="1"/>
-          <p:nvPr/>
-        </p:nvSpPr>
-        <p:spPr>
-          <a:xfrm>
-            <a:off x="3611880" y="2523744"/>
-            <a:ext cx="1554480" cy="365760"/>
-          </a:xfrm>
-          <a:prstGeom prst="rect">
-            <a:avLst/>
-          </a:prstGeom>
-          <a:noFill/>
-          <a:ln/>
-        </p:spPr>
-        <p:txBody>
-          <a:bodyPr wrap="square" lIns="0" tIns="0" rIns="0" bIns="0" rtlCol="0" anchor="ctr"/>
-          <a:lstStyle/>
-          <a:p>
-            <a:pPr algn="ctr" indent="0" marL="0">
-              <a:buNone/>
-            </a:pPr>
-            <a:r>
-              <a:rPr lang="en-US" sz="1100" b="1" dirty="0">
-                <a:solidFill>
-                  <a:srgbClr val="FFFFFF"/>
-                </a:solidFill>
-              </a:rPr>
-              <a:t>SAST</a:t>
-            </a:r>
-            <a:endParaRPr lang="en-US" sz="1100" dirty="0"/>
-          </a:p>
-        </p:txBody>
-      </p:sp>
-      <p:sp>
-        <p:nvSpPr>
-          <p:cNvPr id="14" name="Text 12"/>
-          <p:cNvSpPr txBox="1"/>
-          <p:nvPr/>
-        </p:nvSpPr>
-        <p:spPr>
-          <a:xfrm>
-            <a:off x="5394960" y="2377440"/>
-            <a:ext cx="6035040" cy="658368"/>
-          </a:xfrm>
-          <a:prstGeom prst="rect">
-            <a:avLst/>
-          </a:prstGeom>
-          <a:noFill/>
-          <a:ln/>
-        </p:spPr>
-        <p:txBody>
-          <a:bodyPr wrap="square" lIns="0" tIns="0" rIns="0" bIns="0" rtlCol="0" anchor="ctr"/>
-          <a:lstStyle/>
-          <a:p>
-            <a:pPr algn="l" indent="0" marL="0">
-              <a:buNone/>
-            </a:pPr>
-            <a:r>
-              <a:rPr lang="en-US" sz="1300" dirty="0">
-                <a:solidFill>
-                  <a:srgbClr val="6B7280"/>
-                </a:solidFill>
-              </a:rPr>
-              <a:t>Static analysis of Python for injection &amp; unsafe calls</a:t>
-            </a:r>
-            <a:endParaRPr lang="en-US" sz="1300" dirty="0"/>
-          </a:p>
-        </p:txBody>
-      </p:sp>
-      <p:sp>
-        <p:nvSpPr>
-          <p:cNvPr id="15" name="Shape 13"/>
-          <p:cNvSpPr/>
-          <p:nvPr/>
-        </p:nvSpPr>
-        <p:spPr>
-          <a:xfrm>
-            <a:off x="548640" y="3236976"/>
-            <a:ext cx="11036808" cy="804672"/>
-          </a:xfrm>
-          <a:prstGeom prst="roundRect">
-            <a:avLst>
-              <a:gd name="adj" fmla="val 11364"/>
-            </a:avLst>
-          </a:prstGeom>
-          <a:solidFill>
-            <a:srgbClr val="F8F9FC"/>
-          </a:solidFill>
-          <a:ln w="12700">
-            <a:solidFill>
-              <a:srgbClr val="E6E8F0"/>
-            </a:solidFill>
-            <a:prstDash val="solid"/>
-          </a:ln>
-          <a:effectLst>
-            <a:outerShdw sx="100000" sy="100000" kx="0" ky="0" algn="bl" rotWithShape="0" blurRad="76200" dist="25400" dir="5400000">
-              <a:srgbClr val="9AA3B2">
-                <a:alpha val="25000"/>
-              </a:srgbClr>
-            </a:outerShdw>
-          </a:effectLst>
-        </p:spPr>
-      </p:sp>
-      <p:sp>
-        <p:nvSpPr>
-          <p:cNvPr id="16" name="Shape 14"/>
-          <p:cNvSpPr/>
-          <p:nvPr/>
-        </p:nvSpPr>
-        <p:spPr>
-          <a:xfrm>
-            <a:off x="777240" y="3511296"/>
-            <a:ext cx="256032" cy="256032"/>
-          </a:xfrm>
-          <a:prstGeom prst="ellipse">
-            <a:avLst/>
-          </a:prstGeom>
-          <a:solidFill>
-            <a:srgbClr val="7C3AED"/>
-          </a:solidFill>
-          <a:ln/>
-        </p:spPr>
-      </p:sp>
-      <p:sp>
-        <p:nvSpPr>
-          <p:cNvPr id="17" name="Text 15"/>
-          <p:cNvSpPr txBox="1"/>
-          <p:nvPr/>
-        </p:nvSpPr>
-        <p:spPr>
-          <a:xfrm>
-            <a:off x="1188720" y="3310128"/>
-            <a:ext cx="2377440" cy="658368"/>
-          </a:xfrm>
-          <a:prstGeom prst="rect">
-            <a:avLst/>
-          </a:prstGeom>
-          <a:noFill/>
-          <a:ln/>
-        </p:spPr>
-        <p:txBody>
-          <a:bodyPr wrap="square" lIns="0" tIns="0" rIns="0" bIns="0" rtlCol="0" anchor="ctr"/>
-          <a:lstStyle/>
-          <a:p>
-            <a:pPr algn="l" indent="0" marL="0">
-              <a:buNone/>
-            </a:pPr>
-            <a:r>
-              <a:rPr lang="en-US" sz="1500" b="1" dirty="0">
-                <a:solidFill>
-                  <a:srgbClr val="0F1424"/>
-                </a:solidFill>
-              </a:rPr>
-              <a:t>pip / npm audit</a:t>
-            </a:r>
-            <a:endParaRPr lang="en-US" sz="1500" dirty="0"/>
-          </a:p>
-        </p:txBody>
-      </p:sp>
-      <p:sp>
-        <p:nvSpPr>
-          <p:cNvPr id="18" name="Shape 16"/>
-          <p:cNvSpPr/>
-          <p:nvPr/>
-        </p:nvSpPr>
-        <p:spPr>
-          <a:xfrm>
-            <a:off x="3611880" y="3456432"/>
-            <a:ext cx="1554480" cy="365760"/>
-          </a:xfrm>
-          <a:prstGeom prst="roundRect">
-            <a:avLst>
-              <a:gd name="adj" fmla="val 15000"/>
-            </a:avLst>
-          </a:prstGeom>
-          <a:solidFill>
-            <a:srgbClr val="7C3AED"/>
-          </a:solidFill>
-          <a:ln/>
-        </p:spPr>
-      </p:sp>
-      <p:sp>
-        <p:nvSpPr>
-          <p:cNvPr id="19" name="Text 17"/>
-          <p:cNvSpPr txBox="1"/>
-          <p:nvPr/>
-        </p:nvSpPr>
-        <p:spPr>
-          <a:xfrm>
-            <a:off x="3611880" y="3456432"/>
-            <a:ext cx="1554480" cy="365760"/>
-          </a:xfrm>
-          <a:prstGeom prst="rect">
-            <a:avLst/>
-          </a:prstGeom>
-          <a:noFill/>
-          <a:ln/>
-        </p:spPr>
-        <p:txBody>
-          <a:bodyPr wrap="square" lIns="0" tIns="0" rIns="0" bIns="0" rtlCol="0" anchor="ctr"/>
-          <a:lstStyle/>
-          <a:p>
-            <a:pPr algn="ctr" indent="0" marL="0">
-              <a:buNone/>
-            </a:pPr>
-            <a:r>
-              <a:rPr lang="en-US" sz="1100" b="1" dirty="0">
-                <a:solidFill>
-                  <a:srgbClr val="FFFFFF"/>
-                </a:solidFill>
-              </a:rPr>
-              <a:t>SCA</a:t>
-            </a:r>
-            <a:endParaRPr lang="en-US" sz="1100" dirty="0"/>
-          </a:p>
-        </p:txBody>
-      </p:sp>
-      <p:sp>
-        <p:nvSpPr>
-          <p:cNvPr id="20" name="Text 18"/>
-          <p:cNvSpPr txBox="1"/>
-          <p:nvPr/>
-        </p:nvSpPr>
-        <p:spPr>
-          <a:xfrm>
-            <a:off x="5394960" y="3310128"/>
-            <a:ext cx="6035040" cy="658368"/>
-          </a:xfrm>
-          <a:prstGeom prst="rect">
-            <a:avLst/>
-          </a:prstGeom>
-          <a:noFill/>
-          <a:ln/>
-        </p:spPr>
-        <p:txBody>
-          <a:bodyPr wrap="square" lIns="0" tIns="0" rIns="0" bIns="0" rtlCol="0" anchor="ctr"/>
-          <a:lstStyle/>
-          <a:p>
-            <a:pPr algn="l" indent="0" marL="0">
-              <a:buNone/>
-            </a:pPr>
-            <a:r>
-              <a:rPr lang="en-US" sz="1300" dirty="0">
-                <a:solidFill>
-                  <a:srgbClr val="6B7280"/>
-                </a:solidFill>
-              </a:rPr>
-              <a:t>Dependencies checked against known-vulnerability databases</a:t>
-            </a:r>
-            <a:endParaRPr lang="en-US" sz="1300" dirty="0"/>
-          </a:p>
-        </p:txBody>
-      </p:sp>
-      <p:sp>
-        <p:nvSpPr>
-          <p:cNvPr id="21" name="Shape 19"/>
-          <p:cNvSpPr/>
-          <p:nvPr/>
-        </p:nvSpPr>
-        <p:spPr>
-          <a:xfrm>
-            <a:off x="548640" y="4169664"/>
-            <a:ext cx="11036808" cy="804672"/>
-          </a:xfrm>
-          <a:prstGeom prst="roundRect">
-            <a:avLst>
-              <a:gd name="adj" fmla="val 11364"/>
-            </a:avLst>
-          </a:prstGeom>
-          <a:solidFill>
-            <a:srgbClr val="F8F9FC"/>
-          </a:solidFill>
-          <a:ln w="12700">
-            <a:solidFill>
-              <a:srgbClr val="E6E8F0"/>
-            </a:solidFill>
-            <a:prstDash val="solid"/>
-          </a:ln>
-          <a:effectLst>
-            <a:outerShdw sx="100000" sy="100000" kx="0" ky="0" algn="bl" rotWithShape="0" blurRad="76200" dist="25400" dir="5400000">
-              <a:srgbClr val="9AA3B2">
-                <a:alpha val="25000"/>
-              </a:srgbClr>
-            </a:outerShdw>
-          </a:effectLst>
-        </p:spPr>
-      </p:sp>
-      <p:sp>
-        <p:nvSpPr>
-          <p:cNvPr id="22" name="Shape 20"/>
-          <p:cNvSpPr/>
-          <p:nvPr/>
-        </p:nvSpPr>
-        <p:spPr>
-          <a:xfrm>
-            <a:off x="777240" y="4443984"/>
-            <a:ext cx="256032" cy="256032"/>
-          </a:xfrm>
-          <a:prstGeom prst="ellipse">
-            <a:avLst/>
-          </a:prstGeom>
-          <a:solidFill>
-            <a:srgbClr val="D97706"/>
-          </a:solidFill>
-          <a:ln/>
-        </p:spPr>
-      </p:sp>
-      <p:sp>
-        <p:nvSpPr>
-          <p:cNvPr id="23" name="Text 21"/>
-          <p:cNvSpPr txBox="1"/>
-          <p:nvPr/>
-        </p:nvSpPr>
-        <p:spPr>
-          <a:xfrm>
-            <a:off x="1188720" y="4242816"/>
-            <a:ext cx="2377440" cy="658368"/>
-          </a:xfrm>
-          <a:prstGeom prst="rect">
-            <a:avLst/>
-          </a:prstGeom>
-          <a:noFill/>
-          <a:ln/>
-        </p:spPr>
-        <p:txBody>
-          <a:bodyPr wrap="square" lIns="0" tIns="0" rIns="0" bIns="0" rtlCol="0" anchor="ctr"/>
-          <a:lstStyle/>
-          <a:p>
-            <a:pPr algn="l" indent="0" marL="0">
-              <a:buNone/>
-            </a:pPr>
-            <a:r>
-              <a:rPr lang="en-US" sz="1500" b="1" dirty="0">
-                <a:solidFill>
-                  <a:srgbClr val="0F1424"/>
-                </a:solidFill>
-              </a:rPr>
-              <a:t>Aqua Trivy</a:t>
-            </a:r>
-            <a:endParaRPr lang="en-US" sz="1500" dirty="0"/>
-          </a:p>
-        </p:txBody>
-      </p:sp>
-      <p:sp>
-        <p:nvSpPr>
-          <p:cNvPr id="24" name="Shape 22"/>
-          <p:cNvSpPr/>
-          <p:nvPr/>
-        </p:nvSpPr>
-        <p:spPr>
-          <a:xfrm>
-            <a:off x="3611880" y="4389120"/>
-            <a:ext cx="1554480" cy="365760"/>
-          </a:xfrm>
-          <a:prstGeom prst="roundRect">
-            <a:avLst>
-              <a:gd name="adj" fmla="val 15000"/>
-            </a:avLst>
-          </a:prstGeom>
-          <a:solidFill>
-            <a:srgbClr val="D97706"/>
-          </a:solidFill>
-          <a:ln/>
-        </p:spPr>
-      </p:sp>
-      <p:sp>
-        <p:nvSpPr>
-          <p:cNvPr id="25" name="Text 23"/>
-          <p:cNvSpPr txBox="1"/>
-          <p:nvPr/>
-        </p:nvSpPr>
-        <p:spPr>
-          <a:xfrm>
-            <a:off x="3611880" y="4389120"/>
-            <a:ext cx="1554480" cy="365760"/>
-          </a:xfrm>
-          <a:prstGeom prst="rect">
-            <a:avLst/>
-          </a:prstGeom>
-          <a:noFill/>
-          <a:ln/>
-        </p:spPr>
-        <p:txBody>
-          <a:bodyPr wrap="square" lIns="0" tIns="0" rIns="0" bIns="0" rtlCol="0" anchor="ctr"/>
-          <a:lstStyle/>
-          <a:p>
-            <a:pPr algn="ctr" indent="0" marL="0">
-              <a:buNone/>
-            </a:pPr>
-            <a:r>
-              <a:rPr lang="en-US" sz="1100" b="1" dirty="0">
-                <a:solidFill>
-                  <a:srgbClr val="FFFFFF"/>
-                </a:solidFill>
-              </a:rPr>
-              <a:t>Container CVEs</a:t>
-            </a:r>
-            <a:endParaRPr lang="en-US" sz="1100" dirty="0"/>
-          </a:p>
-        </p:txBody>
-      </p:sp>
-      <p:sp>
-        <p:nvSpPr>
-          <p:cNvPr id="26" name="Text 24"/>
-          <p:cNvSpPr txBox="1"/>
-          <p:nvPr/>
-        </p:nvSpPr>
-        <p:spPr>
-          <a:xfrm>
-            <a:off x="5394960" y="4242816"/>
-            <a:ext cx="6035040" cy="658368"/>
-          </a:xfrm>
-          <a:prstGeom prst="rect">
-            <a:avLst/>
-          </a:prstGeom>
-          <a:noFill/>
-          <a:ln/>
-        </p:spPr>
-        <p:txBody>
-          <a:bodyPr wrap="square" lIns="0" tIns="0" rIns="0" bIns="0" rtlCol="0" anchor="ctr"/>
-          <a:lstStyle/>
-          <a:p>
-            <a:pPr algn="l" indent="0" marL="0">
-              <a:buNone/>
-            </a:pPr>
-            <a:r>
-              <a:rPr lang="en-US" sz="1300" dirty="0">
-                <a:solidFill>
-                  <a:srgbClr val="6B7280"/>
-                </a:solidFill>
-              </a:rPr>
-              <a:t>Scans OS packages &amp; libraries in the built image</a:t>
-            </a:r>
-            <a:endParaRPr lang="en-US" sz="1300" dirty="0"/>
-          </a:p>
-        </p:txBody>
-      </p:sp>
-      <p:sp>
-        <p:nvSpPr>
-          <p:cNvPr id="27" name="Shape 25"/>
-          <p:cNvSpPr/>
-          <p:nvPr/>
-        </p:nvSpPr>
-        <p:spPr>
-          <a:xfrm>
-            <a:off x="548640" y="5102352"/>
-            <a:ext cx="11036808" cy="804672"/>
-          </a:xfrm>
-          <a:prstGeom prst="roundRect">
-            <a:avLst>
-              <a:gd name="adj" fmla="val 11364"/>
-            </a:avLst>
-          </a:prstGeom>
-          <a:solidFill>
-            <a:srgbClr val="F8F9FC"/>
-          </a:solidFill>
-          <a:ln w="12700">
-            <a:solidFill>
-              <a:srgbClr val="E6E8F0"/>
-            </a:solidFill>
-            <a:prstDash val="solid"/>
-          </a:ln>
-          <a:effectLst>
-            <a:outerShdw sx="100000" sy="100000" kx="0" ky="0" algn="bl" rotWithShape="0" blurRad="76200" dist="25400" dir="5400000">
-              <a:srgbClr val="9AA3B2">
-                <a:alpha val="25000"/>
-              </a:srgbClr>
-            </a:outerShdw>
-          </a:effectLst>
-        </p:spPr>
-      </p:sp>
-      <p:sp>
-        <p:nvSpPr>
-          <p:cNvPr id="28" name="Shape 26"/>
-          <p:cNvSpPr/>
-          <p:nvPr/>
-        </p:nvSpPr>
-        <p:spPr>
-          <a:xfrm>
-            <a:off x="777240" y="5376672"/>
-            <a:ext cx="256032" cy="256032"/>
-          </a:xfrm>
-          <a:prstGeom prst="ellipse">
-            <a:avLst/>
-          </a:prstGeom>
-          <a:solidFill>
-            <a:srgbClr val="DC2626"/>
-          </a:solidFill>
-          <a:ln/>
-        </p:spPr>
-      </p:sp>
-      <p:sp>
-        <p:nvSpPr>
-          <p:cNvPr id="29" name="Text 27"/>
-          <p:cNvSpPr txBox="1"/>
-          <p:nvPr/>
-        </p:nvSpPr>
-        <p:spPr>
-          <a:xfrm>
-            <a:off x="1188720" y="5175504"/>
-            <a:ext cx="2377440" cy="658368"/>
-          </a:xfrm>
-          <a:prstGeom prst="rect">
-            <a:avLst/>
-          </a:prstGeom>
-          <a:noFill/>
-          <a:ln/>
-        </p:spPr>
-        <p:txBody>
-          <a:bodyPr wrap="square" lIns="0" tIns="0" rIns="0" bIns="0" rtlCol="0" anchor="ctr"/>
-          <a:lstStyle/>
-          <a:p>
-            <a:pPr algn="l" indent="0" marL="0">
-              <a:buNone/>
-            </a:pPr>
-            <a:r>
-              <a:rPr lang="en-US" sz="1500" b="1" dirty="0">
-                <a:solidFill>
-                  <a:srgbClr val="0F1424"/>
-                </a:solidFill>
-              </a:rPr>
-              <a:t>Security gate</a:t>
-            </a:r>
-            <a:endParaRPr lang="en-US" sz="1500" dirty="0"/>
-          </a:p>
-        </p:txBody>
-      </p:sp>
-      <p:sp>
-        <p:nvSpPr>
-          <p:cNvPr id="30" name="Shape 28"/>
-          <p:cNvSpPr/>
-          <p:nvPr/>
-        </p:nvSpPr>
-        <p:spPr>
-          <a:xfrm>
-            <a:off x="3611880" y="5321808"/>
-            <a:ext cx="1554480" cy="365760"/>
-          </a:xfrm>
-          <a:prstGeom prst="roundRect">
-            <a:avLst>
-              <a:gd name="adj" fmla="val 15000"/>
-            </a:avLst>
-          </a:prstGeom>
-          <a:solidFill>
-            <a:srgbClr val="DC2626"/>
-          </a:solidFill>
-          <a:ln/>
-        </p:spPr>
-      </p:sp>
-      <p:sp>
-        <p:nvSpPr>
-          <p:cNvPr id="31" name="Text 29"/>
-          <p:cNvSpPr txBox="1"/>
-          <p:nvPr/>
-        </p:nvSpPr>
-        <p:spPr>
-          <a:xfrm>
-            <a:off x="3611880" y="5321808"/>
-            <a:ext cx="1554480" cy="365760"/>
-          </a:xfrm>
-          <a:prstGeom prst="rect">
-            <a:avLst/>
-          </a:prstGeom>
-          <a:noFill/>
-          <a:ln/>
-        </p:spPr>
-        <p:txBody>
-          <a:bodyPr wrap="square" lIns="0" tIns="0" rIns="0" bIns="0" rtlCol="0" anchor="ctr"/>
-          <a:lstStyle/>
-          <a:p>
-            <a:pPr algn="ctr" indent="0" marL="0">
-              <a:buNone/>
-            </a:pPr>
-            <a:r>
-              <a:rPr lang="en-US" sz="1100" b="1" dirty="0">
-                <a:solidFill>
-                  <a:srgbClr val="FFFFFF"/>
-                </a:solidFill>
-              </a:rPr>
-              <a:t>Enforcement</a:t>
-            </a:r>
-            <a:endParaRPr lang="en-US" sz="1100" dirty="0"/>
-          </a:p>
-        </p:txBody>
-      </p:sp>
-      <p:sp>
-        <p:nvSpPr>
-          <p:cNvPr id="32" name="Text 30"/>
-          <p:cNvSpPr txBox="1"/>
-          <p:nvPr/>
-        </p:nvSpPr>
-        <p:spPr>
-          <a:xfrm>
-            <a:off x="5394960" y="5175504"/>
-            <a:ext cx="6035040" cy="658368"/>
-          </a:xfrm>
-          <a:prstGeom prst="rect">
-            <a:avLst/>
-          </a:prstGeom>
-          <a:noFill/>
-          <a:ln/>
-        </p:spPr>
-        <p:txBody>
-          <a:bodyPr wrap="square" lIns="0" tIns="0" rIns="0" bIns="0" rtlCol="0" anchor="ctr"/>
-          <a:lstStyle/>
-          <a:p>
-            <a:pPr algn="l" indent="0" marL="0">
-              <a:buNone/>
-            </a:pPr>
-            <a:r>
-              <a:rPr lang="en-US" sz="1300" dirty="0">
-                <a:solidFill>
-                  <a:srgbClr val="6B7280"/>
-                </a:solidFill>
-              </a:rPr>
-              <a:t>Pipeline fails on HIGH/CRITICAL that have an available fix</a:t>
-            </a:r>
-            <a:endParaRPr lang="en-US" sz="1300" dirty="0"/>
-          </a:p>
-        </p:txBody>
-      </p:sp>
-      <p:sp>
-        <p:nvSpPr>
-          <p:cNvPr id="33" name="Text 31"/>
-          <p:cNvSpPr txBox="1"/>
-          <p:nvPr/>
-        </p:nvSpPr>
-        <p:spPr>
-          <a:xfrm>
-            <a:off x="548640" y="6172200"/>
-            <a:ext cx="11064240" cy="365760"/>
-          </a:xfrm>
-          <a:prstGeom prst="rect">
-            <a:avLst/>
-          </a:prstGeom>
-          <a:noFill/>
-          <a:ln/>
-        </p:spPr>
-        <p:txBody>
-          <a:bodyPr wrap="square" lIns="0" tIns="0" rIns="0" bIns="0" rtlCol="0" anchor="ctr"/>
-          <a:lstStyle/>
-          <a:p>
-            <a:pPr algn="l" indent="0" marL="0">
-              <a:buNone/>
-            </a:pPr>
-            <a:r>
-              <a:rPr lang="en-US" sz="1250" i="1" dirty="0">
-                <a:solidFill>
-                  <a:srgbClr val="4F46E5"/>
-                </a:solidFill>
-              </a:rPr>
-              <a:t>Scan result: 44 HIGH / 0 CRITICAL — all in base-image OS packages with no upstream fix; every Python dependency clean.</a:t>
-            </a:r>
-            <a:endParaRPr lang="en-US" sz="1250" dirty="0"/>
+              <a:t>Trivy — 44 HIGH / 0 CRITICAL, all no-fix base-image OS CVEs</a:t>
+            </a:r>
+            <a:endParaRPr lang="en-US" sz="1050" dirty="0"/>
           </a:p>
         </p:txBody>
       </p:sp>
@@ -13761,31 +10004,31 @@
         </p:nvSpPr>
         <p:spPr>
           <a:xfrm>
-            <a:off x="640080" y="1417320"/>
-            <a:ext cx="3200400" cy="822960"/>
-          </a:xfrm>
-          <a:prstGeom prst="rect">
-            <a:avLst/>
-          </a:prstGeom>
-          <a:noFill/>
-          <a:ln/>
-        </p:spPr>
-        <p:txBody>
-          <a:bodyPr wrap="square" lIns="0" tIns="0" rIns="0" bIns="0" rtlCol="0" anchor="b"/>
+            <a:off x="548640" y="1325880"/>
+            <a:ext cx="4892040" cy="914400"/>
+          </a:xfrm>
+          <a:prstGeom prst="rect">
+            <a:avLst/>
+          </a:prstGeom>
+          <a:noFill/>
+          <a:ln/>
+        </p:spPr>
+        <p:txBody>
+          <a:bodyPr wrap="square" lIns="0" tIns="0" rIns="0" bIns="0" rtlCol="0" anchor="ctr"/>
           <a:lstStyle/>
           <a:p>
             <a:pPr algn="l" indent="0" marL="0">
               <a:buNone/>
             </a:pPr>
             <a:r>
-              <a:rPr lang="en-US" sz="3200" b="1" dirty="0">
-                <a:solidFill>
-                  <a:srgbClr val="4F46E5"/>
-                </a:solidFill>
-              </a:rPr>
-              <a:t>10.20.0.0/16</a:t>
-            </a:r>
-            <a:endParaRPr lang="en-US" sz="3200" dirty="0"/>
+              <a:rPr lang="en-US" sz="1550" b="1" dirty="0">
+                <a:solidFill>
+                  <a:srgbClr val="141B2D"/>
+                </a:solidFill>
+              </a:rPr>
+              <a:t>Terraform provisions the whole AWS footprint in ap-south-1.</a:t>
+            </a:r>
+            <a:endParaRPr lang="en-US" sz="1550" dirty="0"/>
           </a:p>
         </p:txBody>
       </p:sp>
@@ -13797,8 +10040,8 @@
         </p:nvSpPr>
         <p:spPr>
           <a:xfrm>
-            <a:off x="640080" y="2286000"/>
-            <a:ext cx="3200400" cy="457200"/>
+            <a:off x="585216" y="2331720"/>
+            <a:ext cx="4846320" cy="3566160"/>
           </a:xfrm>
           <a:prstGeom prst="rect">
             <a:avLst/>
@@ -13810,183 +10053,115 @@
           <a:bodyPr wrap="square" lIns="0" tIns="0" rIns="0" bIns="0" rtlCol="0" anchor="ctr"/>
           <a:lstStyle/>
           <a:p>
-            <a:pPr algn="l" indent="0" marL="0">
-              <a:buNone/>
-            </a:pPr>
-            <a:r>
-              <a:rPr lang="en-US" sz="1300" dirty="0">
-                <a:solidFill>
-                  <a:srgbClr val="6B7280"/>
-                </a:solidFill>
-              </a:rPr>
-              <a:t>VPC CIDR (ap-south-1)</a:t>
-            </a:r>
-            <a:endParaRPr lang="en-US" sz="1300" dirty="0"/>
-          </a:p>
-        </p:txBody>
-      </p:sp>
-      <p:sp>
-        <p:nvSpPr>
-          <p:cNvPr id="5" name="Text 3"/>
-          <p:cNvSpPr txBox="1"/>
-          <p:nvPr/>
-        </p:nvSpPr>
-        <p:spPr>
-          <a:xfrm>
-            <a:off x="4206240" y="1417320"/>
-            <a:ext cx="2743200" cy="822960"/>
-          </a:xfrm>
-          <a:prstGeom prst="rect">
-            <a:avLst/>
-          </a:prstGeom>
-          <a:noFill/>
-          <a:ln/>
-        </p:spPr>
-        <p:txBody>
-          <a:bodyPr wrap="square" lIns="0" tIns="0" rIns="0" bIns="0" rtlCol="0" anchor="b"/>
-          <a:lstStyle/>
-          <a:p>
-            <a:pPr algn="l" indent="0" marL="0">
-              <a:buNone/>
-            </a:pPr>
-            <a:r>
-              <a:rPr lang="en-US" sz="4000" b="1" dirty="0">
-                <a:solidFill>
-                  <a:srgbClr val="00A896"/>
-                </a:solidFill>
-              </a:rPr>
-              <a:t>2 + 2</a:t>
-            </a:r>
-            <a:endParaRPr lang="en-US" sz="4000" dirty="0"/>
-          </a:p>
-        </p:txBody>
-      </p:sp>
-      <p:sp>
-        <p:nvSpPr>
-          <p:cNvPr id="6" name="Text 4"/>
-          <p:cNvSpPr txBox="1"/>
-          <p:nvPr/>
-        </p:nvSpPr>
-        <p:spPr>
-          <a:xfrm>
-            <a:off x="4206240" y="2286000"/>
-            <a:ext cx="2743200" cy="457200"/>
-          </a:xfrm>
-          <a:prstGeom prst="rect">
-            <a:avLst/>
-          </a:prstGeom>
-          <a:noFill/>
-          <a:ln/>
-        </p:spPr>
-        <p:txBody>
-          <a:bodyPr wrap="square" lIns="0" tIns="0" rIns="0" bIns="0" rtlCol="0" anchor="ctr"/>
-          <a:lstStyle/>
-          <a:p>
-            <a:pPr algn="l" indent="0" marL="0">
-              <a:buNone/>
-            </a:pPr>
-            <a:r>
-              <a:rPr lang="en-US" sz="1300" dirty="0">
-                <a:solidFill>
-                  <a:srgbClr val="6B7280"/>
-                </a:solidFill>
-              </a:rPr>
-              <a:t>Public / private subnets</a:t>
-            </a:r>
-            <a:endParaRPr lang="en-US" sz="1300" dirty="0"/>
-          </a:p>
-        </p:txBody>
-      </p:sp>
-      <p:sp>
-        <p:nvSpPr>
-          <p:cNvPr id="7" name="Text 5"/>
-          <p:cNvSpPr txBox="1"/>
-          <p:nvPr/>
-        </p:nvSpPr>
-        <p:spPr>
-          <a:xfrm>
-            <a:off x="7406640" y="1417320"/>
-            <a:ext cx="2926080" cy="822960"/>
-          </a:xfrm>
-          <a:prstGeom prst="rect">
-            <a:avLst/>
-          </a:prstGeom>
-          <a:noFill/>
-          <a:ln/>
-        </p:spPr>
-        <p:txBody>
-          <a:bodyPr wrap="square" lIns="0" tIns="0" rIns="0" bIns="0" rtlCol="0" anchor="b"/>
-          <a:lstStyle/>
-          <a:p>
-            <a:pPr algn="l" indent="0" marL="0">
-              <a:buNone/>
-            </a:pPr>
-            <a:r>
-              <a:rPr lang="en-US" sz="4000" b="1" dirty="0">
-                <a:solidFill>
-                  <a:srgbClr val="16A34A"/>
-                </a:solidFill>
-              </a:rPr>
-              <a:t>EKS 1.34</a:t>
-            </a:r>
-            <a:endParaRPr lang="en-US" sz="4000" dirty="0"/>
-          </a:p>
-        </p:txBody>
-      </p:sp>
-      <p:sp>
-        <p:nvSpPr>
-          <p:cNvPr id="8" name="Text 6"/>
-          <p:cNvSpPr txBox="1"/>
-          <p:nvPr/>
-        </p:nvSpPr>
-        <p:spPr>
-          <a:xfrm>
-            <a:off x="7406640" y="2286000"/>
-            <a:ext cx="2926080" cy="457200"/>
-          </a:xfrm>
-          <a:prstGeom prst="rect">
-            <a:avLst/>
-          </a:prstGeom>
-          <a:noFill/>
-          <a:ln/>
-        </p:spPr>
-        <p:txBody>
-          <a:bodyPr wrap="square" lIns="0" tIns="0" rIns="0" bIns="0" rtlCol="0" anchor="ctr"/>
-          <a:lstStyle/>
-          <a:p>
-            <a:pPr algn="l" indent="0" marL="0">
-              <a:buNone/>
-            </a:pPr>
-            <a:r>
-              <a:rPr lang="en-US" sz="1300" dirty="0">
-                <a:solidFill>
-                  <a:srgbClr val="6B7280"/>
-                </a:solidFill>
-              </a:rPr>
-              <a:t>2-node managed group</a:t>
-            </a:r>
-            <a:endParaRPr lang="en-US" sz="1300" dirty="0"/>
-          </a:p>
-        </p:txBody>
-      </p:sp>
-      <p:sp>
-        <p:nvSpPr>
-          <p:cNvPr id="9" name="Shape 7"/>
+            <a:pPr marL="342900" indent="-342900">
+              <a:spcAft>
+                <a:spcPts val="1300"/>
+              </a:spcAft>
+              <a:buSzPct val="100000"/>
+              <a:buChar char="•"/>
+            </a:pPr>
+            <a:r>
+              <a:rPr lang="en-US" sz="1400" dirty="0">
+                <a:solidFill>
+                  <a:srgbClr val="141B2D"/>
+                </a:solidFill>
+              </a:rPr>
+              <a:t>VPC 10.20.0.0/16 — 2 public + 2 private subnets + NAT</a:t>
+            </a:r>
+            <a:endParaRPr lang="en-US" sz="1400" dirty="0"/>
+          </a:p>
+          <a:p>
+            <a:pPr marL="342900" indent="-342900">
+              <a:spcAft>
+                <a:spcPts val="1300"/>
+              </a:spcAft>
+              <a:buSzPct val="100000"/>
+              <a:buChar char="•"/>
+            </a:pPr>
+            <a:r>
+              <a:rPr lang="en-US" sz="1400" dirty="0">
+                <a:solidFill>
+                  <a:srgbClr val="141B2D"/>
+                </a:solidFill>
+              </a:rPr>
+              <a:t>EKS 1.34 with a 2-node managed group</a:t>
+            </a:r>
+            <a:endParaRPr lang="en-US" sz="1400" dirty="0"/>
+          </a:p>
+          <a:p>
+            <a:pPr marL="342900" indent="-342900">
+              <a:spcAft>
+                <a:spcPts val="1300"/>
+              </a:spcAft>
+              <a:buSzPct val="100000"/>
+              <a:buChar char="•"/>
+            </a:pPr>
+            <a:r>
+              <a:rPr lang="en-US" sz="1400" dirty="0">
+                <a:solidFill>
+                  <a:srgbClr val="141B2D"/>
+                </a:solidFill>
+              </a:rPr>
+              <a:t>IAM roles, OIDC provider &amp; KMS key</a:t>
+            </a:r>
+            <a:endParaRPr lang="en-US" sz="1400" dirty="0"/>
+          </a:p>
+          <a:p>
+            <a:pPr marL="342900" indent="-342900">
+              <a:spcAft>
+                <a:spcPts val="1300"/>
+              </a:spcAft>
+              <a:buSzPct val="100000"/>
+              <a:buChar char="•"/>
+            </a:pPr>
+            <a:r>
+              <a:rPr lang="en-US" sz="1400" dirty="0">
+                <a:solidFill>
+                  <a:srgbClr val="141B2D"/>
+                </a:solidFill>
+              </a:rPr>
+              <a:t>terraform.tfvars.example — no secrets committed</a:t>
+            </a:r>
+            <a:endParaRPr lang="en-US" sz="1400" dirty="0"/>
+          </a:p>
+          <a:p>
+            <a:pPr marL="342900" indent="-342900">
+              <a:spcAft>
+                <a:spcPts val="1300"/>
+              </a:spcAft>
+              <a:buSzPct val="100000"/>
+              <a:buChar char="•"/>
+            </a:pPr>
+            <a:r>
+              <a:rPr lang="en-US" sz="1400" dirty="0">
+                <a:solidFill>
+                  <a:srgbClr val="141B2D"/>
+                </a:solidFill>
+              </a:rPr>
+              <a:t>terraform destroy → 0 resources, $0 cost</a:t>
+            </a:r>
+            <a:endParaRPr lang="en-US" sz="1400" dirty="0"/>
+          </a:p>
+        </p:txBody>
+      </p:sp>
+      <p:sp>
+        <p:nvSpPr>
+          <p:cNvPr id="5" name="Shape 3"/>
           <p:cNvSpPr/>
           <p:nvPr/>
         </p:nvSpPr>
         <p:spPr>
           <a:xfrm>
-            <a:off x="548640" y="3017520"/>
-            <a:ext cx="5486400" cy="2926080"/>
+            <a:off x="5669280" y="1371600"/>
+            <a:ext cx="5961888" cy="4663440"/>
           </a:xfrm>
           <a:prstGeom prst="roundRect">
             <a:avLst>
-              <a:gd name="adj" fmla="val 3125"/>
+              <a:gd name="adj" fmla="val 1176"/>
             </a:avLst>
           </a:prstGeom>
           <a:solidFill>
-            <a:srgbClr val="F8F9FC"/>
+            <a:srgbClr val="FFFFFF"/>
           </a:solidFill>
           <a:ln w="12700">
             <a:solidFill>
@@ -13995,24 +10170,47 @@
             <a:prstDash val="solid"/>
           </a:ln>
           <a:effectLst>
-            <a:outerShdw sx="100000" sy="100000" kx="0" ky="0" algn="bl" rotWithShape="0" blurRad="76200" dist="25400" dir="5400000">
-              <a:srgbClr val="9AA3B2">
-                <a:alpha val="25000"/>
+            <a:outerShdw sx="100000" sy="100000" kx="0" ky="0" algn="bl" rotWithShape="0" blurRad="114300" dist="38100" dir="5400000">
+              <a:srgbClr val="7A8396">
+                <a:alpha val="32000"/>
               </a:srgbClr>
             </a:outerShdw>
           </a:effectLst>
         </p:spPr>
       </p:sp>
-      <p:sp>
-        <p:nvSpPr>
-          <p:cNvPr id="10" name="Text 8"/>
+      <p:pic>
+        <p:nvPicPr>
+          <p:cNvPr id="6" name="Image 0" descr="/home/narendra/Documents/devops-project/screenshot/m7-eks-console-cluster.png">    </p:cNvPr>
+          <p:cNvPicPr>
+            <a:picLocks noChangeAspect="1"/>
+          </p:cNvPicPr>
+          <p:nvPr/>
+        </p:nvPicPr>
+        <p:blipFill>
+          <a:blip r:embed="rId1"/>
+          <a:srcRect l="0" r="0" t="0" b="0"/>
+          <a:stretch/>
+        </p:blipFill>
+        <p:spPr>
+          <a:xfrm>
+            <a:off x="5815584" y="1517904"/>
+            <a:ext cx="5669280" cy="3986784"/>
+          </a:xfrm>
+          <a:prstGeom prst="rect">
+            <a:avLst/>
+          </a:prstGeom>
+        </p:spPr>
+      </p:pic>
+      <p:sp>
+        <p:nvSpPr>
+          <p:cNvPr id="7" name="Text 4"/>
           <p:cNvSpPr txBox="1"/>
           <p:nvPr/>
         </p:nvSpPr>
         <p:spPr>
           <a:xfrm>
-            <a:off x="777240" y="3154680"/>
-            <a:ext cx="5029200" cy="365760"/>
+            <a:off x="5815584" y="5605272"/>
+            <a:ext cx="5669280" cy="384048"/>
           </a:xfrm>
           <a:prstGeom prst="rect">
             <a:avLst/>
@@ -14024,312 +10222,18 @@
           <a:bodyPr wrap="square" lIns="0" tIns="0" rIns="0" bIns="0" rtlCol="0" anchor="ctr"/>
           <a:lstStyle/>
           <a:p>
-            <a:pPr algn="l" indent="0" marL="0">
-              <a:buNone/>
-            </a:pPr>
-            <a:r>
-              <a:rPr lang="en-US" sz="1500" b="1" dirty="0">
-                <a:solidFill>
-                  <a:srgbClr val="0F1424"/>
-                </a:solidFill>
-              </a:rPr>
-              <a:t>Terraform provisions</a:t>
-            </a:r>
-            <a:endParaRPr lang="en-US" sz="1500" dirty="0"/>
-          </a:p>
-        </p:txBody>
-      </p:sp>
-      <p:sp>
-        <p:nvSpPr>
-          <p:cNvPr id="11" name="Text 9"/>
-          <p:cNvSpPr txBox="1"/>
-          <p:nvPr/>
-        </p:nvSpPr>
-        <p:spPr>
-          <a:xfrm>
-            <a:off x="822960" y="3611880"/>
-            <a:ext cx="5029200" cy="2194560"/>
-          </a:xfrm>
-          <a:prstGeom prst="rect">
-            <a:avLst/>
-          </a:prstGeom>
-          <a:noFill/>
-          <a:ln/>
-        </p:spPr>
-        <p:txBody>
-          <a:bodyPr wrap="square" lIns="0" tIns="0" rIns="0" bIns="0" rtlCol="0" anchor="ctr"/>
-          <a:lstStyle/>
-          <a:p>
-            <a:pPr marL="342900" indent="-342900">
-              <a:spcAft>
-                <a:spcPts val="900"/>
-              </a:spcAft>
-              <a:buSzPct val="100000"/>
-              <a:buChar char="•"/>
-            </a:pPr>
-            <a:r>
-              <a:rPr lang="en-US" sz="1350" dirty="0">
-                <a:solidFill>
-                  <a:srgbClr val="141B2D"/>
-                </a:solidFill>
-              </a:rPr>
-              <a:t>VPC with public &amp; private subnets</a:t>
-            </a:r>
-            <a:endParaRPr lang="en-US" sz="1350" dirty="0"/>
-          </a:p>
-          <a:p>
-            <a:pPr marL="342900" indent="-342900">
-              <a:spcAft>
-                <a:spcPts val="900"/>
-              </a:spcAft>
-              <a:buSzPct val="100000"/>
-              <a:buChar char="•"/>
-            </a:pPr>
-            <a:r>
-              <a:rPr lang="en-US" sz="1350" dirty="0">
-                <a:solidFill>
-                  <a:srgbClr val="141B2D"/>
-                </a:solidFill>
-              </a:rPr>
-              <a:t>Internet Gateway + NAT Gateway</a:t>
-            </a:r>
-            <a:endParaRPr lang="en-US" sz="1350" dirty="0"/>
-          </a:p>
-          <a:p>
-            <a:pPr marL="342900" indent="-342900">
-              <a:spcAft>
-                <a:spcPts val="900"/>
-              </a:spcAft>
-              <a:buSzPct val="100000"/>
-              <a:buChar char="•"/>
-            </a:pPr>
-            <a:r>
-              <a:rPr lang="en-US" sz="1350" dirty="0">
-                <a:solidFill>
-                  <a:srgbClr val="141B2D"/>
-                </a:solidFill>
-              </a:rPr>
-              <a:t>EKS control plane (public endpoint)</a:t>
-            </a:r>
-            <a:endParaRPr lang="en-US" sz="1350" dirty="0"/>
-          </a:p>
-          <a:p>
-            <a:pPr marL="342900" indent="-342900">
-              <a:spcAft>
-                <a:spcPts val="900"/>
-              </a:spcAft>
-              <a:buSzPct val="100000"/>
-              <a:buChar char="•"/>
-            </a:pPr>
-            <a:r>
-              <a:rPr lang="en-US" sz="1350" dirty="0">
-                <a:solidFill>
-                  <a:srgbClr val="141B2D"/>
-                </a:solidFill>
-              </a:rPr>
-              <a:t>Managed node group (c7i-flex.large)</a:t>
-            </a:r>
-            <a:endParaRPr lang="en-US" sz="1350" dirty="0"/>
-          </a:p>
-          <a:p>
-            <a:pPr marL="342900" indent="-342900">
-              <a:spcAft>
-                <a:spcPts val="900"/>
-              </a:spcAft>
-              <a:buSzPct val="100000"/>
-              <a:buChar char="•"/>
-            </a:pPr>
-            <a:r>
-              <a:rPr lang="en-US" sz="1350" dirty="0">
-                <a:solidFill>
-                  <a:srgbClr val="141B2D"/>
-                </a:solidFill>
-              </a:rPr>
-              <a:t>IAM roles, OIDC provider &amp; KMS key</a:t>
-            </a:r>
-            <a:endParaRPr lang="en-US" sz="1350" dirty="0"/>
-          </a:p>
-        </p:txBody>
-      </p:sp>
-      <p:sp>
-        <p:nvSpPr>
-          <p:cNvPr id="12" name="Shape 10"/>
-          <p:cNvSpPr/>
-          <p:nvPr/>
-        </p:nvSpPr>
-        <p:spPr>
-          <a:xfrm>
-            <a:off x="6263640" y="3017520"/>
-            <a:ext cx="5321808" cy="2926080"/>
-          </a:xfrm>
-          <a:prstGeom prst="roundRect">
-            <a:avLst>
-              <a:gd name="adj" fmla="val 3125"/>
-            </a:avLst>
-          </a:prstGeom>
-          <a:solidFill>
-            <a:srgbClr val="F2F4FF"/>
-          </a:solidFill>
-          <a:ln w="12700">
-            <a:solidFill>
-              <a:srgbClr val="E6E8F0"/>
-            </a:solidFill>
-            <a:prstDash val="solid"/>
-          </a:ln>
-          <a:effectLst>
-            <a:outerShdw sx="100000" sy="100000" kx="0" ky="0" algn="bl" rotWithShape="0" blurRad="76200" dist="25400" dir="5400000">
-              <a:srgbClr val="9AA3B2">
-                <a:alpha val="25000"/>
-              </a:srgbClr>
-            </a:outerShdw>
-          </a:effectLst>
-        </p:spPr>
-      </p:sp>
-      <p:sp>
-        <p:nvSpPr>
-          <p:cNvPr id="13" name="Text 11"/>
-          <p:cNvSpPr txBox="1"/>
-          <p:nvPr/>
-        </p:nvSpPr>
-        <p:spPr>
-          <a:xfrm>
-            <a:off x="6492240" y="3154680"/>
-            <a:ext cx="4846320" cy="365760"/>
-          </a:xfrm>
-          <a:prstGeom prst="rect">
-            <a:avLst/>
-          </a:prstGeom>
-          <a:noFill/>
-          <a:ln/>
-        </p:spPr>
-        <p:txBody>
-          <a:bodyPr wrap="square" lIns="0" tIns="0" rIns="0" bIns="0" rtlCol="0" anchor="ctr"/>
-          <a:lstStyle/>
-          <a:p>
-            <a:pPr algn="l" indent="0" marL="0">
-              <a:buNone/>
-            </a:pPr>
-            <a:r>
-              <a:rPr lang="en-US" sz="1500" b="1" dirty="0">
-                <a:solidFill>
-                  <a:srgbClr val="0F1424"/>
-                </a:solidFill>
-              </a:rPr>
-              <a:t>Repeatable &amp; disposable</a:t>
-            </a:r>
-            <a:endParaRPr lang="en-US" sz="1500" dirty="0"/>
-          </a:p>
-        </p:txBody>
-      </p:sp>
-      <p:sp>
-        <p:nvSpPr>
-          <p:cNvPr id="14" name="Text 12"/>
-          <p:cNvSpPr txBox="1"/>
-          <p:nvPr/>
-        </p:nvSpPr>
-        <p:spPr>
-          <a:xfrm>
-            <a:off x="6537960" y="3611880"/>
-            <a:ext cx="4846320" cy="2194560"/>
-          </a:xfrm>
-          <a:prstGeom prst="rect">
-            <a:avLst/>
-          </a:prstGeom>
-          <a:noFill/>
-          <a:ln/>
-        </p:spPr>
-        <p:txBody>
-          <a:bodyPr wrap="square" lIns="0" tIns="0" rIns="0" bIns="0" rtlCol="0" anchor="ctr"/>
-          <a:lstStyle/>
-          <a:p>
-            <a:pPr marL="342900" indent="-342900">
-              <a:spcAft>
-                <a:spcPts val="900"/>
-              </a:spcAft>
-              <a:buSzPct val="100000"/>
-              <a:buChar char="•"/>
-            </a:pPr>
-            <a:r>
-              <a:rPr lang="en-US" sz="1350" dirty="0">
-                <a:solidFill>
-                  <a:srgbClr val="141B2D"/>
-                </a:solidFill>
-              </a:rPr>
-              <a:t>init → validate → plan → apply</a:t>
-            </a:r>
-            <a:endParaRPr lang="en-US" sz="1350" dirty="0"/>
-          </a:p>
-          <a:p>
-            <a:pPr marL="342900" indent="-342900">
-              <a:spcAft>
-                <a:spcPts val="900"/>
-              </a:spcAft>
-              <a:buSzPct val="100000"/>
-              <a:buChar char="•"/>
-            </a:pPr>
-            <a:r>
-              <a:rPr lang="en-US" sz="1350" dirty="0">
-                <a:solidFill>
-                  <a:srgbClr val="141B2D"/>
-                </a:solidFill>
-              </a:rPr>
-              <a:t>Modular use of terraform-aws-modules</a:t>
-            </a:r>
-            <a:endParaRPr lang="en-US" sz="1350" dirty="0"/>
-          </a:p>
-          <a:p>
-            <a:pPr marL="342900" indent="-342900">
-              <a:spcAft>
-                <a:spcPts val="900"/>
-              </a:spcAft>
-              <a:buSzPct val="100000"/>
-              <a:buChar char="•"/>
-            </a:pPr>
-            <a:r>
-              <a:rPr lang="en-US" sz="1350" dirty="0">
-                <a:solidFill>
-                  <a:srgbClr val="141B2D"/>
-                </a:solidFill>
-              </a:rPr>
-              <a:t>terraform.tfvars.example (no secrets committed)</a:t>
-            </a:r>
-            <a:endParaRPr lang="en-US" sz="1350" dirty="0"/>
-          </a:p>
-          <a:p>
-            <a:pPr marL="342900" indent="-342900">
-              <a:spcAft>
-                <a:spcPts val="900"/>
-              </a:spcAft>
-              <a:buSzPct val="100000"/>
-              <a:buChar char="•"/>
-            </a:pPr>
-            <a:r>
-              <a:rPr lang="en-US" sz="1350" dirty="0">
-                <a:solidFill>
-                  <a:srgbClr val="141B2D"/>
-                </a:solidFill>
-              </a:rPr>
-              <a:t>terraform destroy tears it all down</a:t>
-            </a:r>
-            <a:endParaRPr lang="en-US" sz="1350" dirty="0"/>
-          </a:p>
-          <a:p>
-            <a:pPr marL="342900" indent="-342900">
-              <a:spcAft>
-                <a:spcPts val="900"/>
-              </a:spcAft>
-              <a:buSzPct val="100000"/>
-              <a:buChar char="✓"/>
-            </a:pPr>
-            <a:r>
-              <a:rPr lang="en-US" sz="1350" b="1" dirty="0">
-                <a:solidFill>
-                  <a:srgbClr val="16A34A"/>
-                </a:solidFill>
-              </a:rPr>
-              <a:t>Verified: 0 resources left → no runaway cost</a:t>
-            </a:r>
-            <a:endParaRPr lang="en-US" sz="1350" dirty="0"/>
+            <a:pPr algn="ctr" indent="0" marL="0">
+              <a:buNone/>
+            </a:pPr>
+            <a:r>
+              <a:rPr lang="en-US" sz="1050" i="1" dirty="0">
+                <a:solidFill>
+                  <a:srgbClr val="6B7280"/>
+                </a:solidFill>
+              </a:rPr>
+              <a:t>AWS Console — stockdesk-eks Active (v1.34), Project=stockdesk tags</a:t>
+            </a:r>
+            <a:endParaRPr lang="en-US" sz="1050" dirty="0"/>
           </a:p>
         </p:txBody>
       </p:sp>

--- a/StockDesk_DevOps_Capstone.pptx
+++ b/StockDesk_DevOps_Capstone.pptx
@@ -18,10 +18,9 @@
     <p:sldId id="266" r:id="rId12"/>
     <p:sldId id="267" r:id="rId13"/>
     <p:sldId id="268" r:id="rId14"/>
-    <p:sldId id="269" r:id="rId15"/>
   </p:sldIdLst>
   <p:notesMasterIdLst>
-    <p:notesMasterId r:id="rId16"/>
+    <p:notesMasterId r:id="rId15"/>
   </p:notesMasterIdLst>
   <p:sldSz cx="12192000" cy="6858000"/>
   <p:notesSz cx="6858000" cy="12192000"/>
@@ -120,62 +119,57 @@
   <p:extLst>
     <p:ext uri="{521415D9-36F7-43E2-AB2F-B90AF26B5E84}">
       <p14:sectionLst xmlns:p14="http://schemas.microsoft.com/office/powerpoint/2010/main">
-        <p14:section name="Intro" id="{04984ecf-a4fc-f23a-333f-7eb57a1e7e20}">
+        <p14:section name="Intro" id="{2bd46758-7d83-0367-4a99-38e522f5c3d8}">
           <p14:sldIdLst>
             <p14:sldId id="256"/>
           </p14:sldIdLst>
         </p14:section>
-        <p14:section name="Overview" id="{8f79db12-a2b5-3f38-44ff-d8439d791dd7}">
+        <p14:section name="Overview" id="{14ad2510-e885-1ff4-2ed5-31978a247922}">
           <p14:sldIdLst>
             <p14:sldId id="257"/>
             <p14:sldId id="259"/>
           </p14:sldIdLst>
         </p14:section>
-        <p14:section name="Architecture" id="{f54112de-1811-13aa-45d0-c484006d51a9}">
+        <p14:section name="Architecture" id="{8cb22f67-03bc-552b-223b-c6fe4b3af2ab}">
           <p14:sldIdLst>
             <p14:sldId id="258"/>
           </p14:sldIdLst>
         </p14:section>
-        <p14:section name="Application" id="{81f53874-e8d3-df0e-a34a-73055ca1fb36}">
+        <p14:section name="Application" id="{5d0f8721-87ef-c64a-f44d-8e62751e3f2c}">
           <p14:sldIdLst>
             <p14:sldId id="260"/>
           </p14:sldIdLst>
         </p14:section>
-        <p14:section name="Build &amp; Ship" id="{7a640178-f0d2-8398-a313-50eab55fb6f9}">
+        <p14:section name="Build &amp; Ship" id="{97f0cad1-90eb-eb92-1c49-e4233a37637f}">
           <p14:sldIdLst>
             <p14:sldId id="261"/>
             <p14:sldId id="262"/>
           </p14:sldIdLst>
         </p14:section>
-        <p14:section name="Security" id="{04934f06-401d-2082-3684-15ff33cd740c}">
+        <p14:section name="Security" id="{3538a434-d071-1a51-014b-6d83eb9c02e2}">
           <p14:sldIdLst>
             <p14:sldId id="263"/>
           </p14:sldIdLst>
         </p14:section>
-        <p14:section name="Infrastructure" id="{ac262668-8425-50fd-4882-05b0b99f6327}">
+        <p14:section name="Infrastructure" id="{2919b453-74c7-7430-7d99-476f92a3a569}">
           <p14:sldIdLst>
             <p14:sldId id="264"/>
             <p14:sldId id="265"/>
           </p14:sldIdLst>
         </p14:section>
-        <p14:section name="Observability" id="{aede1c35-f4e4-1489-4d23-8b678907c0c2}">
+        <p14:section name="Observability" id="{a1aa2ab0-7328-67e0-f2df-0c4b8057f8e3}">
           <p14:sldIdLst>
             <p14:sldId id="266"/>
           </p14:sldIdLst>
         </p14:section>
-        <p14:section name="GitOps" id="{d6db428b-eb13-3bc0-b1d1-00c202d00ee8}">
+        <p14:section name="GitOps" id="{fcecba71-2349-c92d-2917-fcef1ad356ae}">
           <p14:sldIdLst>
             <p14:sldId id="267"/>
           </p14:sldIdLst>
         </p14:section>
-        <p14:section name="Results" id="{f163979e-f589-3ee0-5178-1e73b94328eb}">
+        <p14:section name="Results" id="{fc0787ae-5dea-5c85-8a28-65d33515ecbb}">
           <p14:sldIdLst>
             <p14:sldId id="268"/>
-          </p14:sldIdLst>
-        </p14:section>
-        <p14:section name="Close" id="{28ad12f4-83b3-2368-5e53-79e9eae1b57e}">
-          <p14:sldIdLst>
-            <p14:sldId id="269"/>
           </p14:sldIdLst>
         </p14:section>
       </p14:sectionLst>
@@ -958,94 +952,6 @@
             <a:fld id="{F7021451-1387-4CA6-816F-3879F97B5CBC}" type="slidenum">
               <a:rPr lang="en-US"/>
               <a:t>13</a:t>
-            </a:fld>
-            <a:endParaRPr lang="en-US"/>
-          </a:p>
-        </p:txBody>
-      </p:sp>
-    </p:spTree>
-    <p:extLst>
-      <p:ext uri="{BB962C8B-B14F-4D97-AF65-F5344CB8AC3E}">
-        <p14:creationId xmlns:p14="http://schemas.microsoft.com/office/powerpoint/2010/main" val="1024086991"/>
-      </p:ext>
-    </p:extLst>
-  </p:cSld>
-  <p:clrMapOvr>
-    <a:masterClrMapping/>
-  </p:clrMapOvr>
-</p:notes>
-</file>
-
-<file path=ppt/notesSlides/notesSlide14.xml><?xml version="1.0" encoding="utf-8"?>
-<p:notes xmlns:a="http://schemas.openxmlformats.org/drawingml/2006/main" xmlns:r="http://schemas.openxmlformats.org/officeDocument/2006/relationships" xmlns:p="http://schemas.openxmlformats.org/presentationml/2006/main">
-  <p:cSld>
-    <p:spTree>
-      <p:nvGrpSpPr>
-        <p:cNvPr id="1" name=""/>
-        <p:cNvGrpSpPr/>
-        <p:nvPr/>
-      </p:nvGrpSpPr>
-      <p:grpSpPr>
-        <a:xfrm>
-          <a:off x="0" y="0"/>
-          <a:ext cx="0" cy="0"/>
-          <a:chOff x="0" y="0"/>
-          <a:chExt cx="0" cy="0"/>
-        </a:xfrm>
-      </p:grpSpPr>
-      <p:sp>
-        <p:nvSpPr>
-          <p:cNvPr id="2" name="Slide Image Placeholder 1"/>
-          <p:cNvSpPr>
-            <a:spLocks noGrp="1" noRot="1" noChangeAspect="1"/>
-          </p:cNvSpPr>
-          <p:nvPr>
-            <p:ph type="sldImg"/>
-          </p:nvPr>
-        </p:nvSpPr>
-        <p:spPr/>
-      </p:sp>
-      <p:sp>
-        <p:nvSpPr>
-          <p:cNvPr id="3" name="Notes Placeholder 2"/>
-          <p:cNvSpPr>
-            <a:spLocks noGrp="1"/>
-          </p:cNvSpPr>
-          <p:nvPr>
-            <p:ph type="body" idx="1"/>
-          </p:nvPr>
-        </p:nvSpPr>
-        <p:spPr/>
-        <p:txBody>
-          <a:bodyPr/>
-          <a:lstStyle/>
-          <a:p>
-            <a:r>
-              <a:rPr lang="en-US" dirty="0"/>
-              <a:t>Full lifecycle delivered. The two fixes show that deploying for real surfaces issues tests never will. Thanks — happy to demo live.</a:t>
-            </a:r>
-            <a:endParaRPr lang="en-US" dirty="0"/>
-          </a:p>
-        </p:txBody>
-      </p:sp>
-      <p:sp>
-        <p:nvSpPr>
-          <p:cNvPr id="4" name="Slide Number Placeholder 3"/>
-          <p:cNvSpPr>
-            <a:spLocks noGrp="1"/>
-          </p:cNvSpPr>
-          <p:nvPr>
-            <p:ph type="sldNum" sz="quarter" idx="10"/>
-          </p:nvPr>
-        </p:nvSpPr>
-        <p:spPr/>
-        <p:txBody>
-          <a:bodyPr/>
-          <a:lstStyle/>
-          <a:p>
-            <a:fld id="{F7021451-1387-4CA6-816F-3879F97B5CBC}" type="slidenum">
-              <a:rPr lang="en-US"/>
-              <a:t>14</a:t>
             </a:fld>
             <a:endParaRPr lang="en-US"/>
           </a:p>
@@ -5033,262 +4939,6 @@
               <a:t>13</a:t>
             </a:fld>
             <a:endParaRPr lang="en-US"/>
-          </a:p>
-        </p:txBody>
-      </p:sp>
-    </p:spTree>
-  </p:cSld>
-  <p:clrMapOvr>
-    <a:masterClrMapping/>
-  </p:clrMapOvr>
-</p:sld>
-</file>
-
-<file path=ppt/slides/slide14.xml><?xml version="1.0" encoding="utf-8"?>
-<p:sld xmlns:a="http://schemas.openxmlformats.org/drawingml/2006/main" xmlns:r="http://schemas.openxmlformats.org/officeDocument/2006/relationships" xmlns:p="http://schemas.openxmlformats.org/presentationml/2006/main">
-  <p:cSld name="Slide 14">
-    <p:spTree>
-      <p:nvGrpSpPr>
-        <p:cNvPr id="1" name=""/>
-        <p:cNvGrpSpPr/>
-        <p:nvPr/>
-      </p:nvGrpSpPr>
-      <p:grpSpPr>
-        <a:xfrm>
-          <a:off x="0" y="0"/>
-          <a:ext cx="0" cy="0"/>
-          <a:chOff x="0" y="0"/>
-          <a:chExt cx="0" cy="0"/>
-        </a:xfrm>
-      </p:grpSpPr>
-      <p:sp>
-        <p:nvSpPr>
-          <p:cNvPr id="2" name="Text 0"/>
-          <p:cNvSpPr/>
-          <p:nvPr>
-            <p:ph hasCustomPrompt="1"/>
-          </p:nvPr>
-        </p:nvSpPr>
-        <p:spPr>
-          <a:xfrm>
-            <a:off x="731520" y="1463040"/>
-            <a:ext cx="10698480" cy="457200"/>
-          </a:xfrm>
-          <a:prstGeom prst="rect">
-            <a:avLst/>
-          </a:prstGeom>
-          <a:noFill/>
-          <a:ln/>
-        </p:spPr>
-        <p:txBody>
-          <a:bodyPr wrap="square" rtlCol="0"/>
-          <a:lstStyle/>
-          <a:p>
-            <a:pPr indent="0" marL="0">
-              <a:buNone/>
-            </a:pPr>
-            <a:r>
-              <a:rPr lang="en-US" dirty="0">
-                <a:solidFill>
-                  <a:srgbClr val="00A896"/>
-                </a:solidFill>
-              </a:rPr>
-              <a:t>CONCLUSION</a:t>
-            </a:r>
-            <a:endParaRPr lang="en-US" dirty="0"/>
-          </a:p>
-        </p:txBody>
-      </p:sp>
-      <p:sp>
-        <p:nvSpPr>
-          <p:cNvPr id="3" name="Text 1"/>
-          <p:cNvSpPr/>
-          <p:nvPr>
-            <p:ph hasCustomPrompt="1"/>
-          </p:nvPr>
-        </p:nvSpPr>
-        <p:spPr>
-          <a:xfrm>
-            <a:off x="731520" y="1920240"/>
-            <a:ext cx="10698480" cy="1097280"/>
-          </a:xfrm>
-          <a:prstGeom prst="rect">
-            <a:avLst/>
-          </a:prstGeom>
-          <a:noFill/>
-          <a:ln/>
-        </p:spPr>
-        <p:txBody>
-          <a:bodyPr wrap="square" rtlCol="0"/>
-          <a:lstStyle/>
-          <a:p>
-            <a:pPr indent="0" marL="0">
-              <a:buNone/>
-            </a:pPr>
-            <a:r>
-              <a:rPr lang="en-US" dirty="0">
-                <a:solidFill>
-                  <a:srgbClr val="FFFFFF"/>
-                </a:solidFill>
-              </a:rPr>
-              <a:t>From laptop to monitored production</a:t>
-            </a:r>
-            <a:endParaRPr lang="en-US" dirty="0"/>
-          </a:p>
-        </p:txBody>
-      </p:sp>
-      <p:sp>
-        <p:nvSpPr>
-          <p:cNvPr id="4" name="Text 2"/>
-          <p:cNvSpPr/>
-          <p:nvPr>
-            <p:ph hasCustomPrompt="1"/>
-          </p:nvPr>
-        </p:nvSpPr>
-        <p:spPr>
-          <a:xfrm>
-            <a:off x="749808" y="3108960"/>
-            <a:ext cx="10515600" cy="2926080"/>
-          </a:xfrm>
-          <a:prstGeom prst="rect">
-            <a:avLst/>
-          </a:prstGeom>
-          <a:noFill/>
-          <a:ln/>
-        </p:spPr>
-        <p:txBody>
-          <a:bodyPr wrap="square" rtlCol="0"/>
-          <a:lstStyle/>
-          <a:p>
-            <a:pPr indent="0" marL="0">
-              <a:spcAft>
-                <a:spcPts val="1400"/>
-              </a:spcAft>
-              <a:buNone/>
-            </a:pPr>
-            <a:r>
-              <a:rPr lang="en-US" dirty="0">
-                <a:solidFill>
-                  <a:srgbClr val="CADCFC"/>
-                </a:solidFill>
-              </a:rPr>
-              <a:t>A simple app carried through the full DevOps lifecycle: containers, tested CI/CD, DevSecOps scanning, Terraform-provisioned EKS, Helm, GitOps, and observability.</a:t>
-            </a:r>
-            <a:endParaRPr lang="en-US" dirty="0"/>
-          </a:p>
-          <a:p>
-            <a:pPr indent="0" marL="0">
-              <a:spcAft>
-                <a:spcPts val="600"/>
-              </a:spcAft>
-              <a:buNone/>
-            </a:pPr>
-            <a:r>
-              <a:rPr lang="en-US" b="1" dirty="0">
-                <a:solidFill>
-                  <a:srgbClr val="FFFFFF"/>
-                </a:solidFill>
-              </a:rPr>
-              <a:t>Real bugs found by actually deploying:</a:t>
-            </a:r>
-            <a:endParaRPr lang="en-US" dirty="0"/>
-          </a:p>
-          <a:p>
-            <a:pPr marL="342900" indent="-342900">
-              <a:buSzPct val="100000"/>
-              <a:buChar char="•"/>
-            </a:pPr>
-            <a:r>
-              <a:rPr lang="en-US" dirty="0">
-                <a:solidFill>
-                  <a:srgbClr val="CADCFC"/>
-                </a:solidFill>
-              </a:rPr>
-              <a:t>alembic prepend_sys_path — migrations couldn't import app in-container</a:t>
-            </a:r>
-            <a:endParaRPr lang="en-US" dirty="0"/>
-          </a:p>
-          <a:p>
-            <a:pPr marL="342900" indent="-342900">
-              <a:spcAft>
-                <a:spcPts val="1400"/>
-              </a:spcAft>
-              <a:buSzPct val="100000"/>
-              <a:buChar char="•"/>
-            </a:pPr>
-            <a:r>
-              <a:rPr lang="en-US" dirty="0">
-                <a:solidFill>
-                  <a:srgbClr val="CADCFC"/>
-                </a:solidFill>
-              </a:rPr>
-              <a:t>Postgres PGDATA subdir — initdb fails on an EBS volume's lost+found</a:t>
-            </a:r>
-            <a:endParaRPr lang="en-US" dirty="0"/>
-          </a:p>
-          <a:p>
-            <a:pPr indent="0" marL="0">
-              <a:buNone/>
-            </a:pPr>
-            <a:r>
-              <a:rPr lang="en-US" b="1" dirty="0">
-                <a:solidFill>
-                  <a:srgbClr val="00A896"/>
-                </a:solidFill>
-              </a:rPr>
-              <a:t>Demo:  loom.com/share/17e254cf0a774a64ac4bbb830a0a734e</a:t>
-            </a:r>
-            <a:endParaRPr lang="en-US" dirty="0"/>
-          </a:p>
-          <a:p>
-            <a:pPr indent="0" marL="0">
-              <a:buNone/>
-            </a:pPr>
-            <a:r>
-              <a:rPr lang="en-US" dirty="0">
-                <a:solidFill>
-                  <a:srgbClr val="CADCFC"/>
-                </a:solidFill>
-              </a:rPr>
-              <a:t>Repo:  github.com/Naren456/devops-project</a:t>
-            </a:r>
-            <a:endParaRPr lang="en-US" dirty="0"/>
-          </a:p>
-        </p:txBody>
-      </p:sp>
-      <p:sp>
-        <p:nvSpPr>
-          <p:cNvPr id="5" name="Text 3"/>
-          <p:cNvSpPr txBox="1"/>
-          <p:nvPr/>
-        </p:nvSpPr>
-        <p:spPr>
-          <a:xfrm>
-            <a:off x="731520" y="5989320"/>
-            <a:ext cx="10698480" cy="548640"/>
-          </a:xfrm>
-          <a:prstGeom prst="rect">
-            <a:avLst/>
-          </a:prstGeom>
-          <a:noFill/>
-          <a:ln/>
-        </p:spPr>
-        <p:txBody>
-          <a:bodyPr wrap="square" lIns="0" tIns="0" rIns="0" bIns="0" rtlCol="0" anchor="ctr"/>
-          <a:lstStyle/>
-          <a:p>
-            <a:pPr algn="l" indent="0" marL="0">
-              <a:buNone/>
-            </a:pPr>
-            <a:r>
-              <a:rPr lang="en-US" sz="2200" b="1" dirty="0">
-                <a:solidFill>
-                  <a:srgbClr val="FFFFFF"/>
-                </a:solidFill>
-              </a:rPr>
-              <a:t>Thank you</a:t>
-            </a:r>
-            <a:endParaRPr lang="en-US" sz="2200" dirty="0"/>
           </a:p>
         </p:txBody>
       </p:sp>
